--- a/LabBook_3.pptx
+++ b/LabBook_3.pptx
@@ -5,19 +5,26 @@
     <p:sldMasterId id="2147483648" r:id="rId1"/>
   </p:sldMasterIdLst>
   <p:notesMasterIdLst>
-    <p:notesMasterId r:id="rId9"/>
+    <p:notesMasterId r:id="rId16"/>
   </p:notesMasterIdLst>
   <p:handoutMasterIdLst>
-    <p:handoutMasterId r:id="rId10"/>
+    <p:handoutMasterId r:id="rId17"/>
   </p:handoutMasterIdLst>
   <p:sldIdLst>
     <p:sldId id="256" r:id="rId2"/>
     <p:sldId id="289" r:id="rId3"/>
     <p:sldId id="290" r:id="rId4"/>
-    <p:sldId id="295" r:id="rId5"/>
-    <p:sldId id="296" r:id="rId6"/>
-    <p:sldId id="293" r:id="rId7"/>
-    <p:sldId id="288" r:id="rId8"/>
+    <p:sldId id="297" r:id="rId5"/>
+    <p:sldId id="298" r:id="rId6"/>
+    <p:sldId id="299" r:id="rId7"/>
+    <p:sldId id="295" r:id="rId8"/>
+    <p:sldId id="296" r:id="rId9"/>
+    <p:sldId id="300" r:id="rId10"/>
+    <p:sldId id="301" r:id="rId11"/>
+    <p:sldId id="293" r:id="rId12"/>
+    <p:sldId id="302" r:id="rId13"/>
+    <p:sldId id="303" r:id="rId14"/>
+    <p:sldId id="288" r:id="rId15"/>
   </p:sldIdLst>
   <p:sldSz cx="12192000" cy="6858000"/>
   <p:notesSz cx="12192000" cy="6858000"/>
@@ -232,7 +239,7 @@
           <a:p>
             <a:fld id="{8438F8DC-35B0-48E6-A86E-42F1F08DD00F}" type="datetimeFigureOut">
               <a:rPr lang="es-ES" smtClean="0"/>
-              <a:t>02/03/2026</a:t>
+              <a:t>23/03/2026</a:t>
             </a:fld>
             <a:endParaRPr lang="es-ES"/>
           </a:p>
@@ -409,7 +416,7 @@
           <a:p>
             <a:fld id="{FACBDC12-F39B-4B97-8F4D-6734F9D366FF}" type="datetimeFigureOut">
               <a:rPr lang="es-ES" smtClean="0"/>
-              <a:t>02/03/2026</a:t>
+              <a:t>23/03/2026</a:t>
             </a:fld>
             <a:endParaRPr lang="es-ES"/>
           </a:p>
@@ -849,7 +856,7 @@
           <a:p>
             <a:fld id="{676223B9-C868-4436-87D9-1A3152E1157A}" type="slidenum">
               <a:rPr lang="es-ES" smtClean="0"/>
-              <a:t>4</a:t>
+              <a:t>7</a:t>
             </a:fld>
             <a:endParaRPr lang="es-ES"/>
           </a:p>
@@ -957,7 +964,7 @@
           <a:p>
             <a:fld id="{676223B9-C868-4436-87D9-1A3152E1157A}" type="slidenum">
               <a:rPr lang="es-ES" smtClean="0"/>
-              <a:t>5</a:t>
+              <a:t>8</a:t>
             </a:fld>
             <a:endParaRPr lang="es-ES"/>
           </a:p>
@@ -1065,7 +1072,7 @@
           <a:p>
             <a:fld id="{676223B9-C868-4436-87D9-1A3152E1157A}" type="slidenum">
               <a:rPr lang="es-ES" smtClean="0"/>
-              <a:t>6</a:t>
+              <a:t>11</a:t>
             </a:fld>
             <a:endParaRPr lang="es-ES"/>
           </a:p>
@@ -2544,7 +2551,7 @@
         <p:spPr>
           <a:xfrm>
             <a:off x="2749676" y="4919853"/>
-            <a:ext cx="8299324" cy="505267"/>
+            <a:ext cx="8299324" cy="1010533"/>
           </a:xfrm>
           <a:prstGeom prst="rect">
             <a:avLst/>
@@ -2590,8 +2597,18 @@
                 <a:latin typeface="Lucida Sans"/>
                 <a:cs typeface="Lucida Sans"/>
               </a:rPr>
-              <a:t> I - MZI</a:t>
-            </a:r>
+              <a:t> I – MZI</a:t>
+            </a:r>
+          </a:p>
+          <a:p>
+            <a:pPr marL="12700">
+              <a:lnSpc>
+                <a:spcPct val="100000"/>
+              </a:lnSpc>
+              <a:spcBef>
+                <a:spcPts val="100"/>
+              </a:spcBef>
+            </a:pPr>
             <a:endParaRPr sz="3200" dirty="0">
               <a:latin typeface="Lucida Sans"/>
               <a:cs typeface="Lucida Sans"/>
@@ -2636,11 +2653,11 @@
               <a:t>Student</a:t>
             </a:r>
             <a:r>
-              <a:rPr lang="es-ES" spc="165" dirty="0">
+              <a:rPr lang="es-ES" spc="165">
                 <a:latin typeface="Arial"/>
                 <a:cs typeface="Arial"/>
               </a:rPr>
-              <a:t>: </a:t>
+              <a:t>: Marcos Carañana Castillo </a:t>
             </a:r>
             <a:endParaRPr sz="1800" dirty="0">
               <a:latin typeface="Arial"/>
@@ -2702,6 +2719,2146 @@
             <a:fld id="{B6F15528-21DE-4FAA-801E-634DDDAF4B2B}" type="slidenum">
               <a:rPr lang="es-ES" smtClean="0"/>
               <a:t>1</a:t>
+            </a:fld>
+            <a:endParaRPr lang="es-ES"/>
+          </a:p>
+        </p:txBody>
+      </p:sp>
+    </p:spTree>
+  </p:cSld>
+  <p:clrMapOvr>
+    <a:masterClrMapping/>
+  </p:clrMapOvr>
+</p:sld>
+</file>
+
+<file path=ppt/slides/slide10.xml><?xml version="1.0" encoding="utf-8"?>
+<p:sld xmlns:a="http://schemas.openxmlformats.org/drawingml/2006/main" xmlns:r="http://schemas.openxmlformats.org/officeDocument/2006/relationships" xmlns:p="http://schemas.openxmlformats.org/presentationml/2006/main">
+  <p:cSld>
+    <p:spTree>
+      <p:nvGrpSpPr>
+        <p:cNvPr id="1" name=""/>
+        <p:cNvGrpSpPr/>
+        <p:nvPr/>
+      </p:nvGrpSpPr>
+      <p:grpSpPr>
+        <a:xfrm>
+          <a:off x="0" y="0"/>
+          <a:ext cx="0" cy="0"/>
+          <a:chOff x="0" y="0"/>
+          <a:chExt cx="0" cy="0"/>
+        </a:xfrm>
+      </p:grpSpPr>
+      <p:sp>
+        <p:nvSpPr>
+          <p:cNvPr id="3" name="Marcador de texto 2">
+            <a:extLst>
+              <a:ext uri="{FF2B5EF4-FFF2-40B4-BE49-F238E27FC236}">
+                <a16:creationId xmlns:a16="http://schemas.microsoft.com/office/drawing/2014/main" id="{50C38A44-0BD0-C493-6791-0633A243EF4C}"/>
+              </a:ext>
+            </a:extLst>
+          </p:cNvPr>
+          <p:cNvSpPr>
+            <a:spLocks noGrp="1"/>
+          </p:cNvSpPr>
+          <p:nvPr>
+            <p:ph type="body" idx="1"/>
+          </p:nvPr>
+        </p:nvSpPr>
+        <p:spPr>
+          <a:xfrm>
+            <a:off x="762000" y="5449747"/>
+            <a:ext cx="10972800" cy="553998"/>
+          </a:xfrm>
+        </p:spPr>
+        <p:txBody>
+          <a:bodyPr/>
+          <a:lstStyle/>
+          <a:p>
+            <a:r>
+              <a:rPr lang="es-ES" dirty="0"/>
+              <a:t>Con esta simulación se comprueba que la matriz de transferencia de un MZI se modela de igual manera con la implementación matemática que mediante SAX. </a:t>
+            </a:r>
+          </a:p>
+        </p:txBody>
+      </p:sp>
+      <p:sp>
+        <p:nvSpPr>
+          <p:cNvPr id="4" name="Marcador de pie de página 3">
+            <a:extLst>
+              <a:ext uri="{FF2B5EF4-FFF2-40B4-BE49-F238E27FC236}">
+                <a16:creationId xmlns:a16="http://schemas.microsoft.com/office/drawing/2014/main" id="{15FC967C-6579-2313-3B4B-C3ECDF3B647E}"/>
+              </a:ext>
+            </a:extLst>
+          </p:cNvPr>
+          <p:cNvSpPr>
+            <a:spLocks noGrp="1"/>
+          </p:cNvSpPr>
+          <p:nvPr>
+            <p:ph type="ftr" sz="quarter" idx="5"/>
+          </p:nvPr>
+        </p:nvSpPr>
+        <p:spPr/>
+        <p:txBody>
+          <a:bodyPr/>
+          <a:lstStyle/>
+          <a:p>
+            <a:pPr marL="12700">
+              <a:spcBef>
+                <a:spcPts val="15"/>
+              </a:spcBef>
+            </a:pPr>
+            <a:r>
+              <a:rPr lang="es-ES" spc="-5"/>
+              <a:t>LAB 3. INTERFEROMETERS I</a:t>
+            </a:r>
+            <a:endParaRPr lang="es-ES" spc="-5" dirty="0"/>
+          </a:p>
+        </p:txBody>
+      </p:sp>
+      <p:sp>
+        <p:nvSpPr>
+          <p:cNvPr id="5" name="Marcador de número de diapositiva 4">
+            <a:extLst>
+              <a:ext uri="{FF2B5EF4-FFF2-40B4-BE49-F238E27FC236}">
+                <a16:creationId xmlns:a16="http://schemas.microsoft.com/office/drawing/2014/main" id="{E21F52A9-902A-E2C1-43F5-38DAC8DA37E1}"/>
+              </a:ext>
+            </a:extLst>
+          </p:cNvPr>
+          <p:cNvSpPr>
+            <a:spLocks noGrp="1"/>
+          </p:cNvSpPr>
+          <p:nvPr>
+            <p:ph type="sldNum" sz="quarter" idx="7"/>
+          </p:nvPr>
+        </p:nvSpPr>
+        <p:spPr/>
+        <p:txBody>
+          <a:bodyPr/>
+          <a:lstStyle/>
+          <a:p>
+            <a:fld id="{B6F15528-21DE-4FAA-801E-634DDDAF4B2B}" type="slidenum">
+              <a:rPr lang="es-ES" smtClean="0"/>
+              <a:t>10</a:t>
+            </a:fld>
+            <a:endParaRPr lang="es-ES"/>
+          </a:p>
+        </p:txBody>
+      </p:sp>
+      <p:sp>
+        <p:nvSpPr>
+          <p:cNvPr id="6" name="Título 1">
+            <a:extLst>
+              <a:ext uri="{FF2B5EF4-FFF2-40B4-BE49-F238E27FC236}">
+                <a16:creationId xmlns:a16="http://schemas.microsoft.com/office/drawing/2014/main" id="{A8408FCE-8E42-7F12-1F72-0BAF265C7AD5}"/>
+              </a:ext>
+            </a:extLst>
+          </p:cNvPr>
+          <p:cNvSpPr>
+            <a:spLocks noGrp="1"/>
+          </p:cNvSpPr>
+          <p:nvPr>
+            <p:ph type="title"/>
+          </p:nvPr>
+        </p:nvSpPr>
+        <p:spPr>
+          <a:xfrm>
+            <a:off x="590550" y="206375"/>
+            <a:ext cx="10991850" cy="307975"/>
+          </a:xfrm>
+        </p:spPr>
+        <p:txBody>
+          <a:bodyPr/>
+          <a:lstStyle/>
+          <a:p>
+            <a:r>
+              <a:rPr lang="es-ES" dirty="0"/>
+              <a:t>3. SAX </a:t>
+            </a:r>
+            <a:r>
+              <a:rPr lang="es-ES" dirty="0" err="1"/>
+              <a:t>implementation</a:t>
+            </a:r>
+            <a:r>
+              <a:rPr lang="es-ES" dirty="0"/>
+              <a:t> vs. </a:t>
+            </a:r>
+            <a:r>
+              <a:rPr lang="es-ES" dirty="0" err="1"/>
+              <a:t>Mathematical</a:t>
+            </a:r>
+            <a:r>
+              <a:rPr lang="es-ES" dirty="0"/>
+              <a:t> </a:t>
+            </a:r>
+            <a:r>
+              <a:rPr lang="es-ES" dirty="0" err="1"/>
+              <a:t>formulation</a:t>
+            </a:r>
+            <a:r>
+              <a:rPr lang="es-ES" dirty="0"/>
+              <a:t> </a:t>
+            </a:r>
+          </a:p>
+        </p:txBody>
+      </p:sp>
+      <p:sp>
+        <p:nvSpPr>
+          <p:cNvPr id="7" name="Título 1">
+            <a:extLst>
+              <a:ext uri="{FF2B5EF4-FFF2-40B4-BE49-F238E27FC236}">
+                <a16:creationId xmlns:a16="http://schemas.microsoft.com/office/drawing/2014/main" id="{0B5A246A-4BF8-C54F-B89A-7F911B820B52}"/>
+              </a:ext>
+            </a:extLst>
+          </p:cNvPr>
+          <p:cNvSpPr txBox="1">
+            <a:spLocks/>
+          </p:cNvSpPr>
+          <p:nvPr/>
+        </p:nvSpPr>
+        <p:spPr>
+          <a:xfrm>
+            <a:off x="590550" y="694097"/>
+            <a:ext cx="10991850" cy="307777"/>
+          </a:xfrm>
+          <a:prstGeom prst="rect">
+            <a:avLst/>
+          </a:prstGeom>
+        </p:spPr>
+        <p:txBody>
+          <a:bodyPr wrap="square" lIns="0" tIns="0" rIns="0" bIns="0">
+            <a:spAutoFit/>
+          </a:bodyPr>
+          <a:lstStyle>
+            <a:lvl1pPr>
+              <a:defRPr sz="2000" b="1" i="0">
+                <a:solidFill>
+                  <a:schemeClr val="tx1"/>
+                </a:solidFill>
+                <a:latin typeface="Calibri"/>
+                <a:ea typeface="+mj-ea"/>
+                <a:cs typeface="Calibri"/>
+              </a:defRPr>
+            </a:lvl1pPr>
+          </a:lstStyle>
+          <a:p>
+            <a:r>
+              <a:rPr lang="es-ES" kern="0" dirty="0"/>
+              <a:t>3.1 </a:t>
+            </a:r>
+            <a:r>
+              <a:rPr lang="es-ES" b="0" kern="0" dirty="0" err="1"/>
+              <a:t>Unbalanced</a:t>
+            </a:r>
+            <a:r>
+              <a:rPr lang="es-ES" b="0" kern="0" dirty="0"/>
+              <a:t> </a:t>
+            </a:r>
+            <a:r>
+              <a:rPr lang="es-ES" b="0" kern="0" dirty="0" err="1"/>
+              <a:t>configuration</a:t>
+            </a:r>
+            <a:r>
+              <a:rPr lang="es-ES" b="0" kern="0" dirty="0"/>
+              <a:t>:</a:t>
+            </a:r>
+          </a:p>
+        </p:txBody>
+      </p:sp>
+      <mc:AlternateContent xmlns:mc="http://schemas.openxmlformats.org/markup-compatibility/2006" xmlns:a14="http://schemas.microsoft.com/office/drawing/2010/main">
+        <mc:Choice Requires="a14">
+          <p:sp>
+            <p:nvSpPr>
+              <p:cNvPr id="13" name="CuadroTexto 12">
+                <a:extLst>
+                  <a:ext uri="{FF2B5EF4-FFF2-40B4-BE49-F238E27FC236}">
+                    <a16:creationId xmlns:a16="http://schemas.microsoft.com/office/drawing/2014/main" id="{BB714241-CC8F-11C3-3047-82982551225A}"/>
+                  </a:ext>
+                </a:extLst>
+              </p:cNvPr>
+              <p:cNvSpPr txBox="1"/>
+              <p:nvPr/>
+            </p:nvSpPr>
+            <p:spPr>
+              <a:xfrm>
+                <a:off x="1788562" y="1148927"/>
+                <a:ext cx="2057400" cy="381515"/>
+              </a:xfrm>
+              <a:prstGeom prst="rect">
+                <a:avLst/>
+              </a:prstGeom>
+              <a:noFill/>
+            </p:spPr>
+            <p:txBody>
+              <a:bodyPr wrap="square" rtlCol="0">
+                <a:spAutoFit/>
+              </a:bodyPr>
+              <a:lstStyle/>
+              <a:p>
+                <a14:m>
+                  <m:oMath xmlns:m="http://schemas.openxmlformats.org/officeDocument/2006/math">
+                    <m:r>
+                      <m:rPr>
+                        <m:sty m:val="p"/>
+                      </m:rPr>
+                      <a:rPr lang="es-ES" i="1" smtClean="0">
+                        <a:latin typeface="Cambria Math" panose="02040503050406030204" pitchFamily="18" charset="0"/>
+                      </a:rPr>
+                      <m:t>α</m:t>
+                    </m:r>
+                    <m:r>
+                      <a:rPr lang="es-ES" b="0" i="1" smtClean="0">
+                        <a:latin typeface="Cambria Math" panose="02040503050406030204" pitchFamily="18" charset="0"/>
+                      </a:rPr>
+                      <m:t>=</m:t>
+                    </m:r>
+                    <m:r>
+                      <a:rPr lang="es-ES" i="1">
+                        <a:latin typeface="Cambria Math" panose="02040503050406030204" pitchFamily="18" charset="0"/>
+                        <a:ea typeface="Cambria Math" panose="02040503050406030204" pitchFamily="18" charset="0"/>
+                      </a:rPr>
+                      <m:t>0</m:t>
+                    </m:r>
+                  </m:oMath>
+                </a14:m>
+                <a:r>
+                  <a:rPr lang="en-US" kern="0" dirty="0">
+                    <a:solidFill>
+                      <a:sysClr val="windowText" lastClr="000000"/>
+                    </a:solidFill>
+                  </a:rPr>
+                  <a:t> and </a:t>
+                </a:r>
+                <a14:m>
+                  <m:oMath xmlns:m="http://schemas.openxmlformats.org/officeDocument/2006/math">
+                    <m:sSub>
+                      <m:sSubPr>
+                        <m:ctrlPr>
+                          <a:rPr lang="es-ES" b="0" i="1" smtClean="0">
+                            <a:latin typeface="Cambria Math" panose="02040503050406030204" pitchFamily="18" charset="0"/>
+                          </a:rPr>
+                        </m:ctrlPr>
+                      </m:sSubPr>
+                      <m:e>
+                        <m:r>
+                          <m:rPr>
+                            <m:sty m:val="p"/>
+                          </m:rPr>
+                          <a:rPr lang="es-ES" i="1" smtClean="0">
+                            <a:latin typeface="Cambria Math" panose="02040503050406030204" pitchFamily="18" charset="0"/>
+                          </a:rPr>
+                          <m:t>γ</m:t>
+                        </m:r>
+                      </m:e>
+                      <m:sub>
+                        <m:r>
+                          <a:rPr lang="es-ES" b="0" i="1" smtClean="0">
+                            <a:latin typeface="Cambria Math" panose="02040503050406030204" pitchFamily="18" charset="0"/>
+                          </a:rPr>
+                          <m:t>𝑎</m:t>
+                        </m:r>
+                        <m:r>
+                          <a:rPr lang="es-ES" b="0" i="1" smtClean="0">
+                            <a:latin typeface="Cambria Math" panose="02040503050406030204" pitchFamily="18" charset="0"/>
+                          </a:rPr>
+                          <m:t>, </m:t>
+                        </m:r>
+                        <m:r>
+                          <a:rPr lang="es-ES" b="0" i="1" smtClean="0">
+                            <a:latin typeface="Cambria Math" panose="02040503050406030204" pitchFamily="18" charset="0"/>
+                          </a:rPr>
+                          <m:t>𝑏</m:t>
+                        </m:r>
+                      </m:sub>
+                    </m:sSub>
+                    <m:r>
+                      <a:rPr lang="es-ES" b="0" i="1" smtClean="0">
+                        <a:latin typeface="Cambria Math" panose="02040503050406030204" pitchFamily="18" charset="0"/>
+                      </a:rPr>
+                      <m:t>=</m:t>
+                    </m:r>
+                    <m:r>
+                      <a:rPr lang="es-ES" i="1">
+                        <a:latin typeface="Cambria Math" panose="02040503050406030204" pitchFamily="18" charset="0"/>
+                        <a:ea typeface="Cambria Math" panose="02040503050406030204" pitchFamily="18" charset="0"/>
+                      </a:rPr>
+                      <m:t>0</m:t>
+                    </m:r>
+                  </m:oMath>
+                </a14:m>
+                <a:endParaRPr lang="es-ES" dirty="0"/>
+              </a:p>
+            </p:txBody>
+          </p:sp>
+        </mc:Choice>
+        <mc:Fallback xmlns="">
+          <p:sp>
+            <p:nvSpPr>
+              <p:cNvPr id="13" name="CuadroTexto 12">
+                <a:extLst>
+                  <a:ext uri="{FF2B5EF4-FFF2-40B4-BE49-F238E27FC236}">
+                    <a16:creationId xmlns:a16="http://schemas.microsoft.com/office/drawing/2014/main" id="{BB714241-CC8F-11C3-3047-82982551225A}"/>
+                  </a:ext>
+                </a:extLst>
+              </p:cNvPr>
+              <p:cNvSpPr txBox="1">
+                <a:spLocks noRot="1" noChangeAspect="1" noMove="1" noResize="1" noEditPoints="1" noAdjustHandles="1" noChangeArrowheads="1" noChangeShapeType="1" noTextEdit="1"/>
+              </p:cNvSpPr>
+              <p:nvPr/>
+            </p:nvSpPr>
+            <p:spPr>
+              <a:xfrm>
+                <a:off x="1788562" y="1148927"/>
+                <a:ext cx="2057400" cy="381515"/>
+              </a:xfrm>
+              <a:prstGeom prst="rect">
+                <a:avLst/>
+              </a:prstGeom>
+              <a:blipFill>
+                <a:blip r:embed="rId2"/>
+                <a:stretch>
+                  <a:fillRect t="-6349" b="-22222"/>
+                </a:stretch>
+              </a:blipFill>
+            </p:spPr>
+            <p:txBody>
+              <a:bodyPr/>
+              <a:lstStyle/>
+              <a:p>
+                <a:r>
+                  <a:rPr lang="es-ES">
+                    <a:noFill/>
+                  </a:rPr>
+                  <a:t> </a:t>
+                </a:r>
+              </a:p>
+            </p:txBody>
+          </p:sp>
+        </mc:Fallback>
+      </mc:AlternateContent>
+      <mc:AlternateContent xmlns:mc="http://schemas.openxmlformats.org/markup-compatibility/2006" xmlns:a14="http://schemas.microsoft.com/office/drawing/2010/main">
+        <mc:Choice Requires="a14">
+          <p:sp>
+            <p:nvSpPr>
+              <p:cNvPr id="14" name="CuadroTexto 13">
+                <a:extLst>
+                  <a:ext uri="{FF2B5EF4-FFF2-40B4-BE49-F238E27FC236}">
+                    <a16:creationId xmlns:a16="http://schemas.microsoft.com/office/drawing/2014/main" id="{DBA555CE-18F3-9450-2D4E-37945086D017}"/>
+                  </a:ext>
+                </a:extLst>
+              </p:cNvPr>
+              <p:cNvSpPr txBox="1"/>
+              <p:nvPr/>
+            </p:nvSpPr>
+            <p:spPr>
+              <a:xfrm>
+                <a:off x="3693562" y="1148859"/>
+                <a:ext cx="2743200" cy="369332"/>
+              </a:xfrm>
+              <a:prstGeom prst="rect">
+                <a:avLst/>
+              </a:prstGeom>
+              <a:noFill/>
+            </p:spPr>
+            <p:txBody>
+              <a:bodyPr wrap="square" rtlCol="0">
+                <a:spAutoFit/>
+              </a:bodyPr>
+              <a:lstStyle/>
+              <a:p>
+                <a14:m>
+                  <m:oMath xmlns:m="http://schemas.openxmlformats.org/officeDocument/2006/math">
+                    <m:sSub>
+                      <m:sSubPr>
+                        <m:ctrlPr>
+                          <a:rPr lang="es-ES" b="0" i="1" smtClean="0">
+                            <a:latin typeface="Cambria Math" panose="02040503050406030204" pitchFamily="18" charset="0"/>
+                          </a:rPr>
+                        </m:ctrlPr>
+                      </m:sSubPr>
+                      <m:e>
+                        <m:r>
+                          <m:rPr>
+                            <m:sty m:val="p"/>
+                          </m:rPr>
+                          <a:rPr lang="es-ES" i="1" smtClean="0">
+                            <a:latin typeface="Cambria Math" panose="02040503050406030204" pitchFamily="18" charset="0"/>
+                          </a:rPr>
+                          <m:t>k</m:t>
+                        </m:r>
+                      </m:e>
+                      <m:sub>
+                        <m:r>
+                          <a:rPr lang="es-ES" b="0" i="1" smtClean="0">
+                            <a:latin typeface="Cambria Math" panose="02040503050406030204" pitchFamily="18" charset="0"/>
+                          </a:rPr>
+                          <m:t>𝑎</m:t>
+                        </m:r>
+                      </m:sub>
+                    </m:sSub>
+                    <m:r>
+                      <a:rPr lang="es-ES" b="0" i="1" smtClean="0">
+                        <a:latin typeface="Cambria Math" panose="02040503050406030204" pitchFamily="18" charset="0"/>
+                      </a:rPr>
+                      <m:t>=</m:t>
+                    </m:r>
+                    <m:r>
+                      <a:rPr lang="es-ES" i="1">
+                        <a:latin typeface="Cambria Math" panose="02040503050406030204" pitchFamily="18" charset="0"/>
+                        <a:ea typeface="Cambria Math" panose="02040503050406030204" pitchFamily="18" charset="0"/>
+                      </a:rPr>
+                      <m:t>0</m:t>
+                    </m:r>
+                    <m:r>
+                      <a:rPr lang="es-ES" b="0" i="0" smtClean="0">
+                        <a:latin typeface="Cambria Math" panose="02040503050406030204" pitchFamily="18" charset="0"/>
+                        <a:ea typeface="Cambria Math" panose="02040503050406030204" pitchFamily="18" charset="0"/>
+                      </a:rPr>
+                      <m:t>.5</m:t>
+                    </m:r>
+                  </m:oMath>
+                </a14:m>
+                <a:r>
+                  <a:rPr lang="en-US" kern="0" dirty="0">
+                    <a:solidFill>
+                      <a:sysClr val="windowText" lastClr="000000"/>
+                    </a:solidFill>
+                  </a:rPr>
+                  <a:t> and </a:t>
+                </a:r>
+                <a14:m>
+                  <m:oMath xmlns:m="http://schemas.openxmlformats.org/officeDocument/2006/math">
+                    <m:sSub>
+                      <m:sSubPr>
+                        <m:ctrlPr>
+                          <a:rPr lang="es-ES" b="0" i="1" dirty="0" smtClean="0">
+                            <a:latin typeface="Cambria Math" panose="02040503050406030204" pitchFamily="18" charset="0"/>
+                          </a:rPr>
+                        </m:ctrlPr>
+                      </m:sSubPr>
+                      <m:e>
+                        <m:r>
+                          <m:rPr>
+                            <m:sty m:val="p"/>
+                          </m:rPr>
+                          <a:rPr lang="es-ES" i="1" dirty="0">
+                            <a:latin typeface="Cambria Math" panose="02040503050406030204" pitchFamily="18" charset="0"/>
+                          </a:rPr>
+                          <m:t>k</m:t>
+                        </m:r>
+                      </m:e>
+                      <m:sub>
+                        <m:r>
+                          <a:rPr lang="es-ES" b="0" i="1" dirty="0" smtClean="0">
+                            <a:latin typeface="Cambria Math" panose="02040503050406030204" pitchFamily="18" charset="0"/>
+                          </a:rPr>
+                          <m:t>𝑏</m:t>
+                        </m:r>
+                      </m:sub>
+                    </m:sSub>
+                    <m:r>
+                      <a:rPr lang="es-ES" b="0" i="1" smtClean="0">
+                        <a:latin typeface="Cambria Math" panose="02040503050406030204" pitchFamily="18" charset="0"/>
+                      </a:rPr>
+                      <m:t>=</m:t>
+                    </m:r>
+                    <m:r>
+                      <a:rPr lang="es-ES" i="1">
+                        <a:latin typeface="Cambria Math" panose="02040503050406030204" pitchFamily="18" charset="0"/>
+                        <a:ea typeface="Cambria Math" panose="02040503050406030204" pitchFamily="18" charset="0"/>
+                      </a:rPr>
+                      <m:t>0</m:t>
+                    </m:r>
+                    <m:r>
+                      <a:rPr lang="es-ES" b="0" i="1" smtClean="0">
+                        <a:latin typeface="Cambria Math" panose="02040503050406030204" pitchFamily="18" charset="0"/>
+                        <a:ea typeface="Cambria Math" panose="02040503050406030204" pitchFamily="18" charset="0"/>
+                      </a:rPr>
+                      <m:t>.5 </m:t>
+                    </m:r>
+                  </m:oMath>
+                </a14:m>
+                <a:endParaRPr lang="es-ES" dirty="0"/>
+              </a:p>
+            </p:txBody>
+          </p:sp>
+        </mc:Choice>
+        <mc:Fallback xmlns="">
+          <p:sp>
+            <p:nvSpPr>
+              <p:cNvPr id="14" name="CuadroTexto 13">
+                <a:extLst>
+                  <a:ext uri="{FF2B5EF4-FFF2-40B4-BE49-F238E27FC236}">
+                    <a16:creationId xmlns:a16="http://schemas.microsoft.com/office/drawing/2014/main" id="{DBA555CE-18F3-9450-2D4E-37945086D017}"/>
+                  </a:ext>
+                </a:extLst>
+              </p:cNvPr>
+              <p:cNvSpPr txBox="1">
+                <a:spLocks noRot="1" noChangeAspect="1" noMove="1" noResize="1" noEditPoints="1" noAdjustHandles="1" noChangeArrowheads="1" noChangeShapeType="1" noTextEdit="1"/>
+              </p:cNvSpPr>
+              <p:nvPr/>
+            </p:nvSpPr>
+            <p:spPr>
+              <a:xfrm>
+                <a:off x="3693562" y="1148859"/>
+                <a:ext cx="2743200" cy="369332"/>
+              </a:xfrm>
+              <a:prstGeom prst="rect">
+                <a:avLst/>
+              </a:prstGeom>
+              <a:blipFill>
+                <a:blip r:embed="rId3"/>
+                <a:stretch>
+                  <a:fillRect t="-8197" b="-24590"/>
+                </a:stretch>
+              </a:blipFill>
+            </p:spPr>
+            <p:txBody>
+              <a:bodyPr/>
+              <a:lstStyle/>
+              <a:p>
+                <a:r>
+                  <a:rPr lang="es-ES">
+                    <a:noFill/>
+                  </a:rPr>
+                  <a:t> </a:t>
+                </a:r>
+              </a:p>
+            </p:txBody>
+          </p:sp>
+        </mc:Fallback>
+      </mc:AlternateContent>
+      <mc:AlternateContent xmlns:mc="http://schemas.openxmlformats.org/markup-compatibility/2006" xmlns:a14="http://schemas.microsoft.com/office/drawing/2010/main">
+        <mc:Choice Requires="a14">
+          <p:sp>
+            <p:nvSpPr>
+              <p:cNvPr id="15" name="CuadroTexto 14">
+                <a:extLst>
+                  <a:ext uri="{FF2B5EF4-FFF2-40B4-BE49-F238E27FC236}">
+                    <a16:creationId xmlns:a16="http://schemas.microsoft.com/office/drawing/2014/main" id="{B2D5274F-8BEB-1C35-C0B6-5F678D786F43}"/>
+                  </a:ext>
+                </a:extLst>
+              </p:cNvPr>
+              <p:cNvSpPr txBox="1"/>
+              <p:nvPr/>
+            </p:nvSpPr>
+            <p:spPr>
+              <a:xfrm>
+                <a:off x="5562600" y="1119018"/>
+                <a:ext cx="2743200" cy="369332"/>
+              </a:xfrm>
+              <a:prstGeom prst="rect">
+                <a:avLst/>
+              </a:prstGeom>
+              <a:noFill/>
+            </p:spPr>
+            <p:txBody>
+              <a:bodyPr wrap="square" rtlCol="0">
+                <a:spAutoFit/>
+              </a:bodyPr>
+              <a:lstStyle/>
+              <a:p>
+                <a:pPr/>
+                <a14:m>
+                  <m:oMathPara xmlns:m="http://schemas.openxmlformats.org/officeDocument/2006/math">
+                    <m:oMathParaPr>
+                      <m:jc m:val="centerGroup"/>
+                    </m:oMathParaPr>
+                    <m:oMath xmlns:m="http://schemas.openxmlformats.org/officeDocument/2006/math">
+                      <m:sSub>
+                        <m:sSubPr>
+                          <m:ctrlPr>
+                            <a:rPr lang="es-ES" b="0" i="1" smtClean="0">
+                              <a:latin typeface="Cambria Math" panose="02040503050406030204" pitchFamily="18" charset="0"/>
+                            </a:rPr>
+                          </m:ctrlPr>
+                        </m:sSubPr>
+                        <m:e>
+                          <m:r>
+                            <a:rPr lang="es-ES" b="0" i="1" smtClean="0">
+                              <a:latin typeface="Cambria Math" panose="02040503050406030204" pitchFamily="18" charset="0"/>
+                            </a:rPr>
+                            <m:t>𝑛</m:t>
+                          </m:r>
+                          <m:r>
+                            <a:rPr lang="es-ES" b="0" i="1" smtClean="0">
+                              <a:latin typeface="Cambria Math" panose="02040503050406030204" pitchFamily="18" charset="0"/>
+                            </a:rPr>
+                            <m:t>_</m:t>
+                          </m:r>
+                          <m:r>
+                            <a:rPr lang="es-ES" b="0" i="1" smtClean="0">
+                              <a:latin typeface="Cambria Math" panose="02040503050406030204" pitchFamily="18" charset="0"/>
+                            </a:rPr>
+                            <m:t>𝑒𝑓𝑓</m:t>
+                          </m:r>
+                        </m:e>
+                        <m:sub>
+                          <m:r>
+                            <a:rPr lang="es-ES" b="0" i="1" smtClean="0">
+                              <a:latin typeface="Cambria Math" panose="02040503050406030204" pitchFamily="18" charset="0"/>
+                            </a:rPr>
+                            <m:t>𝑢</m:t>
+                          </m:r>
+                          <m:r>
+                            <a:rPr lang="es-ES" b="0" i="1" smtClean="0">
+                              <a:latin typeface="Cambria Math" panose="02040503050406030204" pitchFamily="18" charset="0"/>
+                            </a:rPr>
+                            <m:t> </m:t>
+                          </m:r>
+                        </m:sub>
+                      </m:sSub>
+                      <m:r>
+                        <a:rPr lang="es-ES" b="0" i="1" smtClean="0">
+                          <a:latin typeface="Cambria Math" panose="02040503050406030204" pitchFamily="18" charset="0"/>
+                        </a:rPr>
+                        <m:t>=</m:t>
+                      </m:r>
+                      <m:sSub>
+                        <m:sSubPr>
+                          <m:ctrlPr>
+                            <a:rPr lang="es-ES" i="1">
+                              <a:latin typeface="Cambria Math" panose="02040503050406030204" pitchFamily="18" charset="0"/>
+                            </a:rPr>
+                          </m:ctrlPr>
+                        </m:sSubPr>
+                        <m:e>
+                          <m:r>
+                            <a:rPr lang="es-ES" i="1">
+                              <a:latin typeface="Cambria Math" panose="02040503050406030204" pitchFamily="18" charset="0"/>
+                            </a:rPr>
+                            <m:t>𝑛</m:t>
+                          </m:r>
+                          <m:r>
+                            <a:rPr lang="es-ES" i="1">
+                              <a:latin typeface="Cambria Math" panose="02040503050406030204" pitchFamily="18" charset="0"/>
+                            </a:rPr>
+                            <m:t>_</m:t>
+                          </m:r>
+                          <m:r>
+                            <a:rPr lang="es-ES" i="1">
+                              <a:latin typeface="Cambria Math" panose="02040503050406030204" pitchFamily="18" charset="0"/>
+                            </a:rPr>
+                            <m:t>𝑒𝑓𝑓</m:t>
+                          </m:r>
+                        </m:e>
+                        <m:sub>
+                          <m:r>
+                            <a:rPr lang="es-ES" b="0" i="1" smtClean="0">
+                              <a:latin typeface="Cambria Math" panose="02040503050406030204" pitchFamily="18" charset="0"/>
+                            </a:rPr>
+                            <m:t>𝑙</m:t>
+                          </m:r>
+                        </m:sub>
+                      </m:sSub>
+                    </m:oMath>
+                  </m:oMathPara>
+                </a14:m>
+                <a:endParaRPr lang="es-ES" dirty="0"/>
+              </a:p>
+            </p:txBody>
+          </p:sp>
+        </mc:Choice>
+        <mc:Fallback xmlns="">
+          <p:sp>
+            <p:nvSpPr>
+              <p:cNvPr id="15" name="CuadroTexto 14">
+                <a:extLst>
+                  <a:ext uri="{FF2B5EF4-FFF2-40B4-BE49-F238E27FC236}">
+                    <a16:creationId xmlns:a16="http://schemas.microsoft.com/office/drawing/2014/main" id="{B2D5274F-8BEB-1C35-C0B6-5F678D786F43}"/>
+                  </a:ext>
+                </a:extLst>
+              </p:cNvPr>
+              <p:cNvSpPr txBox="1">
+                <a:spLocks noRot="1" noChangeAspect="1" noMove="1" noResize="1" noEditPoints="1" noAdjustHandles="1" noChangeArrowheads="1" noChangeShapeType="1" noTextEdit="1"/>
+              </p:cNvSpPr>
+              <p:nvPr/>
+            </p:nvSpPr>
+            <p:spPr>
+              <a:xfrm>
+                <a:off x="5562600" y="1119018"/>
+                <a:ext cx="2743200" cy="369332"/>
+              </a:xfrm>
+              <a:prstGeom prst="rect">
+                <a:avLst/>
+              </a:prstGeom>
+              <a:blipFill>
+                <a:blip r:embed="rId4"/>
+                <a:stretch>
+                  <a:fillRect b="-13333"/>
+                </a:stretch>
+              </a:blipFill>
+            </p:spPr>
+            <p:txBody>
+              <a:bodyPr/>
+              <a:lstStyle/>
+              <a:p>
+                <a:r>
+                  <a:rPr lang="es-ES">
+                    <a:noFill/>
+                  </a:rPr>
+                  <a:t> </a:t>
+                </a:r>
+              </a:p>
+            </p:txBody>
+          </p:sp>
+        </mc:Fallback>
+      </mc:AlternateContent>
+      <mc:AlternateContent xmlns:mc="http://schemas.openxmlformats.org/markup-compatibility/2006" xmlns:a14="http://schemas.microsoft.com/office/drawing/2010/main">
+        <mc:Choice Requires="a14">
+          <p:sp>
+            <p:nvSpPr>
+              <p:cNvPr id="16" name="CuadroTexto 15">
+                <a:extLst>
+                  <a:ext uri="{FF2B5EF4-FFF2-40B4-BE49-F238E27FC236}">
+                    <a16:creationId xmlns:a16="http://schemas.microsoft.com/office/drawing/2014/main" id="{ACEE59A9-FEB2-FCAC-B250-F9CD1EA3139A}"/>
+                  </a:ext>
+                </a:extLst>
+              </p:cNvPr>
+              <p:cNvSpPr txBox="1"/>
+              <p:nvPr/>
+            </p:nvSpPr>
+            <p:spPr>
+              <a:xfrm>
+                <a:off x="7771331" y="1136608"/>
+                <a:ext cx="2743200" cy="369332"/>
+              </a:xfrm>
+              <a:prstGeom prst="rect">
+                <a:avLst/>
+              </a:prstGeom>
+              <a:noFill/>
+            </p:spPr>
+            <p:txBody>
+              <a:bodyPr wrap="square" rtlCol="0">
+                <a:spAutoFit/>
+              </a:bodyPr>
+              <a:lstStyle/>
+              <a:p>
+                <a14:m>
+                  <m:oMath xmlns:m="http://schemas.openxmlformats.org/officeDocument/2006/math">
+                    <m:sSub>
+                      <m:sSubPr>
+                        <m:ctrlPr>
+                          <a:rPr lang="es-ES" b="0" i="1" smtClean="0">
+                            <a:latin typeface="Cambria Math" panose="02040503050406030204" pitchFamily="18" charset="0"/>
+                          </a:rPr>
+                        </m:ctrlPr>
+                      </m:sSubPr>
+                      <m:e>
+                        <m:r>
+                          <a:rPr lang="es-ES" b="0" i="1" smtClean="0">
+                            <a:latin typeface="Cambria Math" panose="02040503050406030204" pitchFamily="18" charset="0"/>
+                          </a:rPr>
+                          <m:t>𝐿</m:t>
+                        </m:r>
+                      </m:e>
+                      <m:sub>
+                        <m:r>
+                          <a:rPr lang="es-ES" b="0" i="1" smtClean="0">
+                            <a:latin typeface="Cambria Math" panose="02040503050406030204" pitchFamily="18" charset="0"/>
+                          </a:rPr>
+                          <m:t>𝑢</m:t>
+                        </m:r>
+                      </m:sub>
+                    </m:sSub>
+                    <m:r>
+                      <a:rPr lang="es-ES" b="0" i="1" smtClean="0">
+                        <a:latin typeface="Cambria Math" panose="02040503050406030204" pitchFamily="18" charset="0"/>
+                      </a:rPr>
+                      <m:t>=</m:t>
+                    </m:r>
+                    <m:sSub>
+                      <m:sSubPr>
+                        <m:ctrlPr>
+                          <a:rPr lang="es-ES" i="1">
+                            <a:latin typeface="Cambria Math" panose="02040503050406030204" pitchFamily="18" charset="0"/>
+                          </a:rPr>
+                        </m:ctrlPr>
+                      </m:sSubPr>
+                      <m:e>
+                        <m:r>
+                          <a:rPr lang="es-ES" b="0" i="1" smtClean="0">
+                            <a:latin typeface="Cambria Math" panose="02040503050406030204" pitchFamily="18" charset="0"/>
+                          </a:rPr>
+                          <m:t> 5 </m:t>
+                        </m:r>
+                        <m:r>
+                          <a:rPr lang="es-ES" b="0" i="1" smtClean="0">
+                            <a:latin typeface="Cambria Math" panose="02040503050406030204" pitchFamily="18" charset="0"/>
+                          </a:rPr>
+                          <m:t>𝑎𝑛𝑑</m:t>
+                        </m:r>
+                        <m:r>
+                          <a:rPr lang="es-ES" b="0" i="1" smtClean="0">
+                            <a:latin typeface="Cambria Math" panose="02040503050406030204" pitchFamily="18" charset="0"/>
+                          </a:rPr>
+                          <m:t> </m:t>
+                        </m:r>
+                        <m:r>
+                          <a:rPr lang="es-ES" b="0" i="1" smtClean="0">
+                            <a:latin typeface="Cambria Math" panose="02040503050406030204" pitchFamily="18" charset="0"/>
+                          </a:rPr>
+                          <m:t>𝐿</m:t>
+                        </m:r>
+                      </m:e>
+                      <m:sub>
+                        <m:r>
+                          <a:rPr lang="es-ES" b="0" i="1" smtClean="0">
+                            <a:latin typeface="Cambria Math" panose="02040503050406030204" pitchFamily="18" charset="0"/>
+                          </a:rPr>
+                          <m:t>𝑙</m:t>
+                        </m:r>
+                        <m:r>
+                          <a:rPr lang="es-ES" b="0" i="1" smtClean="0">
+                            <a:latin typeface="Cambria Math" panose="02040503050406030204" pitchFamily="18" charset="0"/>
+                          </a:rPr>
+                          <m:t> </m:t>
+                        </m:r>
+                      </m:sub>
+                    </m:sSub>
+                  </m:oMath>
+                </a14:m>
+                <a:r>
+                  <a:rPr lang="es-ES" dirty="0"/>
+                  <a:t> </a:t>
+                </a:r>
+                <a14:m>
+                  <m:oMath xmlns:m="http://schemas.openxmlformats.org/officeDocument/2006/math">
+                    <m:r>
+                      <a:rPr lang="es-ES" i="1">
+                        <a:latin typeface="Cambria Math" panose="02040503050406030204" pitchFamily="18" charset="0"/>
+                      </a:rPr>
+                      <m:t>=</m:t>
+                    </m:r>
+                    <m:r>
+                      <a:rPr lang="es-ES" b="0" i="1" smtClean="0">
+                        <a:latin typeface="Cambria Math" panose="02040503050406030204" pitchFamily="18" charset="0"/>
+                      </a:rPr>
+                      <m:t>25 </m:t>
+                    </m:r>
+                    <m:r>
+                      <a:rPr lang="es-ES" b="0" i="1" smtClean="0">
+                        <a:latin typeface="Cambria Math" panose="02040503050406030204" pitchFamily="18" charset="0"/>
+                      </a:rPr>
+                      <m:t>𝑢𝑚</m:t>
+                    </m:r>
+                  </m:oMath>
+                </a14:m>
+                <a:endParaRPr lang="es-ES" dirty="0"/>
+              </a:p>
+            </p:txBody>
+          </p:sp>
+        </mc:Choice>
+        <mc:Fallback xmlns="">
+          <p:sp>
+            <p:nvSpPr>
+              <p:cNvPr id="16" name="CuadroTexto 15">
+                <a:extLst>
+                  <a:ext uri="{FF2B5EF4-FFF2-40B4-BE49-F238E27FC236}">
+                    <a16:creationId xmlns:a16="http://schemas.microsoft.com/office/drawing/2014/main" id="{ACEE59A9-FEB2-FCAC-B250-F9CD1EA3139A}"/>
+                  </a:ext>
+                </a:extLst>
+              </p:cNvPr>
+              <p:cNvSpPr txBox="1">
+                <a:spLocks noRot="1" noChangeAspect="1" noMove="1" noResize="1" noEditPoints="1" noAdjustHandles="1" noChangeArrowheads="1" noChangeShapeType="1" noTextEdit="1"/>
+              </p:cNvSpPr>
+              <p:nvPr/>
+            </p:nvSpPr>
+            <p:spPr>
+              <a:xfrm>
+                <a:off x="7771331" y="1136608"/>
+                <a:ext cx="2743200" cy="369332"/>
+              </a:xfrm>
+              <a:prstGeom prst="rect">
+                <a:avLst/>
+              </a:prstGeom>
+              <a:blipFill>
+                <a:blip r:embed="rId5"/>
+                <a:stretch>
+                  <a:fillRect/>
+                </a:stretch>
+              </a:blipFill>
+            </p:spPr>
+            <p:txBody>
+              <a:bodyPr/>
+              <a:lstStyle/>
+              <a:p>
+                <a:r>
+                  <a:rPr lang="es-ES">
+                    <a:noFill/>
+                  </a:rPr>
+                  <a:t> </a:t>
+                </a:r>
+              </a:p>
+            </p:txBody>
+          </p:sp>
+        </mc:Fallback>
+      </mc:AlternateContent>
+      <p:pic>
+        <p:nvPicPr>
+          <p:cNvPr id="19" name="Imagen 18">
+            <a:extLst>
+              <a:ext uri="{FF2B5EF4-FFF2-40B4-BE49-F238E27FC236}">
+                <a16:creationId xmlns:a16="http://schemas.microsoft.com/office/drawing/2014/main" id="{B3A88F85-D78E-C636-D9CA-D4625FA818EA}"/>
+              </a:ext>
+            </a:extLst>
+          </p:cNvPr>
+          <p:cNvPicPr>
+            <a:picLocks noChangeAspect="1"/>
+          </p:cNvPicPr>
+          <p:nvPr/>
+        </p:nvPicPr>
+        <p:blipFill>
+          <a:blip r:embed="rId6"/>
+          <a:stretch>
+            <a:fillRect/>
+          </a:stretch>
+        </p:blipFill>
+        <p:spPr>
+          <a:xfrm>
+            <a:off x="6400800" y="1758133"/>
+            <a:ext cx="5181600" cy="3660913"/>
+          </a:xfrm>
+          <a:prstGeom prst="rect">
+            <a:avLst/>
+          </a:prstGeom>
+        </p:spPr>
+      </p:pic>
+      <p:pic>
+        <p:nvPicPr>
+          <p:cNvPr id="21" name="Imagen 20">
+            <a:extLst>
+              <a:ext uri="{FF2B5EF4-FFF2-40B4-BE49-F238E27FC236}">
+                <a16:creationId xmlns:a16="http://schemas.microsoft.com/office/drawing/2014/main" id="{8EB63380-0D25-879A-9C42-F5C3FABF715D}"/>
+              </a:ext>
+            </a:extLst>
+          </p:cNvPr>
+          <p:cNvPicPr>
+            <a:picLocks noChangeAspect="1"/>
+          </p:cNvPicPr>
+          <p:nvPr/>
+        </p:nvPicPr>
+        <p:blipFill>
+          <a:blip r:embed="rId7"/>
+          <a:stretch>
+            <a:fillRect/>
+          </a:stretch>
+        </p:blipFill>
+        <p:spPr>
+          <a:xfrm>
+            <a:off x="914400" y="1759047"/>
+            <a:ext cx="4648200" cy="3572519"/>
+          </a:xfrm>
+          <a:prstGeom prst="rect">
+            <a:avLst/>
+          </a:prstGeom>
+        </p:spPr>
+      </p:pic>
+    </p:spTree>
+    <p:extLst>
+      <p:ext uri="{BB962C8B-B14F-4D97-AF65-F5344CB8AC3E}">
+        <p14:creationId xmlns:p14="http://schemas.microsoft.com/office/powerpoint/2010/main" val="60957130"/>
+      </p:ext>
+    </p:extLst>
+  </p:cSld>
+  <p:clrMapOvr>
+    <a:masterClrMapping/>
+  </p:clrMapOvr>
+</p:sld>
+</file>
+
+<file path=ppt/slides/slide11.xml><?xml version="1.0" encoding="utf-8"?>
+<p:sld xmlns:a="http://schemas.openxmlformats.org/drawingml/2006/main" xmlns:r="http://schemas.openxmlformats.org/officeDocument/2006/relationships" xmlns:p="http://schemas.openxmlformats.org/presentationml/2006/main">
+  <p:cSld>
+    <p:spTree>
+      <p:nvGrpSpPr>
+        <p:cNvPr id="1" name="">
+          <a:extLst>
+            <a:ext uri="{FF2B5EF4-FFF2-40B4-BE49-F238E27FC236}">
+              <a16:creationId xmlns:a16="http://schemas.microsoft.com/office/drawing/2014/main" id="{25434E70-43B1-3881-1771-20FB4358471D}"/>
+            </a:ext>
+          </a:extLst>
+        </p:cNvPr>
+        <p:cNvGrpSpPr/>
+        <p:nvPr/>
+      </p:nvGrpSpPr>
+      <p:grpSpPr>
+        <a:xfrm>
+          <a:off x="0" y="0"/>
+          <a:ext cx="0" cy="0"/>
+          <a:chOff x="0" y="0"/>
+          <a:chExt cx="0" cy="0"/>
+        </a:xfrm>
+      </p:grpSpPr>
+      <p:sp>
+        <p:nvSpPr>
+          <p:cNvPr id="16" name="object 16">
+            <a:extLst>
+              <a:ext uri="{FF2B5EF4-FFF2-40B4-BE49-F238E27FC236}">
+                <a16:creationId xmlns:a16="http://schemas.microsoft.com/office/drawing/2014/main" id="{742C31CE-19F0-B995-0997-9A2D6A879BF7}"/>
+              </a:ext>
+            </a:extLst>
+          </p:cNvPr>
+          <p:cNvSpPr txBox="1">
+            <a:spLocks noGrp="1"/>
+          </p:cNvSpPr>
+          <p:nvPr>
+            <p:ph type="title"/>
+          </p:nvPr>
+        </p:nvSpPr>
+        <p:spPr>
+          <a:xfrm>
+            <a:off x="685800" y="408883"/>
+            <a:ext cx="10994410" cy="397545"/>
+          </a:xfrm>
+          <a:prstGeom prst="rect">
+            <a:avLst/>
+          </a:prstGeom>
+        </p:spPr>
+        <p:txBody>
+          <a:bodyPr vert="horz" wrap="square" lIns="0" tIns="12700" rIns="0" bIns="0" rtlCol="0">
+            <a:spAutoFit/>
+          </a:bodyPr>
+          <a:lstStyle/>
+          <a:p>
+            <a:pPr marL="12700">
+              <a:lnSpc>
+                <a:spcPct val="100000"/>
+              </a:lnSpc>
+              <a:spcBef>
+                <a:spcPts val="100"/>
+              </a:spcBef>
+            </a:pPr>
+            <a:r>
+              <a:rPr lang="en-US" sz="2500" dirty="0"/>
+              <a:t>Extra assessments </a:t>
+            </a:r>
+            <a:endParaRPr lang="en-US" sz="2500" b="0" dirty="0">
+              <a:latin typeface="+mj-lt"/>
+              <a:cs typeface="Lucida Sans"/>
+            </a:endParaRPr>
+          </a:p>
+        </p:txBody>
+      </p:sp>
+      <p:pic>
+        <p:nvPicPr>
+          <p:cNvPr id="83" name="Gráfico 82">
+            <a:extLst>
+              <a:ext uri="{FF2B5EF4-FFF2-40B4-BE49-F238E27FC236}">
+                <a16:creationId xmlns:a16="http://schemas.microsoft.com/office/drawing/2014/main" id="{D688A609-F3DC-EE34-C536-683E70F32EAE}"/>
+              </a:ext>
+            </a:extLst>
+          </p:cNvPr>
+          <p:cNvPicPr>
+            <a:picLocks noChangeAspect="1"/>
+          </p:cNvPicPr>
+          <p:nvPr/>
+        </p:nvPicPr>
+        <p:blipFill>
+          <a:blip r:embed="rId3">
+            <a:extLst>
+              <a:ext uri="{96DAC541-7B7A-43D3-8B79-37D633B846F1}">
+                <asvg:svgBlip xmlns:asvg="http://schemas.microsoft.com/office/drawing/2016/SVG/main" r:embed="rId4"/>
+              </a:ext>
+            </a:extLst>
+          </a:blip>
+          <a:stretch>
+            <a:fillRect/>
+          </a:stretch>
+        </p:blipFill>
+        <p:spPr>
+          <a:xfrm>
+            <a:off x="5045006" y="6356057"/>
+            <a:ext cx="6409575" cy="363174"/>
+          </a:xfrm>
+          <a:prstGeom prst="rect">
+            <a:avLst/>
+          </a:prstGeom>
+        </p:spPr>
+      </p:pic>
+      <p:sp>
+        <p:nvSpPr>
+          <p:cNvPr id="84" name="Marcador de número de diapositiva 83">
+            <a:extLst>
+              <a:ext uri="{FF2B5EF4-FFF2-40B4-BE49-F238E27FC236}">
+                <a16:creationId xmlns:a16="http://schemas.microsoft.com/office/drawing/2014/main" id="{B6C672C6-89D4-7E67-2B94-811D081786A7}"/>
+              </a:ext>
+            </a:extLst>
+          </p:cNvPr>
+          <p:cNvSpPr>
+            <a:spLocks noGrp="1"/>
+          </p:cNvSpPr>
+          <p:nvPr>
+            <p:ph type="sldNum" sz="quarter" idx="7"/>
+          </p:nvPr>
+        </p:nvSpPr>
+        <p:spPr/>
+        <p:txBody>
+          <a:bodyPr/>
+          <a:lstStyle/>
+          <a:p>
+            <a:fld id="{B6F15528-21DE-4FAA-801E-634DDDAF4B2B}" type="slidenum">
+              <a:rPr lang="es-ES" smtClean="0"/>
+              <a:t>11</a:t>
+            </a:fld>
+            <a:endParaRPr lang="es-ES"/>
+          </a:p>
+        </p:txBody>
+      </p:sp>
+      <p:sp>
+        <p:nvSpPr>
+          <p:cNvPr id="4" name="Marcador de texto 2">
+            <a:extLst>
+              <a:ext uri="{FF2B5EF4-FFF2-40B4-BE49-F238E27FC236}">
+                <a16:creationId xmlns:a16="http://schemas.microsoft.com/office/drawing/2014/main" id="{D838A93A-BFC8-0124-93CE-FDC193435A0C}"/>
+              </a:ext>
+            </a:extLst>
+          </p:cNvPr>
+          <p:cNvSpPr txBox="1">
+            <a:spLocks/>
+          </p:cNvSpPr>
+          <p:nvPr/>
+        </p:nvSpPr>
+        <p:spPr>
+          <a:xfrm>
+            <a:off x="608012" y="1295400"/>
+            <a:ext cx="11048999" cy="4958137"/>
+          </a:xfrm>
+          <a:prstGeom prst="rect">
+            <a:avLst/>
+          </a:prstGeom>
+        </p:spPr>
+        <p:txBody>
+          <a:bodyPr>
+            <a:normAutofit/>
+          </a:bodyPr>
+          <a:lstStyle>
+            <a:lvl1pPr marL="0">
+              <a:defRPr>
+                <a:latin typeface="+mn-lt"/>
+                <a:ea typeface="+mn-ea"/>
+                <a:cs typeface="+mn-cs"/>
+              </a:defRPr>
+            </a:lvl1pPr>
+            <a:lvl2pPr marL="457200">
+              <a:defRPr>
+                <a:latin typeface="+mn-lt"/>
+                <a:ea typeface="+mn-ea"/>
+                <a:cs typeface="+mn-cs"/>
+              </a:defRPr>
+            </a:lvl2pPr>
+            <a:lvl3pPr marL="914400">
+              <a:defRPr>
+                <a:latin typeface="+mn-lt"/>
+                <a:ea typeface="+mn-ea"/>
+                <a:cs typeface="+mn-cs"/>
+              </a:defRPr>
+            </a:lvl3pPr>
+            <a:lvl4pPr marL="1371600">
+              <a:defRPr>
+                <a:latin typeface="+mn-lt"/>
+                <a:ea typeface="+mn-ea"/>
+                <a:cs typeface="+mn-cs"/>
+              </a:defRPr>
+            </a:lvl4pPr>
+            <a:lvl5pPr marL="1828800">
+              <a:defRPr>
+                <a:latin typeface="+mn-lt"/>
+                <a:ea typeface="+mn-ea"/>
+                <a:cs typeface="+mn-cs"/>
+              </a:defRPr>
+            </a:lvl5pPr>
+            <a:lvl6pPr marL="2286000">
+              <a:defRPr>
+                <a:latin typeface="+mn-lt"/>
+                <a:ea typeface="+mn-ea"/>
+                <a:cs typeface="+mn-cs"/>
+              </a:defRPr>
+            </a:lvl6pPr>
+            <a:lvl7pPr marL="2743200">
+              <a:defRPr>
+                <a:latin typeface="+mn-lt"/>
+                <a:ea typeface="+mn-ea"/>
+                <a:cs typeface="+mn-cs"/>
+              </a:defRPr>
+            </a:lvl7pPr>
+            <a:lvl8pPr marL="3200400">
+              <a:defRPr>
+                <a:latin typeface="+mn-lt"/>
+                <a:ea typeface="+mn-ea"/>
+                <a:cs typeface="+mn-cs"/>
+              </a:defRPr>
+            </a:lvl8pPr>
+            <a:lvl9pPr marL="3657600">
+              <a:defRPr>
+                <a:latin typeface="+mn-lt"/>
+                <a:ea typeface="+mn-ea"/>
+                <a:cs typeface="+mn-cs"/>
+              </a:defRPr>
+            </a:lvl9pPr>
+          </a:lstStyle>
+          <a:p>
+            <a:pPr marL="0" indent="0">
+              <a:buNone/>
+            </a:pPr>
+            <a:r>
+              <a:rPr lang="en-US" b="1" dirty="0"/>
+              <a:t>Assessment 4</a:t>
+            </a:r>
+            <a:r>
+              <a:rPr lang="en-US" dirty="0"/>
+              <a:t>. Design an MZI for filtering at a specific wavelength. Calculate and adjust the arm lengths to configure the MZI to have a maximum transmission at 1550 nm.</a:t>
+            </a:r>
+          </a:p>
+          <a:p>
+            <a:endParaRPr lang="en-US" b="1" dirty="0"/>
+          </a:p>
+          <a:p>
+            <a:r>
+              <a:rPr lang="en-US" b="1" dirty="0"/>
+              <a:t>Assessment 5. </a:t>
+            </a:r>
+            <a:r>
+              <a:rPr lang="en-US" dirty="0"/>
+              <a:t>Let's see how the response of the MZI varies with the effective index. Vary the effective index of one of the arms and analyze how the spectrum shifts. To do this, you can use the data provided in the .txt files entitled ‘</a:t>
+            </a:r>
+            <a:r>
+              <a:rPr lang="en-US" dirty="0" err="1"/>
+              <a:t>SiN</a:t>
+            </a:r>
+            <a:r>
+              <a:rPr lang="en-US" dirty="0"/>
+              <a:t>’. Can you give an example of an application where this configuration is used?</a:t>
+            </a:r>
+          </a:p>
+          <a:p>
+            <a:pPr marL="0" indent="0">
+              <a:buNone/>
+            </a:pPr>
+            <a:endParaRPr lang="en-US" dirty="0"/>
+          </a:p>
+          <a:p>
+            <a:r>
+              <a:rPr lang="en-US" b="1" dirty="0"/>
+              <a:t>Advanced level assessment.</a:t>
+            </a:r>
+            <a:r>
+              <a:rPr lang="en-US" dirty="0"/>
+              <a:t> Explore how cascading two MZIs affects the transmission spectrum. To do so, design a system in which two MZIs are cascaded. Simulate and observe the spectrum, explaining how the transmission peaks behave</a:t>
+            </a:r>
+            <a:r>
+              <a:rPr lang="en-US" b="1" dirty="0"/>
+              <a:t>.</a:t>
+            </a:r>
+          </a:p>
+          <a:p>
+            <a:pPr algn="just"/>
+            <a:endParaRPr lang="en-US" sz="2000" kern="0" dirty="0">
+              <a:solidFill>
+                <a:sysClr val="windowText" lastClr="000000"/>
+              </a:solidFill>
+            </a:endParaRPr>
+          </a:p>
+        </p:txBody>
+      </p:sp>
+      <p:sp>
+        <p:nvSpPr>
+          <p:cNvPr id="2" name="CuadroTexto 1">
+            <a:extLst>
+              <a:ext uri="{FF2B5EF4-FFF2-40B4-BE49-F238E27FC236}">
+                <a16:creationId xmlns:a16="http://schemas.microsoft.com/office/drawing/2014/main" id="{FDE3A197-9508-F9F1-1FEB-FF883D78C151}"/>
+              </a:ext>
+            </a:extLst>
+          </p:cNvPr>
+          <p:cNvSpPr txBox="1"/>
+          <p:nvPr/>
+        </p:nvSpPr>
+        <p:spPr>
+          <a:xfrm>
+            <a:off x="609441" y="4860334"/>
+            <a:ext cx="11199971" cy="1200329"/>
+          </a:xfrm>
+          <a:prstGeom prst="rect">
+            <a:avLst/>
+          </a:prstGeom>
+          <a:solidFill>
+            <a:schemeClr val="bg1">
+              <a:lumMod val="95000"/>
+            </a:schemeClr>
+          </a:solidFill>
+          <a:ln w="28575">
+            <a:solidFill>
+              <a:srgbClr val="E0700D"/>
+            </a:solidFill>
+          </a:ln>
+        </p:spPr>
+        <p:txBody>
+          <a:bodyPr wrap="square" rtlCol="0">
+            <a:spAutoFit/>
+          </a:bodyPr>
+          <a:lstStyle/>
+          <a:p>
+            <a:pPr algn="just"/>
+            <a:r>
+              <a:rPr lang="en-US" sz="1200" dirty="0">
+                <a:latin typeface="Arial" panose="020B0604020202020204" pitchFamily="34" charset="0"/>
+                <a:cs typeface="Arial" panose="020B0604020202020204" pitchFamily="34" charset="0"/>
+              </a:rPr>
+              <a:t>Document all your results</a:t>
+            </a:r>
+          </a:p>
+          <a:p>
+            <a:pPr algn="just"/>
+            <a:endParaRPr lang="en-US" sz="1200" dirty="0">
+              <a:latin typeface="Arial" panose="020B0604020202020204" pitchFamily="34" charset="0"/>
+              <a:cs typeface="Arial" panose="020B0604020202020204" pitchFamily="34" charset="0"/>
+            </a:endParaRPr>
+          </a:p>
+          <a:p>
+            <a:pPr algn="just"/>
+            <a:endParaRPr lang="en-US" sz="1200" dirty="0">
+              <a:latin typeface="Arial" panose="020B0604020202020204" pitchFamily="34" charset="0"/>
+              <a:cs typeface="Arial" panose="020B0604020202020204" pitchFamily="34" charset="0"/>
+            </a:endParaRPr>
+          </a:p>
+          <a:p>
+            <a:pPr algn="just"/>
+            <a:endParaRPr lang="en-US" sz="1200" dirty="0">
+              <a:latin typeface="Arial" panose="020B0604020202020204" pitchFamily="34" charset="0"/>
+              <a:cs typeface="Arial" panose="020B0604020202020204" pitchFamily="34" charset="0"/>
+            </a:endParaRPr>
+          </a:p>
+          <a:p>
+            <a:pPr algn="just"/>
+            <a:endParaRPr lang="en-US" sz="1200" dirty="0">
+              <a:latin typeface="Arial" panose="020B0604020202020204" pitchFamily="34" charset="0"/>
+              <a:cs typeface="Arial" panose="020B0604020202020204" pitchFamily="34" charset="0"/>
+            </a:endParaRPr>
+          </a:p>
+          <a:p>
+            <a:pPr algn="just"/>
+            <a:endParaRPr lang="en-US" sz="1200" dirty="0">
+              <a:latin typeface="Arial" panose="020B0604020202020204" pitchFamily="34" charset="0"/>
+              <a:cs typeface="Arial" panose="020B0604020202020204" pitchFamily="34" charset="0"/>
+            </a:endParaRPr>
+          </a:p>
+        </p:txBody>
+      </p:sp>
+      <p:sp>
+        <p:nvSpPr>
+          <p:cNvPr id="6" name="Marcador de pie de página 2">
+            <a:extLst>
+              <a:ext uri="{FF2B5EF4-FFF2-40B4-BE49-F238E27FC236}">
+                <a16:creationId xmlns:a16="http://schemas.microsoft.com/office/drawing/2014/main" id="{04C1A7E9-6C33-172D-E7B9-CCF643221E6A}"/>
+              </a:ext>
+            </a:extLst>
+          </p:cNvPr>
+          <p:cNvSpPr>
+            <a:spLocks noGrp="1"/>
+          </p:cNvSpPr>
+          <p:nvPr>
+            <p:ph type="ftr" sz="quarter" idx="5"/>
+          </p:nvPr>
+        </p:nvSpPr>
+        <p:spPr>
+          <a:xfrm>
+            <a:off x="609600" y="6457057"/>
+            <a:ext cx="2743200" cy="184666"/>
+          </a:xfrm>
+        </p:spPr>
+        <p:txBody>
+          <a:bodyPr/>
+          <a:lstStyle/>
+          <a:p>
+            <a:pPr marL="12700">
+              <a:spcBef>
+                <a:spcPts val="15"/>
+              </a:spcBef>
+            </a:pPr>
+            <a:r>
+              <a:rPr lang="es-ES" spc="-5"/>
+              <a:t>LAB 3. INTERFEROMETERS I</a:t>
+            </a:r>
+            <a:endParaRPr lang="es-ES" spc="-5" dirty="0"/>
+          </a:p>
+        </p:txBody>
+      </p:sp>
+    </p:spTree>
+    <p:extLst>
+      <p:ext uri="{BB962C8B-B14F-4D97-AF65-F5344CB8AC3E}">
+        <p14:creationId xmlns:p14="http://schemas.microsoft.com/office/powerpoint/2010/main" val="3660438245"/>
+      </p:ext>
+    </p:extLst>
+  </p:cSld>
+  <p:clrMapOvr>
+    <a:masterClrMapping/>
+  </p:clrMapOvr>
+</p:sld>
+</file>
+
+<file path=ppt/slides/slide12.xml><?xml version="1.0" encoding="utf-8"?>
+<p:sld xmlns:a="http://schemas.openxmlformats.org/drawingml/2006/main" xmlns:r="http://schemas.openxmlformats.org/officeDocument/2006/relationships" xmlns:p="http://schemas.openxmlformats.org/presentationml/2006/main">
+  <p:cSld>
+    <p:spTree>
+      <p:nvGrpSpPr>
+        <p:cNvPr id="1" name=""/>
+        <p:cNvGrpSpPr/>
+        <p:nvPr/>
+      </p:nvGrpSpPr>
+      <p:grpSpPr>
+        <a:xfrm>
+          <a:off x="0" y="0"/>
+          <a:ext cx="0" cy="0"/>
+          <a:chOff x="0" y="0"/>
+          <a:chExt cx="0" cy="0"/>
+        </a:xfrm>
+      </p:grpSpPr>
+      <p:sp>
+        <p:nvSpPr>
+          <p:cNvPr id="2" name="Título 1">
+            <a:extLst>
+              <a:ext uri="{FF2B5EF4-FFF2-40B4-BE49-F238E27FC236}">
+                <a16:creationId xmlns:a16="http://schemas.microsoft.com/office/drawing/2014/main" id="{04D8C8A9-D527-86EC-2345-6BD2DCB3FCF7}"/>
+              </a:ext>
+            </a:extLst>
+          </p:cNvPr>
+          <p:cNvSpPr>
+            <a:spLocks noGrp="1"/>
+          </p:cNvSpPr>
+          <p:nvPr>
+            <p:ph type="title"/>
+          </p:nvPr>
+        </p:nvSpPr>
+        <p:spPr>
+          <a:xfrm>
+            <a:off x="609600" y="354270"/>
+            <a:ext cx="10991850" cy="800219"/>
+          </a:xfrm>
+        </p:spPr>
+        <p:txBody>
+          <a:bodyPr/>
+          <a:lstStyle/>
+          <a:p>
+            <a:r>
+              <a:rPr lang="en-US" sz="1600" dirty="0"/>
+              <a:t>Assessment 4. </a:t>
+            </a:r>
+            <a:r>
+              <a:rPr lang="en-US" sz="1600" b="0" dirty="0"/>
+              <a:t>Design an MZI for filtering at a specific wavelength. Calculate and adjust the arm lengths to configure the MZI to have a maximum transmission at 1550 nm.</a:t>
+            </a:r>
+            <a:br>
+              <a:rPr lang="en-US" b="0" dirty="0"/>
+            </a:br>
+            <a:endParaRPr lang="es-ES" b="0" dirty="0"/>
+          </a:p>
+        </p:txBody>
+      </p:sp>
+      <p:sp>
+        <p:nvSpPr>
+          <p:cNvPr id="4" name="Marcador de pie de página 3">
+            <a:extLst>
+              <a:ext uri="{FF2B5EF4-FFF2-40B4-BE49-F238E27FC236}">
+                <a16:creationId xmlns:a16="http://schemas.microsoft.com/office/drawing/2014/main" id="{BF76AD43-4062-3892-5DA5-F71DA7AD2C5B}"/>
+              </a:ext>
+            </a:extLst>
+          </p:cNvPr>
+          <p:cNvSpPr>
+            <a:spLocks noGrp="1"/>
+          </p:cNvSpPr>
+          <p:nvPr>
+            <p:ph type="ftr" sz="quarter" idx="5"/>
+          </p:nvPr>
+        </p:nvSpPr>
+        <p:spPr/>
+        <p:txBody>
+          <a:bodyPr/>
+          <a:lstStyle/>
+          <a:p>
+            <a:pPr marL="12700">
+              <a:spcBef>
+                <a:spcPts val="15"/>
+              </a:spcBef>
+            </a:pPr>
+            <a:r>
+              <a:rPr lang="es-ES" spc="-5"/>
+              <a:t>LAB 3. INTERFEROMETERS I</a:t>
+            </a:r>
+            <a:endParaRPr lang="es-ES" spc="-5" dirty="0"/>
+          </a:p>
+        </p:txBody>
+      </p:sp>
+      <p:sp>
+        <p:nvSpPr>
+          <p:cNvPr id="5" name="Marcador de número de diapositiva 4">
+            <a:extLst>
+              <a:ext uri="{FF2B5EF4-FFF2-40B4-BE49-F238E27FC236}">
+                <a16:creationId xmlns:a16="http://schemas.microsoft.com/office/drawing/2014/main" id="{7E375166-CCFE-18B6-7DC4-F58EA0F1D0C2}"/>
+              </a:ext>
+            </a:extLst>
+          </p:cNvPr>
+          <p:cNvSpPr>
+            <a:spLocks noGrp="1"/>
+          </p:cNvSpPr>
+          <p:nvPr>
+            <p:ph type="sldNum" sz="quarter" idx="7"/>
+          </p:nvPr>
+        </p:nvSpPr>
+        <p:spPr/>
+        <p:txBody>
+          <a:bodyPr/>
+          <a:lstStyle/>
+          <a:p>
+            <a:fld id="{B6F15528-21DE-4FAA-801E-634DDDAF4B2B}" type="slidenum">
+              <a:rPr lang="es-ES" smtClean="0"/>
+              <a:t>12</a:t>
+            </a:fld>
+            <a:endParaRPr lang="es-ES"/>
+          </a:p>
+        </p:txBody>
+      </p:sp>
+      <p:sp>
+        <p:nvSpPr>
+          <p:cNvPr id="8" name="Marcador de texto 7">
+            <a:extLst>
+              <a:ext uri="{FF2B5EF4-FFF2-40B4-BE49-F238E27FC236}">
+                <a16:creationId xmlns:a16="http://schemas.microsoft.com/office/drawing/2014/main" id="{B8A72C18-EFF3-320F-A0C9-5706DB097A3C}"/>
+              </a:ext>
+            </a:extLst>
+          </p:cNvPr>
+          <p:cNvSpPr>
+            <a:spLocks noGrp="1"/>
+          </p:cNvSpPr>
+          <p:nvPr>
+            <p:ph type="body" idx="1"/>
+          </p:nvPr>
+        </p:nvSpPr>
+        <p:spPr/>
+        <p:txBody>
+          <a:bodyPr/>
+          <a:lstStyle/>
+          <a:p>
+            <a:endParaRPr lang="es-ES"/>
+          </a:p>
+        </p:txBody>
+      </p:sp>
+      <p:pic>
+        <p:nvPicPr>
+          <p:cNvPr id="11" name="Imagen 10">
+            <a:extLst>
+              <a:ext uri="{FF2B5EF4-FFF2-40B4-BE49-F238E27FC236}">
+                <a16:creationId xmlns:a16="http://schemas.microsoft.com/office/drawing/2014/main" id="{4E2FC3CE-FA3F-C3FD-A2DB-CB78B3856C91}"/>
+              </a:ext>
+            </a:extLst>
+          </p:cNvPr>
+          <p:cNvPicPr>
+            <a:picLocks noChangeAspect="1"/>
+          </p:cNvPicPr>
+          <p:nvPr/>
+        </p:nvPicPr>
+        <p:blipFill>
+          <a:blip r:embed="rId2"/>
+          <a:stretch>
+            <a:fillRect/>
+          </a:stretch>
+        </p:blipFill>
+        <p:spPr>
+          <a:xfrm>
+            <a:off x="609601" y="927168"/>
+            <a:ext cx="10991850" cy="5601509"/>
+          </a:xfrm>
+          <a:prstGeom prst="rect">
+            <a:avLst/>
+          </a:prstGeom>
+        </p:spPr>
+      </p:pic>
+    </p:spTree>
+    <p:extLst>
+      <p:ext uri="{BB962C8B-B14F-4D97-AF65-F5344CB8AC3E}">
+        <p14:creationId xmlns:p14="http://schemas.microsoft.com/office/powerpoint/2010/main" val="3999517202"/>
+      </p:ext>
+    </p:extLst>
+  </p:cSld>
+  <p:clrMapOvr>
+    <a:masterClrMapping/>
+  </p:clrMapOvr>
+</p:sld>
+</file>
+
+<file path=ppt/slides/slide13.xml><?xml version="1.0" encoding="utf-8"?>
+<p:sld xmlns:a="http://schemas.openxmlformats.org/drawingml/2006/main" xmlns:r="http://schemas.openxmlformats.org/officeDocument/2006/relationships" xmlns:p="http://schemas.openxmlformats.org/presentationml/2006/main">
+  <p:cSld>
+    <p:spTree>
+      <p:nvGrpSpPr>
+        <p:cNvPr id="1" name=""/>
+        <p:cNvGrpSpPr/>
+        <p:nvPr/>
+      </p:nvGrpSpPr>
+      <p:grpSpPr>
+        <a:xfrm>
+          <a:off x="0" y="0"/>
+          <a:ext cx="0" cy="0"/>
+          <a:chOff x="0" y="0"/>
+          <a:chExt cx="0" cy="0"/>
+        </a:xfrm>
+      </p:grpSpPr>
+      <p:sp>
+        <p:nvSpPr>
+          <p:cNvPr id="3" name="Marcador de texto 2">
+            <a:extLst>
+              <a:ext uri="{FF2B5EF4-FFF2-40B4-BE49-F238E27FC236}">
+                <a16:creationId xmlns:a16="http://schemas.microsoft.com/office/drawing/2014/main" id="{E7369153-574C-AE8C-915C-C809209E35E1}"/>
+              </a:ext>
+            </a:extLst>
+          </p:cNvPr>
+          <p:cNvSpPr>
+            <a:spLocks noGrp="1"/>
+          </p:cNvSpPr>
+          <p:nvPr>
+            <p:ph type="body" idx="1"/>
+          </p:nvPr>
+        </p:nvSpPr>
+        <p:spPr>
+          <a:xfrm>
+            <a:off x="533400" y="294427"/>
+            <a:ext cx="10972800" cy="1107996"/>
+          </a:xfrm>
+        </p:spPr>
+        <p:txBody>
+          <a:bodyPr/>
+          <a:lstStyle/>
+          <a:p>
+            <a:r>
+              <a:rPr lang="en-US" b="1" dirty="0"/>
+              <a:t>Assessment 5. </a:t>
+            </a:r>
+            <a:r>
+              <a:rPr lang="en-US" dirty="0"/>
+              <a:t>Let's see how the response of the MZI varies with the effective index. Vary the effective index of one of the arms and analyze how the spectrum shifts. To do this, you can use the data provided in the .txt files entitled ‘</a:t>
+            </a:r>
+            <a:r>
+              <a:rPr lang="en-US" dirty="0" err="1"/>
+              <a:t>SiN</a:t>
+            </a:r>
+            <a:r>
+              <a:rPr lang="en-US" dirty="0"/>
+              <a:t>’. Can you give an example of an application where this configuration is used?</a:t>
+            </a:r>
+          </a:p>
+          <a:p>
+            <a:endParaRPr lang="es-ES" dirty="0"/>
+          </a:p>
+        </p:txBody>
+      </p:sp>
+      <p:sp>
+        <p:nvSpPr>
+          <p:cNvPr id="4" name="Marcador de pie de página 3">
+            <a:extLst>
+              <a:ext uri="{FF2B5EF4-FFF2-40B4-BE49-F238E27FC236}">
+                <a16:creationId xmlns:a16="http://schemas.microsoft.com/office/drawing/2014/main" id="{32F96826-729E-4211-644B-F0590373B98C}"/>
+              </a:ext>
+            </a:extLst>
+          </p:cNvPr>
+          <p:cNvSpPr>
+            <a:spLocks noGrp="1"/>
+          </p:cNvSpPr>
+          <p:nvPr>
+            <p:ph type="ftr" sz="quarter" idx="5"/>
+          </p:nvPr>
+        </p:nvSpPr>
+        <p:spPr/>
+        <p:txBody>
+          <a:bodyPr/>
+          <a:lstStyle/>
+          <a:p>
+            <a:pPr marL="12700">
+              <a:spcBef>
+                <a:spcPts val="15"/>
+              </a:spcBef>
+            </a:pPr>
+            <a:r>
+              <a:rPr lang="es-ES" spc="-5"/>
+              <a:t>LAB 3. INTERFEROMETERS I</a:t>
+            </a:r>
+            <a:endParaRPr lang="es-ES" spc="-5" dirty="0"/>
+          </a:p>
+        </p:txBody>
+      </p:sp>
+      <p:sp>
+        <p:nvSpPr>
+          <p:cNvPr id="5" name="Marcador de número de diapositiva 4">
+            <a:extLst>
+              <a:ext uri="{FF2B5EF4-FFF2-40B4-BE49-F238E27FC236}">
+                <a16:creationId xmlns:a16="http://schemas.microsoft.com/office/drawing/2014/main" id="{799375AF-5656-2D4D-25B2-DD89042486CD}"/>
+              </a:ext>
+            </a:extLst>
+          </p:cNvPr>
+          <p:cNvSpPr>
+            <a:spLocks noGrp="1"/>
+          </p:cNvSpPr>
+          <p:nvPr>
+            <p:ph type="sldNum" sz="quarter" idx="7"/>
+          </p:nvPr>
+        </p:nvSpPr>
+        <p:spPr/>
+        <p:txBody>
+          <a:bodyPr/>
+          <a:lstStyle/>
+          <a:p>
+            <a:fld id="{B6F15528-21DE-4FAA-801E-634DDDAF4B2B}" type="slidenum">
+              <a:rPr lang="es-ES" smtClean="0"/>
+              <a:t>13</a:t>
+            </a:fld>
+            <a:endParaRPr lang="es-ES"/>
+          </a:p>
+        </p:txBody>
+      </p:sp>
+      <p:pic>
+        <p:nvPicPr>
+          <p:cNvPr id="7" name="Imagen 6">
+            <a:extLst>
+              <a:ext uri="{FF2B5EF4-FFF2-40B4-BE49-F238E27FC236}">
+                <a16:creationId xmlns:a16="http://schemas.microsoft.com/office/drawing/2014/main" id="{C03C2F84-6B41-DD5F-9425-BBD9629B7EE5}"/>
+              </a:ext>
+            </a:extLst>
+          </p:cNvPr>
+          <p:cNvPicPr>
+            <a:picLocks noChangeAspect="1"/>
+          </p:cNvPicPr>
+          <p:nvPr/>
+        </p:nvPicPr>
+        <p:blipFill>
+          <a:blip r:embed="rId2"/>
+          <a:stretch>
+            <a:fillRect/>
+          </a:stretch>
+        </p:blipFill>
+        <p:spPr>
+          <a:xfrm>
+            <a:off x="4978283" y="1636359"/>
+            <a:ext cx="1810003" cy="676369"/>
+          </a:xfrm>
+          <a:prstGeom prst="rect">
+            <a:avLst/>
+          </a:prstGeom>
+        </p:spPr>
+      </p:pic>
+      <p:pic>
+        <p:nvPicPr>
+          <p:cNvPr id="9" name="Imagen 8">
+            <a:extLst>
+              <a:ext uri="{FF2B5EF4-FFF2-40B4-BE49-F238E27FC236}">
+                <a16:creationId xmlns:a16="http://schemas.microsoft.com/office/drawing/2014/main" id="{7FD22810-9C1E-C7C5-092C-D86DF5467D7F}"/>
+              </a:ext>
+            </a:extLst>
+          </p:cNvPr>
+          <p:cNvPicPr>
+            <a:picLocks noChangeAspect="1"/>
+          </p:cNvPicPr>
+          <p:nvPr/>
+        </p:nvPicPr>
+        <p:blipFill>
+          <a:blip r:embed="rId3"/>
+          <a:stretch>
+            <a:fillRect/>
+          </a:stretch>
+        </p:blipFill>
+        <p:spPr>
+          <a:xfrm>
+            <a:off x="1367303" y="1619418"/>
+            <a:ext cx="1857634" cy="676368"/>
+          </a:xfrm>
+          <a:prstGeom prst="rect">
+            <a:avLst/>
+          </a:prstGeom>
+        </p:spPr>
+      </p:pic>
+      <p:pic>
+        <p:nvPicPr>
+          <p:cNvPr id="11" name="Imagen 10">
+            <a:extLst>
+              <a:ext uri="{FF2B5EF4-FFF2-40B4-BE49-F238E27FC236}">
+                <a16:creationId xmlns:a16="http://schemas.microsoft.com/office/drawing/2014/main" id="{6BB11A61-5C31-5EF8-6C90-A8EB12F69E1F}"/>
+              </a:ext>
+            </a:extLst>
+          </p:cNvPr>
+          <p:cNvPicPr>
+            <a:picLocks noChangeAspect="1"/>
+          </p:cNvPicPr>
+          <p:nvPr/>
+        </p:nvPicPr>
+        <p:blipFill>
+          <a:blip r:embed="rId4"/>
+          <a:stretch>
+            <a:fillRect/>
+          </a:stretch>
+        </p:blipFill>
+        <p:spPr>
+          <a:xfrm>
+            <a:off x="533400" y="2415942"/>
+            <a:ext cx="3525441" cy="2882368"/>
+          </a:xfrm>
+          <a:prstGeom prst="rect">
+            <a:avLst/>
+          </a:prstGeom>
+        </p:spPr>
+      </p:pic>
+      <p:pic>
+        <p:nvPicPr>
+          <p:cNvPr id="13" name="Imagen 12">
+            <a:extLst>
+              <a:ext uri="{FF2B5EF4-FFF2-40B4-BE49-F238E27FC236}">
+                <a16:creationId xmlns:a16="http://schemas.microsoft.com/office/drawing/2014/main" id="{69FA5F94-D5AA-D531-ACF8-F49932FB5D64}"/>
+              </a:ext>
+            </a:extLst>
+          </p:cNvPr>
+          <p:cNvPicPr>
+            <a:picLocks noChangeAspect="1"/>
+          </p:cNvPicPr>
+          <p:nvPr/>
+        </p:nvPicPr>
+        <p:blipFill>
+          <a:blip r:embed="rId5"/>
+          <a:stretch>
+            <a:fillRect/>
+          </a:stretch>
+        </p:blipFill>
+        <p:spPr>
+          <a:xfrm>
+            <a:off x="4058841" y="2432884"/>
+            <a:ext cx="3648888" cy="2882368"/>
+          </a:xfrm>
+          <a:prstGeom prst="rect">
+            <a:avLst/>
+          </a:prstGeom>
+        </p:spPr>
+      </p:pic>
+      <p:sp>
+        <p:nvSpPr>
+          <p:cNvPr id="14" name="CuadroTexto 13">
+            <a:extLst>
+              <a:ext uri="{FF2B5EF4-FFF2-40B4-BE49-F238E27FC236}">
+                <a16:creationId xmlns:a16="http://schemas.microsoft.com/office/drawing/2014/main" id="{F615DD09-E65F-6D50-7DEB-A8FAB5490C6D}"/>
+              </a:ext>
+            </a:extLst>
+          </p:cNvPr>
+          <p:cNvSpPr txBox="1"/>
+          <p:nvPr/>
+        </p:nvSpPr>
+        <p:spPr>
+          <a:xfrm>
+            <a:off x="8077200" y="1974543"/>
+            <a:ext cx="3581400" cy="2585323"/>
+          </a:xfrm>
+          <a:prstGeom prst="rect">
+            <a:avLst/>
+          </a:prstGeom>
+          <a:noFill/>
+        </p:spPr>
+        <p:txBody>
+          <a:bodyPr wrap="square" rtlCol="0">
+            <a:spAutoFit/>
+          </a:bodyPr>
+          <a:lstStyle/>
+          <a:p>
+            <a:r>
+              <a:rPr lang="es-ES" dirty="0"/>
+              <a:t>El gráfico de la izquierda muestra la respuesta del MZI si uno de sus brazos es expuesto a agua y el de la derecha si uno de sus brazos se expone al aire. Vemos como hay más variación a la longitud de onda con el aire, esto se debe a una mayor diferencia de índices de refracción.</a:t>
+            </a:r>
+          </a:p>
+        </p:txBody>
+      </p:sp>
+      <p:sp>
+        <p:nvSpPr>
+          <p:cNvPr id="15" name="CuadroTexto 14">
+            <a:extLst>
+              <a:ext uri="{FF2B5EF4-FFF2-40B4-BE49-F238E27FC236}">
+                <a16:creationId xmlns:a16="http://schemas.microsoft.com/office/drawing/2014/main" id="{DE307031-24A4-EA27-4773-4929A870931B}"/>
+              </a:ext>
+            </a:extLst>
+          </p:cNvPr>
+          <p:cNvSpPr txBox="1"/>
+          <p:nvPr/>
+        </p:nvSpPr>
+        <p:spPr>
+          <a:xfrm>
+            <a:off x="711781" y="5499843"/>
+            <a:ext cx="10768438" cy="923330"/>
+          </a:xfrm>
+          <a:prstGeom prst="rect">
+            <a:avLst/>
+          </a:prstGeom>
+          <a:noFill/>
+        </p:spPr>
+        <p:txBody>
+          <a:bodyPr wrap="square" rtlCol="0">
+            <a:spAutoFit/>
+          </a:bodyPr>
+          <a:lstStyle/>
+          <a:p>
+            <a:r>
+              <a:rPr lang="es-ES" dirty="0"/>
+              <a:t>Esta configuración es muy interesante en el diseño de los sensores de alta precisión, ya que si una partícula de distinto índice al del medio se posa sobre este brazo haría cambiar la función de transferencia del MZI. </a:t>
+            </a:r>
+          </a:p>
+          <a:p>
+            <a:endParaRPr lang="es-ES" dirty="0"/>
+          </a:p>
+        </p:txBody>
+      </p:sp>
+    </p:spTree>
+    <p:extLst>
+      <p:ext uri="{BB962C8B-B14F-4D97-AF65-F5344CB8AC3E}">
+        <p14:creationId xmlns:p14="http://schemas.microsoft.com/office/powerpoint/2010/main" val="150622668"/>
+      </p:ext>
+    </p:extLst>
+  </p:cSld>
+  <p:clrMapOvr>
+    <a:masterClrMapping/>
+  </p:clrMapOvr>
+</p:sld>
+</file>
+
+<file path=ppt/slides/slide14.xml><?xml version="1.0" encoding="utf-8"?>
+<p:sld xmlns:a="http://schemas.openxmlformats.org/drawingml/2006/main" xmlns:r="http://schemas.openxmlformats.org/officeDocument/2006/relationships" xmlns:p="http://schemas.openxmlformats.org/presentationml/2006/main">
+  <p:cSld>
+    <p:spTree>
+      <p:nvGrpSpPr>
+        <p:cNvPr id="1" name=""/>
+        <p:cNvGrpSpPr/>
+        <p:nvPr/>
+      </p:nvGrpSpPr>
+      <p:grpSpPr>
+        <a:xfrm>
+          <a:off x="0" y="0"/>
+          <a:ext cx="0" cy="0"/>
+          <a:chOff x="0" y="0"/>
+          <a:chExt cx="0" cy="0"/>
+        </a:xfrm>
+      </p:grpSpPr>
+      <p:sp>
+        <p:nvSpPr>
+          <p:cNvPr id="3" name="object 3"/>
+          <p:cNvSpPr/>
+          <p:nvPr/>
+        </p:nvSpPr>
+        <p:spPr>
+          <a:xfrm>
+            <a:off x="3945635" y="2636520"/>
+            <a:ext cx="8246363" cy="1584959"/>
+          </a:xfrm>
+          <a:prstGeom prst="rect">
+            <a:avLst/>
+          </a:prstGeom>
+          <a:blipFill>
+            <a:blip r:embed="rId2" cstate="print"/>
+            <a:stretch>
+              <a:fillRect/>
+            </a:stretch>
+          </a:blipFill>
+        </p:spPr>
+        <p:txBody>
+          <a:bodyPr wrap="square" lIns="0" tIns="0" rIns="0" bIns="0" rtlCol="0"/>
+          <a:lstStyle/>
+          <a:p>
+            <a:endParaRPr/>
+          </a:p>
+        </p:txBody>
+      </p:sp>
+      <p:sp>
+        <p:nvSpPr>
+          <p:cNvPr id="4" name="object 4"/>
+          <p:cNvSpPr txBox="1">
+            <a:spLocks noGrp="1"/>
+          </p:cNvSpPr>
+          <p:nvPr>
+            <p:ph type="title"/>
+          </p:nvPr>
+        </p:nvSpPr>
+        <p:spPr>
+          <a:xfrm>
+            <a:off x="4513326" y="3165729"/>
+            <a:ext cx="2233295" cy="513715"/>
+          </a:xfrm>
+          <a:prstGeom prst="rect">
+            <a:avLst/>
+          </a:prstGeom>
+        </p:spPr>
+        <p:txBody>
+          <a:bodyPr vert="horz" wrap="square" lIns="0" tIns="13335" rIns="0" bIns="0" rtlCol="0">
+            <a:spAutoFit/>
+          </a:bodyPr>
+          <a:lstStyle/>
+          <a:p>
+            <a:pPr marL="12700">
+              <a:lnSpc>
+                <a:spcPct val="100000"/>
+              </a:lnSpc>
+              <a:spcBef>
+                <a:spcPts val="105"/>
+              </a:spcBef>
+            </a:pPr>
+            <a:r>
+              <a:rPr sz="3200" b="1" spc="-5" dirty="0">
+                <a:solidFill>
+                  <a:srgbClr val="FFFFFF"/>
+                </a:solidFill>
+                <a:latin typeface="Lucida Sans"/>
+                <a:cs typeface="Lucida Sans"/>
+              </a:rPr>
+              <a:t>Thank</a:t>
+            </a:r>
+            <a:r>
+              <a:rPr sz="3200" b="1" spc="-55" dirty="0">
+                <a:solidFill>
+                  <a:srgbClr val="FFFFFF"/>
+                </a:solidFill>
+                <a:latin typeface="Lucida Sans"/>
+                <a:cs typeface="Lucida Sans"/>
+              </a:rPr>
+              <a:t> </a:t>
+            </a:r>
+            <a:r>
+              <a:rPr sz="3200" b="1" dirty="0">
+                <a:solidFill>
+                  <a:srgbClr val="FFFFFF"/>
+                </a:solidFill>
+                <a:latin typeface="Lucida Sans"/>
+                <a:cs typeface="Lucida Sans"/>
+              </a:rPr>
+              <a:t>you</a:t>
+            </a:r>
+            <a:endParaRPr sz="3200">
+              <a:latin typeface="Lucida Sans"/>
+              <a:cs typeface="Lucida Sans"/>
+            </a:endParaRPr>
+          </a:p>
+        </p:txBody>
+      </p:sp>
+      <p:sp>
+        <p:nvSpPr>
+          <p:cNvPr id="5" name="Marcador de número de diapositiva 4">
+            <a:extLst>
+              <a:ext uri="{FF2B5EF4-FFF2-40B4-BE49-F238E27FC236}">
+                <a16:creationId xmlns:a16="http://schemas.microsoft.com/office/drawing/2014/main" id="{B052DA19-AD24-7D24-2AE9-51F8F5A7F5E0}"/>
+              </a:ext>
+            </a:extLst>
+          </p:cNvPr>
+          <p:cNvSpPr>
+            <a:spLocks noGrp="1"/>
+          </p:cNvSpPr>
+          <p:nvPr>
+            <p:ph type="sldNum" sz="quarter" idx="7"/>
+          </p:nvPr>
+        </p:nvSpPr>
+        <p:spPr/>
+        <p:txBody>
+          <a:bodyPr/>
+          <a:lstStyle/>
+          <a:p>
+            <a:fld id="{B6F15528-21DE-4FAA-801E-634DDDAF4B2B}" type="slidenum">
+              <a:rPr lang="es-ES" smtClean="0"/>
+              <a:t>14</a:t>
             </a:fld>
             <a:endParaRPr lang="es-ES"/>
           </a:p>
@@ -3085,13 +5242,17 @@
               <a:buChar char="•"/>
             </a:pPr>
             <a:r>
-              <a:rPr lang="en-US" kern="0" dirty="0">
-                <a:solidFill>
-                  <a:sysClr val="windowText" lastClr="000000"/>
-                </a:solidFill>
+              <a:rPr lang="es-ES" dirty="0">
+                <a:hlinkClick r:id="rId4" tooltip="https://github.com/cccanvas-upv/pic-upv-lab3.git"/>
               </a:rPr>
-              <a:t>Either run locally or at Cloud workspace</a:t>
-            </a:r>
+              <a:t>https://github.com/cccanvas-upv/pic-upv-lab3.git</a:t>
+            </a:r>
+            <a:endParaRPr lang="en-US" kern="0" dirty="0">
+              <a:solidFill>
+                <a:sysClr val="windowText" lastClr="000000"/>
+              </a:solidFill>
+              <a:sym typeface="Wingdings" pitchFamily="2" charset="2"/>
+            </a:endParaRPr>
           </a:p>
           <a:p>
             <a:pPr algn="just"/>
@@ -3382,7 +5543,7 @@
                 <a:avLst/>
               </a:prstGeom>
               <a:blipFill>
-                <a:blip r:embed="rId4"/>
+                <a:blip r:embed="rId5"/>
                 <a:stretch>
                   <a:fillRect t="-8197" b="-24590"/>
                 </a:stretch>
@@ -3660,7 +5821,7 @@
                 <a:avLst/>
               </a:prstGeom>
               <a:blipFill>
-                <a:blip r:embed="rId5"/>
+                <a:blip r:embed="rId6"/>
                 <a:stretch>
                   <a:fillRect/>
                 </a:stretch>
@@ -4104,7 +6265,7 @@
                 <a:avLst/>
               </a:prstGeom>
               <a:blipFill>
-                <a:blip r:embed="rId6"/>
+                <a:blip r:embed="rId7"/>
                 <a:stretch>
                   <a:fillRect/>
                 </a:stretch>
@@ -4276,7 +6437,7 @@
                 <a:avLst/>
               </a:prstGeom>
               <a:blipFill>
-                <a:blip r:embed="rId7"/>
+                <a:blip r:embed="rId8"/>
                 <a:stretch>
                   <a:fillRect t="-10000" b="-26667"/>
                 </a:stretch>
@@ -4559,10 +6720,12 @@
                 </a:r>
               </a:p>
               <a:p>
-                <a:pPr lvl="1"/>
+                <a:pPr marL="914400" lvl="1" indent="-457200">
+                  <a:buAutoNum type="arabicPeriod"/>
+                </a:pPr>
                 <a:r>
                   <a:rPr lang="en-US" sz="2000" dirty="0"/>
-                  <a:t>1. Balanced configuration</a:t>
+                  <a:t>Balanced configuration</a:t>
                 </a:r>
               </a:p>
               <a:p>
@@ -4868,6 +7031,5419 @@
 </file>
 
 <file path=ppt/slides/slide4.xml><?xml version="1.0" encoding="utf-8"?>
+<p:sld xmlns:a="http://schemas.openxmlformats.org/drawingml/2006/main" xmlns:r="http://schemas.openxmlformats.org/officeDocument/2006/relationships" xmlns:p="http://schemas.openxmlformats.org/presentationml/2006/main">
+  <p:cSld>
+    <p:spTree>
+      <p:nvGrpSpPr>
+        <p:cNvPr id="1" name=""/>
+        <p:cNvGrpSpPr/>
+        <p:nvPr/>
+      </p:nvGrpSpPr>
+      <p:grpSpPr>
+        <a:xfrm>
+          <a:off x="0" y="0"/>
+          <a:ext cx="0" cy="0"/>
+          <a:chOff x="0" y="0"/>
+          <a:chExt cx="0" cy="0"/>
+        </a:xfrm>
+      </p:grpSpPr>
+      <p:sp>
+        <p:nvSpPr>
+          <p:cNvPr id="3" name="Marcador de texto 2">
+            <a:extLst>
+              <a:ext uri="{FF2B5EF4-FFF2-40B4-BE49-F238E27FC236}">
+                <a16:creationId xmlns:a16="http://schemas.microsoft.com/office/drawing/2014/main" id="{B2C984FB-F215-3AA2-D904-49E4FA275170}"/>
+              </a:ext>
+            </a:extLst>
+          </p:cNvPr>
+          <p:cNvSpPr>
+            <a:spLocks noGrp="1"/>
+          </p:cNvSpPr>
+          <p:nvPr>
+            <p:ph type="body" idx="1"/>
+          </p:nvPr>
+        </p:nvSpPr>
+        <p:spPr>
+          <a:xfrm>
+            <a:off x="578498" y="609600"/>
+            <a:ext cx="10972800" cy="276999"/>
+          </a:xfrm>
+        </p:spPr>
+        <p:txBody>
+          <a:bodyPr/>
+          <a:lstStyle/>
+          <a:p>
+            <a:r>
+              <a:rPr lang="es-ES" b="1" dirty="0"/>
+              <a:t>1. </a:t>
+            </a:r>
+            <a:r>
+              <a:rPr lang="es-ES" b="1" dirty="0" err="1"/>
+              <a:t>Balanced</a:t>
+            </a:r>
+            <a:r>
+              <a:rPr lang="es-ES" b="1" dirty="0"/>
+              <a:t> </a:t>
+            </a:r>
+            <a:r>
+              <a:rPr lang="es-ES" b="1" dirty="0" err="1"/>
+              <a:t>Configuration</a:t>
+            </a:r>
+            <a:r>
+              <a:rPr lang="es-ES" b="1" dirty="0"/>
+              <a:t> </a:t>
+            </a:r>
+          </a:p>
+        </p:txBody>
+      </p:sp>
+      <p:sp>
+        <p:nvSpPr>
+          <p:cNvPr id="4" name="Marcador de pie de página 3">
+            <a:extLst>
+              <a:ext uri="{FF2B5EF4-FFF2-40B4-BE49-F238E27FC236}">
+                <a16:creationId xmlns:a16="http://schemas.microsoft.com/office/drawing/2014/main" id="{A4F58BD4-00BA-C3A4-29A6-1BE573BFE3A9}"/>
+              </a:ext>
+            </a:extLst>
+          </p:cNvPr>
+          <p:cNvSpPr>
+            <a:spLocks noGrp="1"/>
+          </p:cNvSpPr>
+          <p:nvPr>
+            <p:ph type="ftr" sz="quarter" idx="5"/>
+          </p:nvPr>
+        </p:nvSpPr>
+        <p:spPr/>
+        <p:txBody>
+          <a:bodyPr/>
+          <a:lstStyle/>
+          <a:p>
+            <a:pPr marL="12700">
+              <a:spcBef>
+                <a:spcPts val="15"/>
+              </a:spcBef>
+            </a:pPr>
+            <a:r>
+              <a:rPr lang="es-ES" spc="-5"/>
+              <a:t>LAB 3. INTERFEROMETERS I</a:t>
+            </a:r>
+            <a:endParaRPr lang="es-ES" spc="-5" dirty="0"/>
+          </a:p>
+        </p:txBody>
+      </p:sp>
+      <p:sp>
+        <p:nvSpPr>
+          <p:cNvPr id="5" name="Marcador de número de diapositiva 4">
+            <a:extLst>
+              <a:ext uri="{FF2B5EF4-FFF2-40B4-BE49-F238E27FC236}">
+                <a16:creationId xmlns:a16="http://schemas.microsoft.com/office/drawing/2014/main" id="{2E5046CA-B890-D0D5-2160-66FE1DF059BA}"/>
+              </a:ext>
+            </a:extLst>
+          </p:cNvPr>
+          <p:cNvSpPr>
+            <a:spLocks noGrp="1"/>
+          </p:cNvSpPr>
+          <p:nvPr>
+            <p:ph type="sldNum" sz="quarter" idx="7"/>
+          </p:nvPr>
+        </p:nvSpPr>
+        <p:spPr/>
+        <p:txBody>
+          <a:bodyPr/>
+          <a:lstStyle/>
+          <a:p>
+            <a:fld id="{B6F15528-21DE-4FAA-801E-634DDDAF4B2B}" type="slidenum">
+              <a:rPr lang="es-ES" smtClean="0"/>
+              <a:t>4</a:t>
+            </a:fld>
+            <a:endParaRPr lang="es-ES"/>
+          </a:p>
+        </p:txBody>
+      </p:sp>
+      <mc:AlternateContent xmlns:mc="http://schemas.openxmlformats.org/markup-compatibility/2006" xmlns:a14="http://schemas.microsoft.com/office/drawing/2010/main">
+        <mc:Choice Requires="a14">
+          <p:sp>
+            <p:nvSpPr>
+              <p:cNvPr id="9" name="CuadroTexto 8">
+                <a:extLst>
+                  <a:ext uri="{FF2B5EF4-FFF2-40B4-BE49-F238E27FC236}">
+                    <a16:creationId xmlns:a16="http://schemas.microsoft.com/office/drawing/2014/main" id="{D0332012-1F68-684C-30BF-D73AF07CCF27}"/>
+                  </a:ext>
+                </a:extLst>
+              </p:cNvPr>
+              <p:cNvSpPr txBox="1"/>
+              <p:nvPr/>
+            </p:nvSpPr>
+            <p:spPr>
+              <a:xfrm>
+                <a:off x="762000" y="1143000"/>
+                <a:ext cx="2057400" cy="381515"/>
+              </a:xfrm>
+              <a:prstGeom prst="rect">
+                <a:avLst/>
+              </a:prstGeom>
+              <a:noFill/>
+            </p:spPr>
+            <p:txBody>
+              <a:bodyPr wrap="square" rtlCol="0">
+                <a:spAutoFit/>
+              </a:bodyPr>
+              <a:lstStyle/>
+              <a:p>
+                <a14:m>
+                  <m:oMath xmlns:m="http://schemas.openxmlformats.org/officeDocument/2006/math">
+                    <m:r>
+                      <m:rPr>
+                        <m:sty m:val="p"/>
+                      </m:rPr>
+                      <a:rPr lang="es-ES" i="1" smtClean="0">
+                        <a:latin typeface="Cambria Math" panose="02040503050406030204" pitchFamily="18" charset="0"/>
+                      </a:rPr>
+                      <m:t>α</m:t>
+                    </m:r>
+                    <m:r>
+                      <a:rPr lang="es-ES" b="0" i="1" smtClean="0">
+                        <a:latin typeface="Cambria Math" panose="02040503050406030204" pitchFamily="18" charset="0"/>
+                      </a:rPr>
+                      <m:t>=</m:t>
+                    </m:r>
+                    <m:r>
+                      <a:rPr lang="es-ES" i="1">
+                        <a:latin typeface="Cambria Math" panose="02040503050406030204" pitchFamily="18" charset="0"/>
+                        <a:ea typeface="Cambria Math" panose="02040503050406030204" pitchFamily="18" charset="0"/>
+                      </a:rPr>
+                      <m:t>0</m:t>
+                    </m:r>
+                  </m:oMath>
+                </a14:m>
+                <a:r>
+                  <a:rPr lang="en-US" kern="0" dirty="0">
+                    <a:solidFill>
+                      <a:sysClr val="windowText" lastClr="000000"/>
+                    </a:solidFill>
+                  </a:rPr>
+                  <a:t> and </a:t>
+                </a:r>
+                <a14:m>
+                  <m:oMath xmlns:m="http://schemas.openxmlformats.org/officeDocument/2006/math">
+                    <m:sSub>
+                      <m:sSubPr>
+                        <m:ctrlPr>
+                          <a:rPr lang="es-ES" b="0" i="1" smtClean="0">
+                            <a:latin typeface="Cambria Math" panose="02040503050406030204" pitchFamily="18" charset="0"/>
+                          </a:rPr>
+                        </m:ctrlPr>
+                      </m:sSubPr>
+                      <m:e>
+                        <m:r>
+                          <m:rPr>
+                            <m:sty m:val="p"/>
+                          </m:rPr>
+                          <a:rPr lang="es-ES" i="1" smtClean="0">
+                            <a:latin typeface="Cambria Math" panose="02040503050406030204" pitchFamily="18" charset="0"/>
+                          </a:rPr>
+                          <m:t>γ</m:t>
+                        </m:r>
+                      </m:e>
+                      <m:sub>
+                        <m:r>
+                          <a:rPr lang="es-ES" b="0" i="1" smtClean="0">
+                            <a:latin typeface="Cambria Math" panose="02040503050406030204" pitchFamily="18" charset="0"/>
+                          </a:rPr>
+                          <m:t>𝑎</m:t>
+                        </m:r>
+                        <m:r>
+                          <a:rPr lang="es-ES" b="0" i="1" smtClean="0">
+                            <a:latin typeface="Cambria Math" panose="02040503050406030204" pitchFamily="18" charset="0"/>
+                          </a:rPr>
+                          <m:t>, </m:t>
+                        </m:r>
+                        <m:r>
+                          <a:rPr lang="es-ES" b="0" i="1" smtClean="0">
+                            <a:latin typeface="Cambria Math" panose="02040503050406030204" pitchFamily="18" charset="0"/>
+                          </a:rPr>
+                          <m:t>𝑏</m:t>
+                        </m:r>
+                      </m:sub>
+                    </m:sSub>
+                    <m:r>
+                      <a:rPr lang="es-ES" b="0" i="1" smtClean="0">
+                        <a:latin typeface="Cambria Math" panose="02040503050406030204" pitchFamily="18" charset="0"/>
+                      </a:rPr>
+                      <m:t>=</m:t>
+                    </m:r>
+                    <m:r>
+                      <a:rPr lang="es-ES" i="1">
+                        <a:latin typeface="Cambria Math" panose="02040503050406030204" pitchFamily="18" charset="0"/>
+                        <a:ea typeface="Cambria Math" panose="02040503050406030204" pitchFamily="18" charset="0"/>
+                      </a:rPr>
+                      <m:t>0</m:t>
+                    </m:r>
+                  </m:oMath>
+                </a14:m>
+                <a:endParaRPr lang="es-ES" dirty="0"/>
+              </a:p>
+            </p:txBody>
+          </p:sp>
+        </mc:Choice>
+        <mc:Fallback xmlns="">
+          <p:sp>
+            <p:nvSpPr>
+              <p:cNvPr id="9" name="CuadroTexto 8">
+                <a:extLst>
+                  <a:ext uri="{FF2B5EF4-FFF2-40B4-BE49-F238E27FC236}">
+                    <a16:creationId xmlns:a16="http://schemas.microsoft.com/office/drawing/2014/main" id="{D0332012-1F68-684C-30BF-D73AF07CCF27}"/>
+                  </a:ext>
+                </a:extLst>
+              </p:cNvPr>
+              <p:cNvSpPr txBox="1">
+                <a:spLocks noRot="1" noChangeAspect="1" noMove="1" noResize="1" noEditPoints="1" noAdjustHandles="1" noChangeArrowheads="1" noChangeShapeType="1" noTextEdit="1"/>
+              </p:cNvSpPr>
+              <p:nvPr/>
+            </p:nvSpPr>
+            <p:spPr>
+              <a:xfrm>
+                <a:off x="762000" y="1143000"/>
+                <a:ext cx="2057400" cy="381515"/>
+              </a:xfrm>
+              <a:prstGeom prst="rect">
+                <a:avLst/>
+              </a:prstGeom>
+              <a:blipFill>
+                <a:blip r:embed="rId2"/>
+                <a:stretch>
+                  <a:fillRect t="-8065" b="-22581"/>
+                </a:stretch>
+              </a:blipFill>
+            </p:spPr>
+            <p:txBody>
+              <a:bodyPr/>
+              <a:lstStyle/>
+              <a:p>
+                <a:r>
+                  <a:rPr lang="es-ES">
+                    <a:noFill/>
+                  </a:rPr>
+                  <a:t> </a:t>
+                </a:r>
+              </a:p>
+            </p:txBody>
+          </p:sp>
+        </mc:Fallback>
+      </mc:AlternateContent>
+      <mc:AlternateContent xmlns:mc="http://schemas.openxmlformats.org/markup-compatibility/2006" xmlns:a14="http://schemas.microsoft.com/office/drawing/2010/main">
+        <mc:Choice Requires="a14">
+          <p:sp>
+            <p:nvSpPr>
+              <p:cNvPr id="10" name="CuadroTexto 9">
+                <a:extLst>
+                  <a:ext uri="{FF2B5EF4-FFF2-40B4-BE49-F238E27FC236}">
+                    <a16:creationId xmlns:a16="http://schemas.microsoft.com/office/drawing/2014/main" id="{184C8ECA-C2E1-C035-2BFB-7AFC53FBEE9F}"/>
+                  </a:ext>
+                </a:extLst>
+              </p:cNvPr>
+              <p:cNvSpPr txBox="1"/>
+              <p:nvPr/>
+            </p:nvSpPr>
+            <p:spPr>
+              <a:xfrm>
+                <a:off x="2796073" y="1120014"/>
+                <a:ext cx="2743200" cy="369332"/>
+              </a:xfrm>
+              <a:prstGeom prst="rect">
+                <a:avLst/>
+              </a:prstGeom>
+              <a:noFill/>
+            </p:spPr>
+            <p:txBody>
+              <a:bodyPr wrap="square" rtlCol="0">
+                <a:spAutoFit/>
+              </a:bodyPr>
+              <a:lstStyle/>
+              <a:p>
+                <a14:m>
+                  <m:oMath xmlns:m="http://schemas.openxmlformats.org/officeDocument/2006/math">
+                    <m:sSub>
+                      <m:sSubPr>
+                        <m:ctrlPr>
+                          <a:rPr lang="es-ES" b="0" i="1" smtClean="0">
+                            <a:latin typeface="Cambria Math" panose="02040503050406030204" pitchFamily="18" charset="0"/>
+                          </a:rPr>
+                        </m:ctrlPr>
+                      </m:sSubPr>
+                      <m:e>
+                        <m:r>
+                          <m:rPr>
+                            <m:sty m:val="p"/>
+                          </m:rPr>
+                          <a:rPr lang="es-ES" i="1" smtClean="0">
+                            <a:latin typeface="Cambria Math" panose="02040503050406030204" pitchFamily="18" charset="0"/>
+                          </a:rPr>
+                          <m:t>k</m:t>
+                        </m:r>
+                      </m:e>
+                      <m:sub>
+                        <m:r>
+                          <a:rPr lang="es-ES" b="0" i="1" smtClean="0">
+                            <a:latin typeface="Cambria Math" panose="02040503050406030204" pitchFamily="18" charset="0"/>
+                          </a:rPr>
+                          <m:t>𝑎</m:t>
+                        </m:r>
+                      </m:sub>
+                    </m:sSub>
+                    <m:r>
+                      <a:rPr lang="es-ES" b="0" i="1" smtClean="0">
+                        <a:latin typeface="Cambria Math" panose="02040503050406030204" pitchFamily="18" charset="0"/>
+                      </a:rPr>
+                      <m:t>=</m:t>
+                    </m:r>
+                    <m:r>
+                      <a:rPr lang="es-ES" i="1">
+                        <a:latin typeface="Cambria Math" panose="02040503050406030204" pitchFamily="18" charset="0"/>
+                        <a:ea typeface="Cambria Math" panose="02040503050406030204" pitchFamily="18" charset="0"/>
+                      </a:rPr>
+                      <m:t>0</m:t>
+                    </m:r>
+                    <m:r>
+                      <a:rPr lang="es-ES" b="0" i="0" smtClean="0">
+                        <a:latin typeface="Cambria Math" panose="02040503050406030204" pitchFamily="18" charset="0"/>
+                        <a:ea typeface="Cambria Math" panose="02040503050406030204" pitchFamily="18" charset="0"/>
+                      </a:rPr>
+                      <m:t>.5</m:t>
+                    </m:r>
+                  </m:oMath>
+                </a14:m>
+                <a:r>
+                  <a:rPr lang="en-US" kern="0" dirty="0">
+                    <a:solidFill>
+                      <a:sysClr val="windowText" lastClr="000000"/>
+                    </a:solidFill>
+                  </a:rPr>
+                  <a:t> and </a:t>
+                </a:r>
+                <a14:m>
+                  <m:oMath xmlns:m="http://schemas.openxmlformats.org/officeDocument/2006/math">
+                    <m:sSub>
+                      <m:sSubPr>
+                        <m:ctrlPr>
+                          <a:rPr lang="es-ES" b="0" i="1" dirty="0" smtClean="0">
+                            <a:latin typeface="Cambria Math" panose="02040503050406030204" pitchFamily="18" charset="0"/>
+                          </a:rPr>
+                        </m:ctrlPr>
+                      </m:sSubPr>
+                      <m:e>
+                        <m:r>
+                          <m:rPr>
+                            <m:sty m:val="p"/>
+                          </m:rPr>
+                          <a:rPr lang="es-ES" i="1" dirty="0">
+                            <a:latin typeface="Cambria Math" panose="02040503050406030204" pitchFamily="18" charset="0"/>
+                          </a:rPr>
+                          <m:t>k</m:t>
+                        </m:r>
+                      </m:e>
+                      <m:sub>
+                        <m:r>
+                          <a:rPr lang="es-ES" b="0" i="1" dirty="0" smtClean="0">
+                            <a:latin typeface="Cambria Math" panose="02040503050406030204" pitchFamily="18" charset="0"/>
+                          </a:rPr>
+                          <m:t>𝑏</m:t>
+                        </m:r>
+                      </m:sub>
+                    </m:sSub>
+                    <m:r>
+                      <a:rPr lang="es-ES" b="0" i="1" smtClean="0">
+                        <a:latin typeface="Cambria Math" panose="02040503050406030204" pitchFamily="18" charset="0"/>
+                      </a:rPr>
+                      <m:t>=</m:t>
+                    </m:r>
+                    <m:r>
+                      <a:rPr lang="es-ES" i="1">
+                        <a:latin typeface="Cambria Math" panose="02040503050406030204" pitchFamily="18" charset="0"/>
+                        <a:ea typeface="Cambria Math" panose="02040503050406030204" pitchFamily="18" charset="0"/>
+                      </a:rPr>
+                      <m:t>0</m:t>
+                    </m:r>
+                    <m:r>
+                      <a:rPr lang="es-ES" b="0" i="1" smtClean="0">
+                        <a:latin typeface="Cambria Math" panose="02040503050406030204" pitchFamily="18" charset="0"/>
+                        <a:ea typeface="Cambria Math" panose="02040503050406030204" pitchFamily="18" charset="0"/>
+                      </a:rPr>
+                      <m:t>.5 </m:t>
+                    </m:r>
+                  </m:oMath>
+                </a14:m>
+                <a:endParaRPr lang="es-ES" dirty="0"/>
+              </a:p>
+            </p:txBody>
+          </p:sp>
+        </mc:Choice>
+        <mc:Fallback xmlns="">
+          <p:sp>
+            <p:nvSpPr>
+              <p:cNvPr id="10" name="CuadroTexto 9">
+                <a:extLst>
+                  <a:ext uri="{FF2B5EF4-FFF2-40B4-BE49-F238E27FC236}">
+                    <a16:creationId xmlns:a16="http://schemas.microsoft.com/office/drawing/2014/main" id="{184C8ECA-C2E1-C035-2BFB-7AFC53FBEE9F}"/>
+                  </a:ext>
+                </a:extLst>
+              </p:cNvPr>
+              <p:cNvSpPr txBox="1">
+                <a:spLocks noRot="1" noChangeAspect="1" noMove="1" noResize="1" noEditPoints="1" noAdjustHandles="1" noChangeArrowheads="1" noChangeShapeType="1" noTextEdit="1"/>
+              </p:cNvSpPr>
+              <p:nvPr/>
+            </p:nvSpPr>
+            <p:spPr>
+              <a:xfrm>
+                <a:off x="2796073" y="1120014"/>
+                <a:ext cx="2743200" cy="369332"/>
+              </a:xfrm>
+              <a:prstGeom prst="rect">
+                <a:avLst/>
+              </a:prstGeom>
+              <a:blipFill>
+                <a:blip r:embed="rId3"/>
+                <a:stretch>
+                  <a:fillRect t="-10000" b="-26667"/>
+                </a:stretch>
+              </a:blipFill>
+            </p:spPr>
+            <p:txBody>
+              <a:bodyPr/>
+              <a:lstStyle/>
+              <a:p>
+                <a:r>
+                  <a:rPr lang="es-ES">
+                    <a:noFill/>
+                  </a:rPr>
+                  <a:t> </a:t>
+                </a:r>
+              </a:p>
+            </p:txBody>
+          </p:sp>
+        </mc:Fallback>
+      </mc:AlternateContent>
+      <mc:AlternateContent xmlns:mc="http://schemas.openxmlformats.org/markup-compatibility/2006" xmlns:a14="http://schemas.microsoft.com/office/drawing/2010/main">
+        <mc:Choice Requires="a14">
+          <p:sp>
+            <p:nvSpPr>
+              <p:cNvPr id="13" name="CuadroTexto 12">
+                <a:extLst>
+                  <a:ext uri="{FF2B5EF4-FFF2-40B4-BE49-F238E27FC236}">
+                    <a16:creationId xmlns:a16="http://schemas.microsoft.com/office/drawing/2014/main" id="{F073FAEA-FE9D-CD3F-4B5A-7D305511B1CF}"/>
+                  </a:ext>
+                </a:extLst>
+              </p:cNvPr>
+              <p:cNvSpPr txBox="1"/>
+              <p:nvPr/>
+            </p:nvSpPr>
+            <p:spPr>
+              <a:xfrm>
+                <a:off x="4693298" y="1116455"/>
+                <a:ext cx="2743200" cy="369332"/>
+              </a:xfrm>
+              <a:prstGeom prst="rect">
+                <a:avLst/>
+              </a:prstGeom>
+              <a:noFill/>
+            </p:spPr>
+            <p:txBody>
+              <a:bodyPr wrap="square" rtlCol="0">
+                <a:spAutoFit/>
+              </a:bodyPr>
+              <a:lstStyle/>
+              <a:p>
+                <a:pPr/>
+                <a14:m>
+                  <m:oMathPara xmlns:m="http://schemas.openxmlformats.org/officeDocument/2006/math">
+                    <m:oMathParaPr>
+                      <m:jc m:val="centerGroup"/>
+                    </m:oMathParaPr>
+                    <m:oMath xmlns:m="http://schemas.openxmlformats.org/officeDocument/2006/math">
+                      <m:sSub>
+                        <m:sSubPr>
+                          <m:ctrlPr>
+                            <a:rPr lang="es-ES" b="0" i="1" smtClean="0">
+                              <a:latin typeface="Cambria Math" panose="02040503050406030204" pitchFamily="18" charset="0"/>
+                            </a:rPr>
+                          </m:ctrlPr>
+                        </m:sSubPr>
+                        <m:e>
+                          <m:r>
+                            <a:rPr lang="es-ES" b="0" i="1" smtClean="0">
+                              <a:latin typeface="Cambria Math" panose="02040503050406030204" pitchFamily="18" charset="0"/>
+                            </a:rPr>
+                            <m:t>𝑛</m:t>
+                          </m:r>
+                          <m:r>
+                            <a:rPr lang="es-ES" b="0" i="1" smtClean="0">
+                              <a:latin typeface="Cambria Math" panose="02040503050406030204" pitchFamily="18" charset="0"/>
+                            </a:rPr>
+                            <m:t>_</m:t>
+                          </m:r>
+                          <m:r>
+                            <a:rPr lang="es-ES" b="0" i="1" smtClean="0">
+                              <a:latin typeface="Cambria Math" panose="02040503050406030204" pitchFamily="18" charset="0"/>
+                            </a:rPr>
+                            <m:t>𝑒𝑓𝑓</m:t>
+                          </m:r>
+                        </m:e>
+                        <m:sub>
+                          <m:r>
+                            <a:rPr lang="es-ES" b="0" i="1" smtClean="0">
+                              <a:latin typeface="Cambria Math" panose="02040503050406030204" pitchFamily="18" charset="0"/>
+                            </a:rPr>
+                            <m:t>𝑢</m:t>
+                          </m:r>
+                        </m:sub>
+                      </m:sSub>
+                      <m:r>
+                        <a:rPr lang="es-ES" b="0" i="1" smtClean="0">
+                          <a:latin typeface="Cambria Math" panose="02040503050406030204" pitchFamily="18" charset="0"/>
+                        </a:rPr>
+                        <m:t>=</m:t>
+                      </m:r>
+                      <m:sSub>
+                        <m:sSubPr>
+                          <m:ctrlPr>
+                            <a:rPr lang="es-ES" i="1">
+                              <a:latin typeface="Cambria Math" panose="02040503050406030204" pitchFamily="18" charset="0"/>
+                            </a:rPr>
+                          </m:ctrlPr>
+                        </m:sSubPr>
+                        <m:e>
+                          <m:r>
+                            <a:rPr lang="es-ES" i="1">
+                              <a:latin typeface="Cambria Math" panose="02040503050406030204" pitchFamily="18" charset="0"/>
+                            </a:rPr>
+                            <m:t>𝑛</m:t>
+                          </m:r>
+                          <m:r>
+                            <a:rPr lang="es-ES" i="1">
+                              <a:latin typeface="Cambria Math" panose="02040503050406030204" pitchFamily="18" charset="0"/>
+                            </a:rPr>
+                            <m:t>_</m:t>
+                          </m:r>
+                          <m:r>
+                            <a:rPr lang="es-ES" i="1">
+                              <a:latin typeface="Cambria Math" panose="02040503050406030204" pitchFamily="18" charset="0"/>
+                            </a:rPr>
+                            <m:t>𝑒𝑓𝑓</m:t>
+                          </m:r>
+                        </m:e>
+                        <m:sub>
+                          <m:r>
+                            <a:rPr lang="es-ES" b="0" i="1" smtClean="0">
+                              <a:latin typeface="Cambria Math" panose="02040503050406030204" pitchFamily="18" charset="0"/>
+                            </a:rPr>
+                            <m:t>𝑙</m:t>
+                          </m:r>
+                        </m:sub>
+                      </m:sSub>
+                    </m:oMath>
+                  </m:oMathPara>
+                </a14:m>
+                <a:endParaRPr lang="es-ES" dirty="0"/>
+              </a:p>
+            </p:txBody>
+          </p:sp>
+        </mc:Choice>
+        <mc:Fallback xmlns="">
+          <p:sp>
+            <p:nvSpPr>
+              <p:cNvPr id="13" name="CuadroTexto 12">
+                <a:extLst>
+                  <a:ext uri="{FF2B5EF4-FFF2-40B4-BE49-F238E27FC236}">
+                    <a16:creationId xmlns:a16="http://schemas.microsoft.com/office/drawing/2014/main" id="{F073FAEA-FE9D-CD3F-4B5A-7D305511B1CF}"/>
+                  </a:ext>
+                </a:extLst>
+              </p:cNvPr>
+              <p:cNvSpPr txBox="1">
+                <a:spLocks noRot="1" noChangeAspect="1" noMove="1" noResize="1" noEditPoints="1" noAdjustHandles="1" noChangeArrowheads="1" noChangeShapeType="1" noTextEdit="1"/>
+              </p:cNvSpPr>
+              <p:nvPr/>
+            </p:nvSpPr>
+            <p:spPr>
+              <a:xfrm>
+                <a:off x="4693298" y="1116455"/>
+                <a:ext cx="2743200" cy="369332"/>
+              </a:xfrm>
+              <a:prstGeom prst="rect">
+                <a:avLst/>
+              </a:prstGeom>
+              <a:blipFill>
+                <a:blip r:embed="rId5"/>
+                <a:stretch>
+                  <a:fillRect b="-13115"/>
+                </a:stretch>
+              </a:blipFill>
+            </p:spPr>
+            <p:txBody>
+              <a:bodyPr/>
+              <a:lstStyle/>
+              <a:p>
+                <a:r>
+                  <a:rPr lang="es-ES">
+                    <a:noFill/>
+                  </a:rPr>
+                  <a:t> </a:t>
+                </a:r>
+              </a:p>
+            </p:txBody>
+          </p:sp>
+        </mc:Fallback>
+      </mc:AlternateContent>
+      <p:sp>
+        <p:nvSpPr>
+          <p:cNvPr id="14" name="CuadroTexto 13">
+            <a:extLst>
+              <a:ext uri="{FF2B5EF4-FFF2-40B4-BE49-F238E27FC236}">
+                <a16:creationId xmlns:a16="http://schemas.microsoft.com/office/drawing/2014/main" id="{41338C13-EFD1-0375-7B66-02D3B504BBB6}"/>
+              </a:ext>
+            </a:extLst>
+          </p:cNvPr>
+          <p:cNvSpPr txBox="1"/>
+          <p:nvPr/>
+        </p:nvSpPr>
+        <p:spPr>
+          <a:xfrm>
+            <a:off x="6934200" y="1796467"/>
+            <a:ext cx="4450702" cy="1754326"/>
+          </a:xfrm>
+          <a:prstGeom prst="rect">
+            <a:avLst/>
+          </a:prstGeom>
+          <a:noFill/>
+        </p:spPr>
+        <p:txBody>
+          <a:bodyPr wrap="square" rtlCol="0">
+            <a:spAutoFit/>
+          </a:bodyPr>
+          <a:lstStyle/>
+          <a:p>
+            <a:endParaRPr lang="es-ES" dirty="0"/>
+          </a:p>
+          <a:p>
+            <a:r>
+              <a:rPr lang="es-ES" dirty="0"/>
+              <a:t>Al medir lo mismo los brazos, la luz de cualquier longitud de onda interferirá de la misma manera, en este caso toda la potencia por el puerto </a:t>
+            </a:r>
+            <a:r>
+              <a:rPr lang="es-ES" dirty="0" err="1"/>
+              <a:t>cross</a:t>
+            </a:r>
+            <a:r>
+              <a:rPr lang="es-ES" dirty="0"/>
+              <a:t>. </a:t>
+            </a:r>
+          </a:p>
+          <a:p>
+            <a:endParaRPr lang="es-ES" dirty="0"/>
+          </a:p>
+        </p:txBody>
+      </p:sp>
+      <mc:AlternateContent xmlns:mc="http://schemas.openxmlformats.org/markup-compatibility/2006" xmlns:a14="http://schemas.microsoft.com/office/drawing/2010/main">
+        <mc:Choice Requires="a14">
+          <p:sp>
+            <p:nvSpPr>
+              <p:cNvPr id="15" name="CuadroTexto 14">
+                <a:extLst>
+                  <a:ext uri="{FF2B5EF4-FFF2-40B4-BE49-F238E27FC236}">
+                    <a16:creationId xmlns:a16="http://schemas.microsoft.com/office/drawing/2014/main" id="{40F99B18-7BB9-4B02-F7C3-A027C978B1FF}"/>
+                  </a:ext>
+                </a:extLst>
+              </p:cNvPr>
+              <p:cNvSpPr txBox="1"/>
+              <p:nvPr/>
+            </p:nvSpPr>
+            <p:spPr>
+              <a:xfrm>
+                <a:off x="7696200" y="1127400"/>
+                <a:ext cx="2743200" cy="369332"/>
+              </a:xfrm>
+              <a:prstGeom prst="rect">
+                <a:avLst/>
+              </a:prstGeom>
+              <a:noFill/>
+            </p:spPr>
+            <p:txBody>
+              <a:bodyPr wrap="square" rtlCol="0">
+                <a:spAutoFit/>
+              </a:bodyPr>
+              <a:lstStyle/>
+              <a:p>
+                <a14:m>
+                  <m:oMath xmlns:m="http://schemas.openxmlformats.org/officeDocument/2006/math">
+                    <m:sSub>
+                      <m:sSubPr>
+                        <m:ctrlPr>
+                          <a:rPr lang="es-ES" b="0" i="1" smtClean="0">
+                            <a:latin typeface="Cambria Math" panose="02040503050406030204" pitchFamily="18" charset="0"/>
+                          </a:rPr>
+                        </m:ctrlPr>
+                      </m:sSubPr>
+                      <m:e>
+                        <m:r>
+                          <a:rPr lang="es-ES" b="0" i="1" smtClean="0">
+                            <a:latin typeface="Cambria Math" panose="02040503050406030204" pitchFamily="18" charset="0"/>
+                          </a:rPr>
+                          <m:t>𝐿</m:t>
+                        </m:r>
+                      </m:e>
+                      <m:sub>
+                        <m:r>
+                          <a:rPr lang="es-ES" b="0" i="1" smtClean="0">
+                            <a:latin typeface="Cambria Math" panose="02040503050406030204" pitchFamily="18" charset="0"/>
+                          </a:rPr>
+                          <m:t>𝑢</m:t>
+                        </m:r>
+                      </m:sub>
+                    </m:sSub>
+                    <m:r>
+                      <a:rPr lang="es-ES" b="0" i="1" smtClean="0">
+                        <a:latin typeface="Cambria Math" panose="02040503050406030204" pitchFamily="18" charset="0"/>
+                      </a:rPr>
+                      <m:t>=</m:t>
+                    </m:r>
+                    <m:sSub>
+                      <m:sSubPr>
+                        <m:ctrlPr>
+                          <a:rPr lang="es-ES" i="1">
+                            <a:latin typeface="Cambria Math" panose="02040503050406030204" pitchFamily="18" charset="0"/>
+                          </a:rPr>
+                        </m:ctrlPr>
+                      </m:sSubPr>
+                      <m:e>
+                        <m:r>
+                          <a:rPr lang="es-ES" b="0" i="1" smtClean="0">
+                            <a:latin typeface="Cambria Math" panose="02040503050406030204" pitchFamily="18" charset="0"/>
+                          </a:rPr>
+                          <m:t>𝐿</m:t>
+                        </m:r>
+                      </m:e>
+                      <m:sub>
+                        <m:r>
+                          <a:rPr lang="es-ES" b="0" i="1" smtClean="0">
+                            <a:latin typeface="Cambria Math" panose="02040503050406030204" pitchFamily="18" charset="0"/>
+                          </a:rPr>
+                          <m:t>𝑙</m:t>
+                        </m:r>
+                        <m:r>
+                          <a:rPr lang="es-ES" b="0" i="1" smtClean="0">
+                            <a:latin typeface="Cambria Math" panose="02040503050406030204" pitchFamily="18" charset="0"/>
+                          </a:rPr>
+                          <m:t> </m:t>
+                        </m:r>
+                      </m:sub>
+                    </m:sSub>
+                  </m:oMath>
+                </a14:m>
+                <a:r>
+                  <a:rPr lang="es-ES" dirty="0"/>
+                  <a:t> </a:t>
+                </a:r>
+                <a14:m>
+                  <m:oMath xmlns:m="http://schemas.openxmlformats.org/officeDocument/2006/math">
+                    <m:r>
+                      <a:rPr lang="es-ES" i="1">
+                        <a:latin typeface="Cambria Math" panose="02040503050406030204" pitchFamily="18" charset="0"/>
+                      </a:rPr>
+                      <m:t>=</m:t>
+                    </m:r>
+                    <m:r>
+                      <a:rPr lang="es-ES" b="0" i="1" smtClean="0">
+                        <a:latin typeface="Cambria Math" panose="02040503050406030204" pitchFamily="18" charset="0"/>
+                      </a:rPr>
+                      <m:t>5 </m:t>
+                    </m:r>
+                    <m:r>
+                      <a:rPr lang="es-ES" b="0" i="1" smtClean="0">
+                        <a:latin typeface="Cambria Math" panose="02040503050406030204" pitchFamily="18" charset="0"/>
+                      </a:rPr>
+                      <m:t>𝑢𝑚</m:t>
+                    </m:r>
+                  </m:oMath>
+                </a14:m>
+                <a:endParaRPr lang="es-ES" dirty="0"/>
+              </a:p>
+            </p:txBody>
+          </p:sp>
+        </mc:Choice>
+        <mc:Fallback xmlns="">
+          <p:sp>
+            <p:nvSpPr>
+              <p:cNvPr id="15" name="CuadroTexto 14">
+                <a:extLst>
+                  <a:ext uri="{FF2B5EF4-FFF2-40B4-BE49-F238E27FC236}">
+                    <a16:creationId xmlns:a16="http://schemas.microsoft.com/office/drawing/2014/main" id="{40F99B18-7BB9-4B02-F7C3-A027C978B1FF}"/>
+                  </a:ext>
+                </a:extLst>
+              </p:cNvPr>
+              <p:cNvSpPr txBox="1">
+                <a:spLocks noRot="1" noChangeAspect="1" noMove="1" noResize="1" noEditPoints="1" noAdjustHandles="1" noChangeArrowheads="1" noChangeShapeType="1" noTextEdit="1"/>
+              </p:cNvSpPr>
+              <p:nvPr/>
+            </p:nvSpPr>
+            <p:spPr>
+              <a:xfrm>
+                <a:off x="7696200" y="1127400"/>
+                <a:ext cx="2743200" cy="369332"/>
+              </a:xfrm>
+              <a:prstGeom prst="rect">
+                <a:avLst/>
+              </a:prstGeom>
+              <a:blipFill>
+                <a:blip r:embed="rId6"/>
+                <a:stretch>
+                  <a:fillRect/>
+                </a:stretch>
+              </a:blipFill>
+            </p:spPr>
+            <p:txBody>
+              <a:bodyPr/>
+              <a:lstStyle/>
+              <a:p>
+                <a:r>
+                  <a:rPr lang="es-ES">
+                    <a:noFill/>
+                  </a:rPr>
+                  <a:t> </a:t>
+                </a:r>
+              </a:p>
+            </p:txBody>
+          </p:sp>
+        </mc:Fallback>
+      </mc:AlternateContent>
+      <p:pic>
+        <p:nvPicPr>
+          <p:cNvPr id="6" name="Imagen 5">
+            <a:extLst>
+              <a:ext uri="{FF2B5EF4-FFF2-40B4-BE49-F238E27FC236}">
+                <a16:creationId xmlns:a16="http://schemas.microsoft.com/office/drawing/2014/main" id="{C50D611E-AB6E-C400-6343-A0782F04E603}"/>
+              </a:ext>
+            </a:extLst>
+          </p:cNvPr>
+          <p:cNvPicPr>
+            <a:picLocks noChangeAspect="1"/>
+          </p:cNvPicPr>
+          <p:nvPr/>
+        </p:nvPicPr>
+        <p:blipFill>
+          <a:blip r:embed="rId7"/>
+          <a:stretch>
+            <a:fillRect/>
+          </a:stretch>
+        </p:blipFill>
+        <p:spPr>
+          <a:xfrm>
+            <a:off x="914400" y="1780916"/>
+            <a:ext cx="5400675" cy="4333875"/>
+          </a:xfrm>
+          <a:prstGeom prst="rect">
+            <a:avLst/>
+          </a:prstGeom>
+        </p:spPr>
+      </p:pic>
+    </p:spTree>
+    <p:extLst>
+      <p:ext uri="{BB962C8B-B14F-4D97-AF65-F5344CB8AC3E}">
+        <p14:creationId xmlns:p14="http://schemas.microsoft.com/office/powerpoint/2010/main" val="2250734939"/>
+      </p:ext>
+    </p:extLst>
+  </p:cSld>
+  <p:clrMapOvr>
+    <a:masterClrMapping/>
+  </p:clrMapOvr>
+</p:sld>
+</file>
+
+<file path=ppt/slides/slide5.xml><?xml version="1.0" encoding="utf-8"?>
+<p:sld xmlns:a="http://schemas.openxmlformats.org/drawingml/2006/main" xmlns:r="http://schemas.openxmlformats.org/officeDocument/2006/relationships" xmlns:p="http://schemas.openxmlformats.org/presentationml/2006/main">
+  <p:cSld>
+    <p:spTree>
+      <p:nvGrpSpPr>
+        <p:cNvPr id="1" name=""/>
+        <p:cNvGrpSpPr/>
+        <p:nvPr/>
+      </p:nvGrpSpPr>
+      <p:grpSpPr>
+        <a:xfrm>
+          <a:off x="0" y="0"/>
+          <a:ext cx="0" cy="0"/>
+          <a:chOff x="0" y="0"/>
+          <a:chExt cx="0" cy="0"/>
+        </a:xfrm>
+      </p:grpSpPr>
+      <p:sp>
+        <p:nvSpPr>
+          <p:cNvPr id="4" name="Marcador de pie de página 3">
+            <a:extLst>
+              <a:ext uri="{FF2B5EF4-FFF2-40B4-BE49-F238E27FC236}">
+                <a16:creationId xmlns:a16="http://schemas.microsoft.com/office/drawing/2014/main" id="{3016C526-99AC-1D9C-F94E-241AF3CE1A2A}"/>
+              </a:ext>
+            </a:extLst>
+          </p:cNvPr>
+          <p:cNvSpPr>
+            <a:spLocks noGrp="1"/>
+          </p:cNvSpPr>
+          <p:nvPr>
+            <p:ph type="ftr" sz="quarter" idx="5"/>
+          </p:nvPr>
+        </p:nvSpPr>
+        <p:spPr/>
+        <p:txBody>
+          <a:bodyPr/>
+          <a:lstStyle/>
+          <a:p>
+            <a:pPr marL="12700">
+              <a:spcBef>
+                <a:spcPts val="15"/>
+              </a:spcBef>
+            </a:pPr>
+            <a:r>
+              <a:rPr lang="es-ES" spc="-5"/>
+              <a:t>LAB 3. INTERFEROMETERS I</a:t>
+            </a:r>
+            <a:endParaRPr lang="es-ES" spc="-5" dirty="0"/>
+          </a:p>
+        </p:txBody>
+      </p:sp>
+      <p:sp>
+        <p:nvSpPr>
+          <p:cNvPr id="5" name="Marcador de número de diapositiva 4">
+            <a:extLst>
+              <a:ext uri="{FF2B5EF4-FFF2-40B4-BE49-F238E27FC236}">
+                <a16:creationId xmlns:a16="http://schemas.microsoft.com/office/drawing/2014/main" id="{4C1BEF3A-7CAB-E86B-8750-775023D01B30}"/>
+              </a:ext>
+            </a:extLst>
+          </p:cNvPr>
+          <p:cNvSpPr>
+            <a:spLocks noGrp="1"/>
+          </p:cNvSpPr>
+          <p:nvPr>
+            <p:ph type="sldNum" sz="quarter" idx="7"/>
+          </p:nvPr>
+        </p:nvSpPr>
+        <p:spPr/>
+        <p:txBody>
+          <a:bodyPr/>
+          <a:lstStyle/>
+          <a:p>
+            <a:fld id="{B6F15528-21DE-4FAA-801E-634DDDAF4B2B}" type="slidenum">
+              <a:rPr lang="es-ES" smtClean="0"/>
+              <a:t>5</a:t>
+            </a:fld>
+            <a:endParaRPr lang="es-ES"/>
+          </a:p>
+        </p:txBody>
+      </p:sp>
+      <p:sp>
+        <p:nvSpPr>
+          <p:cNvPr id="6" name="Marcador de texto 2">
+            <a:extLst>
+              <a:ext uri="{FF2B5EF4-FFF2-40B4-BE49-F238E27FC236}">
+                <a16:creationId xmlns:a16="http://schemas.microsoft.com/office/drawing/2014/main" id="{D2090687-9822-FC99-92A2-508135B08165}"/>
+              </a:ext>
+            </a:extLst>
+          </p:cNvPr>
+          <p:cNvSpPr>
+            <a:spLocks noGrp="1"/>
+          </p:cNvSpPr>
+          <p:nvPr>
+            <p:ph type="title"/>
+          </p:nvPr>
+        </p:nvSpPr>
+        <p:spPr>
+          <a:xfrm>
+            <a:off x="457200" y="306507"/>
+            <a:ext cx="10991850" cy="307975"/>
+          </a:xfrm>
+        </p:spPr>
+        <p:txBody>
+          <a:bodyPr/>
+          <a:lstStyle/>
+          <a:p>
+            <a:r>
+              <a:rPr lang="es-ES" dirty="0"/>
+              <a:t>2</a:t>
+            </a:r>
+            <a:r>
+              <a:rPr lang="es-ES" b="1" dirty="0"/>
+              <a:t>. </a:t>
+            </a:r>
+            <a:r>
+              <a:rPr lang="es-ES" b="1" dirty="0" err="1"/>
+              <a:t>Unbalanced</a:t>
+            </a:r>
+            <a:r>
+              <a:rPr lang="es-ES" b="1" dirty="0"/>
+              <a:t> </a:t>
+            </a:r>
+            <a:r>
+              <a:rPr lang="es-ES" b="1" dirty="0" err="1"/>
+              <a:t>Configuration</a:t>
+            </a:r>
+            <a:r>
+              <a:rPr lang="es-ES" b="1" dirty="0"/>
+              <a:t> </a:t>
+            </a:r>
+          </a:p>
+        </p:txBody>
+      </p:sp>
+      <p:sp>
+        <p:nvSpPr>
+          <p:cNvPr id="7" name="Marcador de texto 2">
+            <a:extLst>
+              <a:ext uri="{FF2B5EF4-FFF2-40B4-BE49-F238E27FC236}">
+                <a16:creationId xmlns:a16="http://schemas.microsoft.com/office/drawing/2014/main" id="{16088DB7-E8E4-7DDA-5317-AE00F42179AA}"/>
+              </a:ext>
+            </a:extLst>
+          </p:cNvPr>
+          <p:cNvSpPr txBox="1">
+            <a:spLocks/>
+          </p:cNvSpPr>
+          <p:nvPr/>
+        </p:nvSpPr>
+        <p:spPr>
+          <a:xfrm>
+            <a:off x="802593" y="916252"/>
+            <a:ext cx="2376973" cy="307975"/>
+          </a:xfrm>
+          <a:prstGeom prst="rect">
+            <a:avLst/>
+          </a:prstGeom>
+        </p:spPr>
+        <p:txBody>
+          <a:bodyPr wrap="square" lIns="0" tIns="0" rIns="0" bIns="0">
+            <a:spAutoFit/>
+          </a:bodyPr>
+          <a:lstStyle>
+            <a:lvl1pPr>
+              <a:defRPr sz="2000" b="1" i="0">
+                <a:solidFill>
+                  <a:schemeClr val="tx1"/>
+                </a:solidFill>
+                <a:latin typeface="Calibri"/>
+                <a:ea typeface="+mj-ea"/>
+                <a:cs typeface="Calibri"/>
+              </a:defRPr>
+            </a:lvl1pPr>
+          </a:lstStyle>
+          <a:p>
+            <a:r>
+              <a:rPr lang="es-ES" kern="0" dirty="0"/>
+              <a:t>2.1 </a:t>
+            </a:r>
+            <a:r>
+              <a:rPr lang="en-US" b="0" dirty="0"/>
+              <a:t>Phase difference </a:t>
+            </a:r>
+            <a:endParaRPr lang="es-ES" b="0" kern="0" dirty="0"/>
+          </a:p>
+        </p:txBody>
+      </p:sp>
+      <mc:AlternateContent xmlns:mc="http://schemas.openxmlformats.org/markup-compatibility/2006" xmlns:a14="http://schemas.microsoft.com/office/drawing/2010/main">
+        <mc:Choice Requires="a14">
+          <p:sp>
+            <p:nvSpPr>
+              <p:cNvPr id="10" name="CuadroTexto 9">
+                <a:extLst>
+                  <a:ext uri="{FF2B5EF4-FFF2-40B4-BE49-F238E27FC236}">
+                    <a16:creationId xmlns:a16="http://schemas.microsoft.com/office/drawing/2014/main" id="{3A35EBB3-9CC1-DE04-8490-4CF95EC418B9}"/>
+                  </a:ext>
+                </a:extLst>
+              </p:cNvPr>
+              <p:cNvSpPr txBox="1"/>
+              <p:nvPr/>
+            </p:nvSpPr>
+            <p:spPr>
+              <a:xfrm>
+                <a:off x="802593" y="1280546"/>
+                <a:ext cx="2057400" cy="381515"/>
+              </a:xfrm>
+              <a:prstGeom prst="rect">
+                <a:avLst/>
+              </a:prstGeom>
+              <a:noFill/>
+            </p:spPr>
+            <p:txBody>
+              <a:bodyPr wrap="square" rtlCol="0">
+                <a:spAutoFit/>
+              </a:bodyPr>
+              <a:lstStyle/>
+              <a:p>
+                <a14:m>
+                  <m:oMath xmlns:m="http://schemas.openxmlformats.org/officeDocument/2006/math">
+                    <m:r>
+                      <m:rPr>
+                        <m:sty m:val="p"/>
+                      </m:rPr>
+                      <a:rPr lang="es-ES" i="1" smtClean="0">
+                        <a:latin typeface="Cambria Math" panose="02040503050406030204" pitchFamily="18" charset="0"/>
+                      </a:rPr>
+                      <m:t>α</m:t>
+                    </m:r>
+                    <m:r>
+                      <a:rPr lang="es-ES" b="0" i="1" smtClean="0">
+                        <a:latin typeface="Cambria Math" panose="02040503050406030204" pitchFamily="18" charset="0"/>
+                      </a:rPr>
+                      <m:t>=</m:t>
+                    </m:r>
+                    <m:r>
+                      <a:rPr lang="es-ES" i="1">
+                        <a:latin typeface="Cambria Math" panose="02040503050406030204" pitchFamily="18" charset="0"/>
+                        <a:ea typeface="Cambria Math" panose="02040503050406030204" pitchFamily="18" charset="0"/>
+                      </a:rPr>
+                      <m:t>0</m:t>
+                    </m:r>
+                  </m:oMath>
+                </a14:m>
+                <a:r>
+                  <a:rPr lang="en-US" kern="0" dirty="0">
+                    <a:solidFill>
+                      <a:sysClr val="windowText" lastClr="000000"/>
+                    </a:solidFill>
+                  </a:rPr>
+                  <a:t> and </a:t>
+                </a:r>
+                <a14:m>
+                  <m:oMath xmlns:m="http://schemas.openxmlformats.org/officeDocument/2006/math">
+                    <m:sSub>
+                      <m:sSubPr>
+                        <m:ctrlPr>
+                          <a:rPr lang="es-ES" b="0" i="1" smtClean="0">
+                            <a:latin typeface="Cambria Math" panose="02040503050406030204" pitchFamily="18" charset="0"/>
+                          </a:rPr>
+                        </m:ctrlPr>
+                      </m:sSubPr>
+                      <m:e>
+                        <m:r>
+                          <m:rPr>
+                            <m:sty m:val="p"/>
+                          </m:rPr>
+                          <a:rPr lang="es-ES" i="1" smtClean="0">
+                            <a:latin typeface="Cambria Math" panose="02040503050406030204" pitchFamily="18" charset="0"/>
+                          </a:rPr>
+                          <m:t>γ</m:t>
+                        </m:r>
+                      </m:e>
+                      <m:sub>
+                        <m:r>
+                          <a:rPr lang="es-ES" b="0" i="1" smtClean="0">
+                            <a:latin typeface="Cambria Math" panose="02040503050406030204" pitchFamily="18" charset="0"/>
+                          </a:rPr>
+                          <m:t>𝑎</m:t>
+                        </m:r>
+                        <m:r>
+                          <a:rPr lang="es-ES" b="0" i="1" smtClean="0">
+                            <a:latin typeface="Cambria Math" panose="02040503050406030204" pitchFamily="18" charset="0"/>
+                          </a:rPr>
+                          <m:t>, </m:t>
+                        </m:r>
+                        <m:r>
+                          <a:rPr lang="es-ES" b="0" i="1" smtClean="0">
+                            <a:latin typeface="Cambria Math" panose="02040503050406030204" pitchFamily="18" charset="0"/>
+                          </a:rPr>
+                          <m:t>𝑏</m:t>
+                        </m:r>
+                      </m:sub>
+                    </m:sSub>
+                    <m:r>
+                      <a:rPr lang="es-ES" b="0" i="1" smtClean="0">
+                        <a:latin typeface="Cambria Math" panose="02040503050406030204" pitchFamily="18" charset="0"/>
+                      </a:rPr>
+                      <m:t>=</m:t>
+                    </m:r>
+                    <m:r>
+                      <a:rPr lang="es-ES" i="1">
+                        <a:latin typeface="Cambria Math" panose="02040503050406030204" pitchFamily="18" charset="0"/>
+                        <a:ea typeface="Cambria Math" panose="02040503050406030204" pitchFamily="18" charset="0"/>
+                      </a:rPr>
+                      <m:t>0</m:t>
+                    </m:r>
+                  </m:oMath>
+                </a14:m>
+                <a:endParaRPr lang="es-ES" dirty="0"/>
+              </a:p>
+            </p:txBody>
+          </p:sp>
+        </mc:Choice>
+        <mc:Fallback xmlns="">
+          <p:sp>
+            <p:nvSpPr>
+              <p:cNvPr id="10" name="CuadroTexto 9">
+                <a:extLst>
+                  <a:ext uri="{FF2B5EF4-FFF2-40B4-BE49-F238E27FC236}">
+                    <a16:creationId xmlns:a16="http://schemas.microsoft.com/office/drawing/2014/main" id="{3A35EBB3-9CC1-DE04-8490-4CF95EC418B9}"/>
+                  </a:ext>
+                </a:extLst>
+              </p:cNvPr>
+              <p:cNvSpPr txBox="1">
+                <a:spLocks noRot="1" noChangeAspect="1" noMove="1" noResize="1" noEditPoints="1" noAdjustHandles="1" noChangeArrowheads="1" noChangeShapeType="1" noTextEdit="1"/>
+              </p:cNvSpPr>
+              <p:nvPr/>
+            </p:nvSpPr>
+            <p:spPr>
+              <a:xfrm>
+                <a:off x="802593" y="1280546"/>
+                <a:ext cx="2057400" cy="381515"/>
+              </a:xfrm>
+              <a:prstGeom prst="rect">
+                <a:avLst/>
+              </a:prstGeom>
+              <a:blipFill>
+                <a:blip r:embed="rId2"/>
+                <a:stretch>
+                  <a:fillRect t="-6349" b="-22222"/>
+                </a:stretch>
+              </a:blipFill>
+            </p:spPr>
+            <p:txBody>
+              <a:bodyPr/>
+              <a:lstStyle/>
+              <a:p>
+                <a:r>
+                  <a:rPr lang="es-ES">
+                    <a:noFill/>
+                  </a:rPr>
+                  <a:t> </a:t>
+                </a:r>
+              </a:p>
+            </p:txBody>
+          </p:sp>
+        </mc:Fallback>
+      </mc:AlternateContent>
+      <mc:AlternateContent xmlns:mc="http://schemas.openxmlformats.org/markup-compatibility/2006" xmlns:a14="http://schemas.microsoft.com/office/drawing/2010/main">
+        <mc:Choice Requires="a14">
+          <p:sp>
+            <p:nvSpPr>
+              <p:cNvPr id="11" name="CuadroTexto 10">
+                <a:extLst>
+                  <a:ext uri="{FF2B5EF4-FFF2-40B4-BE49-F238E27FC236}">
+                    <a16:creationId xmlns:a16="http://schemas.microsoft.com/office/drawing/2014/main" id="{A45C4B5E-6B2E-8066-42FA-11E63755FF08}"/>
+                  </a:ext>
+                </a:extLst>
+              </p:cNvPr>
+              <p:cNvSpPr txBox="1"/>
+              <p:nvPr/>
+            </p:nvSpPr>
+            <p:spPr>
+              <a:xfrm>
+                <a:off x="2859993" y="1276909"/>
+                <a:ext cx="2743200" cy="369332"/>
+              </a:xfrm>
+              <a:prstGeom prst="rect">
+                <a:avLst/>
+              </a:prstGeom>
+              <a:noFill/>
+            </p:spPr>
+            <p:txBody>
+              <a:bodyPr wrap="square" rtlCol="0">
+                <a:spAutoFit/>
+              </a:bodyPr>
+              <a:lstStyle/>
+              <a:p>
+                <a14:m>
+                  <m:oMath xmlns:m="http://schemas.openxmlformats.org/officeDocument/2006/math">
+                    <m:sSub>
+                      <m:sSubPr>
+                        <m:ctrlPr>
+                          <a:rPr lang="es-ES" b="0" i="1" smtClean="0">
+                            <a:latin typeface="Cambria Math" panose="02040503050406030204" pitchFamily="18" charset="0"/>
+                          </a:rPr>
+                        </m:ctrlPr>
+                      </m:sSubPr>
+                      <m:e>
+                        <m:r>
+                          <m:rPr>
+                            <m:sty m:val="p"/>
+                          </m:rPr>
+                          <a:rPr lang="es-ES" i="1" smtClean="0">
+                            <a:latin typeface="Cambria Math" panose="02040503050406030204" pitchFamily="18" charset="0"/>
+                          </a:rPr>
+                          <m:t>k</m:t>
+                        </m:r>
+                      </m:e>
+                      <m:sub>
+                        <m:r>
+                          <a:rPr lang="es-ES" b="0" i="1" smtClean="0">
+                            <a:latin typeface="Cambria Math" panose="02040503050406030204" pitchFamily="18" charset="0"/>
+                          </a:rPr>
+                          <m:t>𝑎</m:t>
+                        </m:r>
+                      </m:sub>
+                    </m:sSub>
+                    <m:r>
+                      <a:rPr lang="es-ES" b="0" i="1" smtClean="0">
+                        <a:latin typeface="Cambria Math" panose="02040503050406030204" pitchFamily="18" charset="0"/>
+                      </a:rPr>
+                      <m:t>=</m:t>
+                    </m:r>
+                    <m:r>
+                      <a:rPr lang="es-ES" i="1">
+                        <a:latin typeface="Cambria Math" panose="02040503050406030204" pitchFamily="18" charset="0"/>
+                        <a:ea typeface="Cambria Math" panose="02040503050406030204" pitchFamily="18" charset="0"/>
+                      </a:rPr>
+                      <m:t>0</m:t>
+                    </m:r>
+                    <m:r>
+                      <a:rPr lang="es-ES" b="0" i="0" smtClean="0">
+                        <a:latin typeface="Cambria Math" panose="02040503050406030204" pitchFamily="18" charset="0"/>
+                        <a:ea typeface="Cambria Math" panose="02040503050406030204" pitchFamily="18" charset="0"/>
+                      </a:rPr>
+                      <m:t>.5</m:t>
+                    </m:r>
+                  </m:oMath>
+                </a14:m>
+                <a:r>
+                  <a:rPr lang="en-US" kern="0" dirty="0">
+                    <a:solidFill>
+                      <a:sysClr val="windowText" lastClr="000000"/>
+                    </a:solidFill>
+                  </a:rPr>
+                  <a:t> and </a:t>
+                </a:r>
+                <a14:m>
+                  <m:oMath xmlns:m="http://schemas.openxmlformats.org/officeDocument/2006/math">
+                    <m:sSub>
+                      <m:sSubPr>
+                        <m:ctrlPr>
+                          <a:rPr lang="es-ES" b="0" i="1" dirty="0" smtClean="0">
+                            <a:latin typeface="Cambria Math" panose="02040503050406030204" pitchFamily="18" charset="0"/>
+                          </a:rPr>
+                        </m:ctrlPr>
+                      </m:sSubPr>
+                      <m:e>
+                        <m:r>
+                          <m:rPr>
+                            <m:sty m:val="p"/>
+                          </m:rPr>
+                          <a:rPr lang="es-ES" i="1" dirty="0">
+                            <a:latin typeface="Cambria Math" panose="02040503050406030204" pitchFamily="18" charset="0"/>
+                          </a:rPr>
+                          <m:t>k</m:t>
+                        </m:r>
+                      </m:e>
+                      <m:sub>
+                        <m:r>
+                          <a:rPr lang="es-ES" b="0" i="1" dirty="0" smtClean="0">
+                            <a:latin typeface="Cambria Math" panose="02040503050406030204" pitchFamily="18" charset="0"/>
+                          </a:rPr>
+                          <m:t>𝑏</m:t>
+                        </m:r>
+                      </m:sub>
+                    </m:sSub>
+                    <m:r>
+                      <a:rPr lang="es-ES" b="0" i="1" smtClean="0">
+                        <a:latin typeface="Cambria Math" panose="02040503050406030204" pitchFamily="18" charset="0"/>
+                      </a:rPr>
+                      <m:t>=</m:t>
+                    </m:r>
+                    <m:r>
+                      <a:rPr lang="es-ES" i="1">
+                        <a:latin typeface="Cambria Math" panose="02040503050406030204" pitchFamily="18" charset="0"/>
+                        <a:ea typeface="Cambria Math" panose="02040503050406030204" pitchFamily="18" charset="0"/>
+                      </a:rPr>
+                      <m:t>0</m:t>
+                    </m:r>
+                    <m:r>
+                      <a:rPr lang="es-ES" b="0" i="1" smtClean="0">
+                        <a:latin typeface="Cambria Math" panose="02040503050406030204" pitchFamily="18" charset="0"/>
+                        <a:ea typeface="Cambria Math" panose="02040503050406030204" pitchFamily="18" charset="0"/>
+                      </a:rPr>
+                      <m:t>.5 </m:t>
+                    </m:r>
+                  </m:oMath>
+                </a14:m>
+                <a:endParaRPr lang="es-ES" dirty="0"/>
+              </a:p>
+            </p:txBody>
+          </p:sp>
+        </mc:Choice>
+        <mc:Fallback xmlns="">
+          <p:sp>
+            <p:nvSpPr>
+              <p:cNvPr id="11" name="CuadroTexto 10">
+                <a:extLst>
+                  <a:ext uri="{FF2B5EF4-FFF2-40B4-BE49-F238E27FC236}">
+                    <a16:creationId xmlns:a16="http://schemas.microsoft.com/office/drawing/2014/main" id="{A45C4B5E-6B2E-8066-42FA-11E63755FF08}"/>
+                  </a:ext>
+                </a:extLst>
+              </p:cNvPr>
+              <p:cNvSpPr txBox="1">
+                <a:spLocks noRot="1" noChangeAspect="1" noMove="1" noResize="1" noEditPoints="1" noAdjustHandles="1" noChangeArrowheads="1" noChangeShapeType="1" noTextEdit="1"/>
+              </p:cNvSpPr>
+              <p:nvPr/>
+            </p:nvSpPr>
+            <p:spPr>
+              <a:xfrm>
+                <a:off x="2859993" y="1276909"/>
+                <a:ext cx="2743200" cy="369332"/>
+              </a:xfrm>
+              <a:prstGeom prst="rect">
+                <a:avLst/>
+              </a:prstGeom>
+              <a:blipFill>
+                <a:blip r:embed="rId3"/>
+                <a:stretch>
+                  <a:fillRect t="-8197" b="-24590"/>
+                </a:stretch>
+              </a:blipFill>
+            </p:spPr>
+            <p:txBody>
+              <a:bodyPr/>
+              <a:lstStyle/>
+              <a:p>
+                <a:r>
+                  <a:rPr lang="es-ES">
+                    <a:noFill/>
+                  </a:rPr>
+                  <a:t> </a:t>
+                </a:r>
+              </a:p>
+            </p:txBody>
+          </p:sp>
+        </mc:Fallback>
+      </mc:AlternateContent>
+      <mc:AlternateContent xmlns:mc="http://schemas.openxmlformats.org/markup-compatibility/2006" xmlns:a14="http://schemas.microsoft.com/office/drawing/2010/main">
+        <mc:Choice Requires="a14">
+          <p:sp>
+            <p:nvSpPr>
+              <p:cNvPr id="12" name="CuadroTexto 11">
+                <a:extLst>
+                  <a:ext uri="{FF2B5EF4-FFF2-40B4-BE49-F238E27FC236}">
+                    <a16:creationId xmlns:a16="http://schemas.microsoft.com/office/drawing/2014/main" id="{0580FF97-68F4-7137-112E-24281DDE1CAE}"/>
+                  </a:ext>
+                </a:extLst>
+              </p:cNvPr>
+              <p:cNvSpPr txBox="1"/>
+              <p:nvPr/>
+            </p:nvSpPr>
+            <p:spPr>
+              <a:xfrm>
+                <a:off x="345393" y="1664150"/>
+                <a:ext cx="2743200" cy="369332"/>
+              </a:xfrm>
+              <a:prstGeom prst="rect">
+                <a:avLst/>
+              </a:prstGeom>
+              <a:noFill/>
+            </p:spPr>
+            <p:txBody>
+              <a:bodyPr wrap="square" rtlCol="0">
+                <a:spAutoFit/>
+              </a:bodyPr>
+              <a:lstStyle/>
+              <a:p>
+                <a:pPr/>
+                <a14:m>
+                  <m:oMathPara xmlns:m="http://schemas.openxmlformats.org/officeDocument/2006/math">
+                    <m:oMathParaPr>
+                      <m:jc m:val="centerGroup"/>
+                    </m:oMathParaPr>
+                    <m:oMath xmlns:m="http://schemas.openxmlformats.org/officeDocument/2006/math">
+                      <m:sSub>
+                        <m:sSubPr>
+                          <m:ctrlPr>
+                            <a:rPr lang="es-ES" b="0" i="1" smtClean="0">
+                              <a:latin typeface="Cambria Math" panose="02040503050406030204" pitchFamily="18" charset="0"/>
+                            </a:rPr>
+                          </m:ctrlPr>
+                        </m:sSubPr>
+                        <m:e>
+                          <m:r>
+                            <a:rPr lang="es-ES" b="0" i="1" smtClean="0">
+                              <a:latin typeface="Cambria Math" panose="02040503050406030204" pitchFamily="18" charset="0"/>
+                            </a:rPr>
+                            <m:t>𝑛</m:t>
+                          </m:r>
+                          <m:r>
+                            <a:rPr lang="es-ES" b="0" i="1" smtClean="0">
+                              <a:latin typeface="Cambria Math" panose="02040503050406030204" pitchFamily="18" charset="0"/>
+                            </a:rPr>
+                            <m:t>_</m:t>
+                          </m:r>
+                          <m:r>
+                            <a:rPr lang="es-ES" b="0" i="1" smtClean="0">
+                              <a:latin typeface="Cambria Math" panose="02040503050406030204" pitchFamily="18" charset="0"/>
+                            </a:rPr>
+                            <m:t>𝑒𝑓𝑓</m:t>
+                          </m:r>
+                        </m:e>
+                        <m:sub>
+                          <m:r>
+                            <a:rPr lang="es-ES" b="0" i="1" smtClean="0">
+                              <a:latin typeface="Cambria Math" panose="02040503050406030204" pitchFamily="18" charset="0"/>
+                            </a:rPr>
+                            <m:t>𝑢</m:t>
+                          </m:r>
+                          <m:r>
+                            <a:rPr lang="es-ES" b="0" i="1" smtClean="0">
+                              <a:latin typeface="Cambria Math" panose="02040503050406030204" pitchFamily="18" charset="0"/>
+                            </a:rPr>
+                            <m:t> </m:t>
+                          </m:r>
+                        </m:sub>
+                      </m:sSub>
+                      <m:r>
+                        <a:rPr lang="es-ES" b="0" i="1" smtClean="0">
+                          <a:latin typeface="Cambria Math" panose="02040503050406030204" pitchFamily="18" charset="0"/>
+                        </a:rPr>
+                        <m:t>!=</m:t>
+                      </m:r>
+                      <m:sSub>
+                        <m:sSubPr>
+                          <m:ctrlPr>
+                            <a:rPr lang="es-ES" i="1">
+                              <a:latin typeface="Cambria Math" panose="02040503050406030204" pitchFamily="18" charset="0"/>
+                            </a:rPr>
+                          </m:ctrlPr>
+                        </m:sSubPr>
+                        <m:e>
+                          <m:r>
+                            <a:rPr lang="es-ES" i="1">
+                              <a:latin typeface="Cambria Math" panose="02040503050406030204" pitchFamily="18" charset="0"/>
+                            </a:rPr>
+                            <m:t>𝑛</m:t>
+                          </m:r>
+                          <m:r>
+                            <a:rPr lang="es-ES" i="1">
+                              <a:latin typeface="Cambria Math" panose="02040503050406030204" pitchFamily="18" charset="0"/>
+                            </a:rPr>
+                            <m:t>_</m:t>
+                          </m:r>
+                          <m:r>
+                            <a:rPr lang="es-ES" i="1">
+                              <a:latin typeface="Cambria Math" panose="02040503050406030204" pitchFamily="18" charset="0"/>
+                            </a:rPr>
+                            <m:t>𝑒𝑓𝑓</m:t>
+                          </m:r>
+                        </m:e>
+                        <m:sub>
+                          <m:r>
+                            <a:rPr lang="es-ES" b="0" i="1" smtClean="0">
+                              <a:latin typeface="Cambria Math" panose="02040503050406030204" pitchFamily="18" charset="0"/>
+                            </a:rPr>
+                            <m:t>𝑙</m:t>
+                          </m:r>
+                        </m:sub>
+                      </m:sSub>
+                    </m:oMath>
+                  </m:oMathPara>
+                </a14:m>
+                <a:endParaRPr lang="es-ES" dirty="0"/>
+              </a:p>
+            </p:txBody>
+          </p:sp>
+        </mc:Choice>
+        <mc:Fallback xmlns="">
+          <p:sp>
+            <p:nvSpPr>
+              <p:cNvPr id="12" name="CuadroTexto 11">
+                <a:extLst>
+                  <a:ext uri="{FF2B5EF4-FFF2-40B4-BE49-F238E27FC236}">
+                    <a16:creationId xmlns:a16="http://schemas.microsoft.com/office/drawing/2014/main" id="{0580FF97-68F4-7137-112E-24281DDE1CAE}"/>
+                  </a:ext>
+                </a:extLst>
+              </p:cNvPr>
+              <p:cNvSpPr txBox="1">
+                <a:spLocks noRot="1" noChangeAspect="1" noMove="1" noResize="1" noEditPoints="1" noAdjustHandles="1" noChangeArrowheads="1" noChangeShapeType="1" noTextEdit="1"/>
+              </p:cNvSpPr>
+              <p:nvPr/>
+            </p:nvSpPr>
+            <p:spPr>
+              <a:xfrm>
+                <a:off x="345393" y="1664150"/>
+                <a:ext cx="2743200" cy="369332"/>
+              </a:xfrm>
+              <a:prstGeom prst="rect">
+                <a:avLst/>
+              </a:prstGeom>
+              <a:blipFill>
+                <a:blip r:embed="rId4"/>
+                <a:stretch>
+                  <a:fillRect b="-11475"/>
+                </a:stretch>
+              </a:blipFill>
+            </p:spPr>
+            <p:txBody>
+              <a:bodyPr/>
+              <a:lstStyle/>
+              <a:p>
+                <a:r>
+                  <a:rPr lang="es-ES">
+                    <a:noFill/>
+                  </a:rPr>
+                  <a:t> </a:t>
+                </a:r>
+              </a:p>
+            </p:txBody>
+          </p:sp>
+        </mc:Fallback>
+      </mc:AlternateContent>
+      <mc:AlternateContent xmlns:mc="http://schemas.openxmlformats.org/markup-compatibility/2006" xmlns:a14="http://schemas.microsoft.com/office/drawing/2010/main">
+        <mc:Choice Requires="a14">
+          <p:sp>
+            <p:nvSpPr>
+              <p:cNvPr id="13" name="CuadroTexto 12">
+                <a:extLst>
+                  <a:ext uri="{FF2B5EF4-FFF2-40B4-BE49-F238E27FC236}">
+                    <a16:creationId xmlns:a16="http://schemas.microsoft.com/office/drawing/2014/main" id="{DEEC3311-F425-9585-3F48-2285E6C4675B}"/>
+                  </a:ext>
+                </a:extLst>
+              </p:cNvPr>
+              <p:cNvSpPr txBox="1"/>
+              <p:nvPr/>
+            </p:nvSpPr>
+            <p:spPr>
+              <a:xfrm>
+                <a:off x="2859993" y="1660513"/>
+                <a:ext cx="2743200" cy="369332"/>
+              </a:xfrm>
+              <a:prstGeom prst="rect">
+                <a:avLst/>
+              </a:prstGeom>
+              <a:noFill/>
+            </p:spPr>
+            <p:txBody>
+              <a:bodyPr wrap="square" rtlCol="0">
+                <a:spAutoFit/>
+              </a:bodyPr>
+              <a:lstStyle/>
+              <a:p>
+                <a14:m>
+                  <m:oMath xmlns:m="http://schemas.openxmlformats.org/officeDocument/2006/math">
+                    <m:sSub>
+                      <m:sSubPr>
+                        <m:ctrlPr>
+                          <a:rPr lang="es-ES" b="0" i="1" smtClean="0">
+                            <a:latin typeface="Cambria Math" panose="02040503050406030204" pitchFamily="18" charset="0"/>
+                          </a:rPr>
+                        </m:ctrlPr>
+                      </m:sSubPr>
+                      <m:e>
+                        <m:r>
+                          <a:rPr lang="es-ES" b="0" i="1" smtClean="0">
+                            <a:latin typeface="Cambria Math" panose="02040503050406030204" pitchFamily="18" charset="0"/>
+                          </a:rPr>
+                          <m:t>𝐿</m:t>
+                        </m:r>
+                      </m:e>
+                      <m:sub>
+                        <m:r>
+                          <a:rPr lang="es-ES" b="0" i="1" smtClean="0">
+                            <a:latin typeface="Cambria Math" panose="02040503050406030204" pitchFamily="18" charset="0"/>
+                          </a:rPr>
+                          <m:t>𝑢</m:t>
+                        </m:r>
+                      </m:sub>
+                    </m:sSub>
+                    <m:r>
+                      <a:rPr lang="es-ES" b="0" i="1" smtClean="0">
+                        <a:latin typeface="Cambria Math" panose="02040503050406030204" pitchFamily="18" charset="0"/>
+                      </a:rPr>
+                      <m:t>=</m:t>
+                    </m:r>
+                    <m:sSub>
+                      <m:sSubPr>
+                        <m:ctrlPr>
+                          <a:rPr lang="es-ES" i="1">
+                            <a:latin typeface="Cambria Math" panose="02040503050406030204" pitchFamily="18" charset="0"/>
+                          </a:rPr>
+                        </m:ctrlPr>
+                      </m:sSubPr>
+                      <m:e>
+                        <m:r>
+                          <a:rPr lang="es-ES" b="0" i="1" smtClean="0">
+                            <a:latin typeface="Cambria Math" panose="02040503050406030204" pitchFamily="18" charset="0"/>
+                          </a:rPr>
+                          <m:t>𝐿</m:t>
+                        </m:r>
+                      </m:e>
+                      <m:sub>
+                        <m:r>
+                          <a:rPr lang="es-ES" b="0" i="1" smtClean="0">
+                            <a:latin typeface="Cambria Math" panose="02040503050406030204" pitchFamily="18" charset="0"/>
+                          </a:rPr>
+                          <m:t>𝑙</m:t>
+                        </m:r>
+                        <m:r>
+                          <a:rPr lang="es-ES" b="0" i="1" smtClean="0">
+                            <a:latin typeface="Cambria Math" panose="02040503050406030204" pitchFamily="18" charset="0"/>
+                          </a:rPr>
+                          <m:t> </m:t>
+                        </m:r>
+                      </m:sub>
+                    </m:sSub>
+                  </m:oMath>
+                </a14:m>
+                <a:r>
+                  <a:rPr lang="es-ES" dirty="0"/>
+                  <a:t> </a:t>
+                </a:r>
+                <a14:m>
+                  <m:oMath xmlns:m="http://schemas.openxmlformats.org/officeDocument/2006/math">
+                    <m:r>
+                      <a:rPr lang="es-ES" i="1">
+                        <a:latin typeface="Cambria Math" panose="02040503050406030204" pitchFamily="18" charset="0"/>
+                      </a:rPr>
+                      <m:t>=</m:t>
+                    </m:r>
+                    <m:r>
+                      <a:rPr lang="es-ES" b="0" i="1" smtClean="0">
+                        <a:latin typeface="Cambria Math" panose="02040503050406030204" pitchFamily="18" charset="0"/>
+                      </a:rPr>
+                      <m:t>25 </m:t>
+                    </m:r>
+                    <m:r>
+                      <a:rPr lang="es-ES" b="0" i="1" smtClean="0">
+                        <a:latin typeface="Cambria Math" panose="02040503050406030204" pitchFamily="18" charset="0"/>
+                      </a:rPr>
+                      <m:t>𝑢𝑚</m:t>
+                    </m:r>
+                  </m:oMath>
+                </a14:m>
+                <a:endParaRPr lang="es-ES" dirty="0"/>
+              </a:p>
+            </p:txBody>
+          </p:sp>
+        </mc:Choice>
+        <mc:Fallback xmlns="">
+          <p:sp>
+            <p:nvSpPr>
+              <p:cNvPr id="13" name="CuadroTexto 12">
+                <a:extLst>
+                  <a:ext uri="{FF2B5EF4-FFF2-40B4-BE49-F238E27FC236}">
+                    <a16:creationId xmlns:a16="http://schemas.microsoft.com/office/drawing/2014/main" id="{DEEC3311-F425-9585-3F48-2285E6C4675B}"/>
+                  </a:ext>
+                </a:extLst>
+              </p:cNvPr>
+              <p:cNvSpPr txBox="1">
+                <a:spLocks noRot="1" noChangeAspect="1" noMove="1" noResize="1" noEditPoints="1" noAdjustHandles="1" noChangeArrowheads="1" noChangeShapeType="1" noTextEdit="1"/>
+              </p:cNvSpPr>
+              <p:nvPr/>
+            </p:nvSpPr>
+            <p:spPr>
+              <a:xfrm>
+                <a:off x="2859993" y="1660513"/>
+                <a:ext cx="2743200" cy="369332"/>
+              </a:xfrm>
+              <a:prstGeom prst="rect">
+                <a:avLst/>
+              </a:prstGeom>
+              <a:blipFill>
+                <a:blip r:embed="rId5"/>
+                <a:stretch>
+                  <a:fillRect/>
+                </a:stretch>
+              </a:blipFill>
+            </p:spPr>
+            <p:txBody>
+              <a:bodyPr/>
+              <a:lstStyle/>
+              <a:p>
+                <a:r>
+                  <a:rPr lang="es-ES">
+                    <a:noFill/>
+                  </a:rPr>
+                  <a:t> </a:t>
+                </a:r>
+              </a:p>
+            </p:txBody>
+          </p:sp>
+        </mc:Fallback>
+      </mc:AlternateContent>
+      <p:sp>
+        <p:nvSpPr>
+          <p:cNvPr id="14" name="CuadroTexto 13">
+            <a:extLst>
+              <a:ext uri="{FF2B5EF4-FFF2-40B4-BE49-F238E27FC236}">
+                <a16:creationId xmlns:a16="http://schemas.microsoft.com/office/drawing/2014/main" id="{BF276932-CE61-638D-5FC1-42B4E50E846C}"/>
+              </a:ext>
+            </a:extLst>
+          </p:cNvPr>
+          <p:cNvSpPr txBox="1"/>
+          <p:nvPr/>
+        </p:nvSpPr>
+        <p:spPr>
+          <a:xfrm>
+            <a:off x="721306" y="1759613"/>
+            <a:ext cx="6248400" cy="1754326"/>
+          </a:xfrm>
+          <a:prstGeom prst="rect">
+            <a:avLst/>
+          </a:prstGeom>
+          <a:noFill/>
+        </p:spPr>
+        <p:txBody>
+          <a:bodyPr wrap="square" rtlCol="0">
+            <a:spAutoFit/>
+          </a:bodyPr>
+          <a:lstStyle/>
+          <a:p>
+            <a:endParaRPr lang="es-ES" dirty="0"/>
+          </a:p>
+          <a:p>
+            <a:r>
+              <a:rPr lang="es-ES" dirty="0"/>
+              <a:t>En este caso, al tener los brazos, distinto índice efectivo, al variar la longitud de onda de la fuente, si habrá dependencia de la interferencia con la longitud de onda. Esto se debe a que la luz se propagará de distinta manera en cada brazo.  </a:t>
+            </a:r>
+          </a:p>
+          <a:p>
+            <a:endParaRPr lang="es-ES" dirty="0"/>
+          </a:p>
+        </p:txBody>
+      </p:sp>
+      <p:sp>
+        <p:nvSpPr>
+          <p:cNvPr id="15" name="Marcador de texto 2">
+            <a:extLst>
+              <a:ext uri="{FF2B5EF4-FFF2-40B4-BE49-F238E27FC236}">
+                <a16:creationId xmlns:a16="http://schemas.microsoft.com/office/drawing/2014/main" id="{42D586FB-3E25-450A-5DAC-ABA3688454B4}"/>
+              </a:ext>
+            </a:extLst>
+          </p:cNvPr>
+          <p:cNvSpPr txBox="1">
+            <a:spLocks/>
+          </p:cNvSpPr>
+          <p:nvPr/>
+        </p:nvSpPr>
+        <p:spPr>
+          <a:xfrm>
+            <a:off x="802593" y="3580927"/>
+            <a:ext cx="5159668" cy="307975"/>
+          </a:xfrm>
+          <a:prstGeom prst="rect">
+            <a:avLst/>
+          </a:prstGeom>
+        </p:spPr>
+        <p:txBody>
+          <a:bodyPr wrap="square" lIns="0" tIns="0" rIns="0" bIns="0">
+            <a:spAutoFit/>
+          </a:bodyPr>
+          <a:lstStyle>
+            <a:lvl1pPr>
+              <a:defRPr sz="2000" b="1" i="0">
+                <a:solidFill>
+                  <a:schemeClr val="tx1"/>
+                </a:solidFill>
+                <a:latin typeface="Calibri"/>
+                <a:ea typeface="+mj-ea"/>
+                <a:cs typeface="Calibri"/>
+              </a:defRPr>
+            </a:lvl1pPr>
+          </a:lstStyle>
+          <a:p>
+            <a:r>
+              <a:rPr lang="es-ES" kern="0" dirty="0"/>
+              <a:t>2.2 </a:t>
+            </a:r>
+            <a:r>
+              <a:rPr lang="en-US" b="0" dirty="0"/>
+              <a:t>Delay imbalance (Si)</a:t>
+            </a:r>
+            <a:endParaRPr lang="es-ES" b="0" kern="0" dirty="0"/>
+          </a:p>
+        </p:txBody>
+      </p:sp>
+      <mc:AlternateContent xmlns:mc="http://schemas.openxmlformats.org/markup-compatibility/2006" xmlns:a14="http://schemas.microsoft.com/office/drawing/2010/main">
+        <mc:Choice Requires="a14">
+          <p:sp>
+            <p:nvSpPr>
+              <p:cNvPr id="16" name="CuadroTexto 15">
+                <a:extLst>
+                  <a:ext uri="{FF2B5EF4-FFF2-40B4-BE49-F238E27FC236}">
+                    <a16:creationId xmlns:a16="http://schemas.microsoft.com/office/drawing/2014/main" id="{028E9246-53CF-7BD3-8B41-63CFFDB49D90}"/>
+                  </a:ext>
+                </a:extLst>
+              </p:cNvPr>
+              <p:cNvSpPr txBox="1"/>
+              <p:nvPr/>
+            </p:nvSpPr>
+            <p:spPr>
+              <a:xfrm>
+                <a:off x="766404" y="3962092"/>
+                <a:ext cx="2057400" cy="381515"/>
+              </a:xfrm>
+              <a:prstGeom prst="rect">
+                <a:avLst/>
+              </a:prstGeom>
+              <a:noFill/>
+            </p:spPr>
+            <p:txBody>
+              <a:bodyPr wrap="square" rtlCol="0">
+                <a:spAutoFit/>
+              </a:bodyPr>
+              <a:lstStyle/>
+              <a:p>
+                <a14:m>
+                  <m:oMath xmlns:m="http://schemas.openxmlformats.org/officeDocument/2006/math">
+                    <m:r>
+                      <m:rPr>
+                        <m:sty m:val="p"/>
+                      </m:rPr>
+                      <a:rPr lang="es-ES" i="1" smtClean="0">
+                        <a:latin typeface="Cambria Math" panose="02040503050406030204" pitchFamily="18" charset="0"/>
+                      </a:rPr>
+                      <m:t>α</m:t>
+                    </m:r>
+                    <m:r>
+                      <a:rPr lang="es-ES" b="0" i="1" smtClean="0">
+                        <a:latin typeface="Cambria Math" panose="02040503050406030204" pitchFamily="18" charset="0"/>
+                      </a:rPr>
+                      <m:t>=</m:t>
+                    </m:r>
+                    <m:r>
+                      <a:rPr lang="es-ES" i="1">
+                        <a:latin typeface="Cambria Math" panose="02040503050406030204" pitchFamily="18" charset="0"/>
+                        <a:ea typeface="Cambria Math" panose="02040503050406030204" pitchFamily="18" charset="0"/>
+                      </a:rPr>
+                      <m:t>0</m:t>
+                    </m:r>
+                  </m:oMath>
+                </a14:m>
+                <a:r>
+                  <a:rPr lang="en-US" kern="0" dirty="0">
+                    <a:solidFill>
+                      <a:sysClr val="windowText" lastClr="000000"/>
+                    </a:solidFill>
+                  </a:rPr>
+                  <a:t> and </a:t>
+                </a:r>
+                <a14:m>
+                  <m:oMath xmlns:m="http://schemas.openxmlformats.org/officeDocument/2006/math">
+                    <m:sSub>
+                      <m:sSubPr>
+                        <m:ctrlPr>
+                          <a:rPr lang="es-ES" b="0" i="1" smtClean="0">
+                            <a:latin typeface="Cambria Math" panose="02040503050406030204" pitchFamily="18" charset="0"/>
+                          </a:rPr>
+                        </m:ctrlPr>
+                      </m:sSubPr>
+                      <m:e>
+                        <m:r>
+                          <m:rPr>
+                            <m:sty m:val="p"/>
+                          </m:rPr>
+                          <a:rPr lang="es-ES" i="1" smtClean="0">
+                            <a:latin typeface="Cambria Math" panose="02040503050406030204" pitchFamily="18" charset="0"/>
+                          </a:rPr>
+                          <m:t>γ</m:t>
+                        </m:r>
+                      </m:e>
+                      <m:sub>
+                        <m:r>
+                          <a:rPr lang="es-ES" b="0" i="1" smtClean="0">
+                            <a:latin typeface="Cambria Math" panose="02040503050406030204" pitchFamily="18" charset="0"/>
+                          </a:rPr>
+                          <m:t>𝑎</m:t>
+                        </m:r>
+                        <m:r>
+                          <a:rPr lang="es-ES" b="0" i="1" smtClean="0">
+                            <a:latin typeface="Cambria Math" panose="02040503050406030204" pitchFamily="18" charset="0"/>
+                          </a:rPr>
+                          <m:t>, </m:t>
+                        </m:r>
+                        <m:r>
+                          <a:rPr lang="es-ES" b="0" i="1" smtClean="0">
+                            <a:latin typeface="Cambria Math" panose="02040503050406030204" pitchFamily="18" charset="0"/>
+                          </a:rPr>
+                          <m:t>𝑏</m:t>
+                        </m:r>
+                      </m:sub>
+                    </m:sSub>
+                    <m:r>
+                      <a:rPr lang="es-ES" b="0" i="1" smtClean="0">
+                        <a:latin typeface="Cambria Math" panose="02040503050406030204" pitchFamily="18" charset="0"/>
+                      </a:rPr>
+                      <m:t>=</m:t>
+                    </m:r>
+                    <m:r>
+                      <a:rPr lang="es-ES" i="1">
+                        <a:latin typeface="Cambria Math" panose="02040503050406030204" pitchFamily="18" charset="0"/>
+                        <a:ea typeface="Cambria Math" panose="02040503050406030204" pitchFamily="18" charset="0"/>
+                      </a:rPr>
+                      <m:t>0</m:t>
+                    </m:r>
+                  </m:oMath>
+                </a14:m>
+                <a:endParaRPr lang="es-ES" dirty="0"/>
+              </a:p>
+            </p:txBody>
+          </p:sp>
+        </mc:Choice>
+        <mc:Fallback xmlns="">
+          <p:sp>
+            <p:nvSpPr>
+              <p:cNvPr id="16" name="CuadroTexto 15">
+                <a:extLst>
+                  <a:ext uri="{FF2B5EF4-FFF2-40B4-BE49-F238E27FC236}">
+                    <a16:creationId xmlns:a16="http://schemas.microsoft.com/office/drawing/2014/main" id="{028E9246-53CF-7BD3-8B41-63CFFDB49D90}"/>
+                  </a:ext>
+                </a:extLst>
+              </p:cNvPr>
+              <p:cNvSpPr txBox="1">
+                <a:spLocks noRot="1" noChangeAspect="1" noMove="1" noResize="1" noEditPoints="1" noAdjustHandles="1" noChangeArrowheads="1" noChangeShapeType="1" noTextEdit="1"/>
+              </p:cNvSpPr>
+              <p:nvPr/>
+            </p:nvSpPr>
+            <p:spPr>
+              <a:xfrm>
+                <a:off x="766404" y="3962092"/>
+                <a:ext cx="2057400" cy="381515"/>
+              </a:xfrm>
+              <a:prstGeom prst="rect">
+                <a:avLst/>
+              </a:prstGeom>
+              <a:blipFill>
+                <a:blip r:embed="rId6"/>
+                <a:stretch>
+                  <a:fillRect t="-7937" b="-22222"/>
+                </a:stretch>
+              </a:blipFill>
+            </p:spPr>
+            <p:txBody>
+              <a:bodyPr/>
+              <a:lstStyle/>
+              <a:p>
+                <a:r>
+                  <a:rPr lang="es-ES">
+                    <a:noFill/>
+                  </a:rPr>
+                  <a:t> </a:t>
+                </a:r>
+              </a:p>
+            </p:txBody>
+          </p:sp>
+        </mc:Fallback>
+      </mc:AlternateContent>
+      <mc:AlternateContent xmlns:mc="http://schemas.openxmlformats.org/markup-compatibility/2006" xmlns:a14="http://schemas.microsoft.com/office/drawing/2010/main">
+        <mc:Choice Requires="a14">
+          <p:sp>
+            <p:nvSpPr>
+              <p:cNvPr id="17" name="CuadroTexto 16">
+                <a:extLst>
+                  <a:ext uri="{FF2B5EF4-FFF2-40B4-BE49-F238E27FC236}">
+                    <a16:creationId xmlns:a16="http://schemas.microsoft.com/office/drawing/2014/main" id="{64814CE4-85DC-C00A-184A-4E08D7788E31}"/>
+                  </a:ext>
+                </a:extLst>
+              </p:cNvPr>
+              <p:cNvSpPr txBox="1"/>
+              <p:nvPr/>
+            </p:nvSpPr>
+            <p:spPr>
+              <a:xfrm>
+                <a:off x="2823804" y="3962092"/>
+                <a:ext cx="2743200" cy="369332"/>
+              </a:xfrm>
+              <a:prstGeom prst="rect">
+                <a:avLst/>
+              </a:prstGeom>
+              <a:noFill/>
+            </p:spPr>
+            <p:txBody>
+              <a:bodyPr wrap="square" rtlCol="0">
+                <a:spAutoFit/>
+              </a:bodyPr>
+              <a:lstStyle/>
+              <a:p>
+                <a14:m>
+                  <m:oMath xmlns:m="http://schemas.openxmlformats.org/officeDocument/2006/math">
+                    <m:sSub>
+                      <m:sSubPr>
+                        <m:ctrlPr>
+                          <a:rPr lang="es-ES" b="0" i="1" smtClean="0">
+                            <a:latin typeface="Cambria Math" panose="02040503050406030204" pitchFamily="18" charset="0"/>
+                          </a:rPr>
+                        </m:ctrlPr>
+                      </m:sSubPr>
+                      <m:e>
+                        <m:r>
+                          <m:rPr>
+                            <m:sty m:val="p"/>
+                          </m:rPr>
+                          <a:rPr lang="es-ES" i="1" smtClean="0">
+                            <a:latin typeface="Cambria Math" panose="02040503050406030204" pitchFamily="18" charset="0"/>
+                          </a:rPr>
+                          <m:t>k</m:t>
+                        </m:r>
+                      </m:e>
+                      <m:sub>
+                        <m:r>
+                          <a:rPr lang="es-ES" b="0" i="1" smtClean="0">
+                            <a:latin typeface="Cambria Math" panose="02040503050406030204" pitchFamily="18" charset="0"/>
+                          </a:rPr>
+                          <m:t>𝑎</m:t>
+                        </m:r>
+                      </m:sub>
+                    </m:sSub>
+                    <m:r>
+                      <a:rPr lang="es-ES" b="0" i="1" smtClean="0">
+                        <a:latin typeface="Cambria Math" panose="02040503050406030204" pitchFamily="18" charset="0"/>
+                      </a:rPr>
+                      <m:t>=</m:t>
+                    </m:r>
+                    <m:r>
+                      <a:rPr lang="es-ES" i="1">
+                        <a:latin typeface="Cambria Math" panose="02040503050406030204" pitchFamily="18" charset="0"/>
+                        <a:ea typeface="Cambria Math" panose="02040503050406030204" pitchFamily="18" charset="0"/>
+                      </a:rPr>
+                      <m:t>0</m:t>
+                    </m:r>
+                    <m:r>
+                      <a:rPr lang="es-ES" b="0" i="0" smtClean="0">
+                        <a:latin typeface="Cambria Math" panose="02040503050406030204" pitchFamily="18" charset="0"/>
+                        <a:ea typeface="Cambria Math" panose="02040503050406030204" pitchFamily="18" charset="0"/>
+                      </a:rPr>
+                      <m:t>.5</m:t>
+                    </m:r>
+                  </m:oMath>
+                </a14:m>
+                <a:r>
+                  <a:rPr lang="en-US" kern="0" dirty="0">
+                    <a:solidFill>
+                      <a:sysClr val="windowText" lastClr="000000"/>
+                    </a:solidFill>
+                  </a:rPr>
+                  <a:t> and </a:t>
+                </a:r>
+                <a14:m>
+                  <m:oMath xmlns:m="http://schemas.openxmlformats.org/officeDocument/2006/math">
+                    <m:sSub>
+                      <m:sSubPr>
+                        <m:ctrlPr>
+                          <a:rPr lang="es-ES" b="0" i="1" dirty="0" smtClean="0">
+                            <a:latin typeface="Cambria Math" panose="02040503050406030204" pitchFamily="18" charset="0"/>
+                          </a:rPr>
+                        </m:ctrlPr>
+                      </m:sSubPr>
+                      <m:e>
+                        <m:r>
+                          <m:rPr>
+                            <m:sty m:val="p"/>
+                          </m:rPr>
+                          <a:rPr lang="es-ES" i="1" dirty="0">
+                            <a:latin typeface="Cambria Math" panose="02040503050406030204" pitchFamily="18" charset="0"/>
+                          </a:rPr>
+                          <m:t>k</m:t>
+                        </m:r>
+                      </m:e>
+                      <m:sub>
+                        <m:r>
+                          <a:rPr lang="es-ES" b="0" i="1" dirty="0" smtClean="0">
+                            <a:latin typeface="Cambria Math" panose="02040503050406030204" pitchFamily="18" charset="0"/>
+                          </a:rPr>
+                          <m:t>𝑏</m:t>
+                        </m:r>
+                      </m:sub>
+                    </m:sSub>
+                    <m:r>
+                      <a:rPr lang="es-ES" b="0" i="1" smtClean="0">
+                        <a:latin typeface="Cambria Math" panose="02040503050406030204" pitchFamily="18" charset="0"/>
+                      </a:rPr>
+                      <m:t>=</m:t>
+                    </m:r>
+                    <m:r>
+                      <a:rPr lang="es-ES" i="1">
+                        <a:latin typeface="Cambria Math" panose="02040503050406030204" pitchFamily="18" charset="0"/>
+                        <a:ea typeface="Cambria Math" panose="02040503050406030204" pitchFamily="18" charset="0"/>
+                      </a:rPr>
+                      <m:t>0</m:t>
+                    </m:r>
+                    <m:r>
+                      <a:rPr lang="es-ES" b="0" i="1" smtClean="0">
+                        <a:latin typeface="Cambria Math" panose="02040503050406030204" pitchFamily="18" charset="0"/>
+                        <a:ea typeface="Cambria Math" panose="02040503050406030204" pitchFamily="18" charset="0"/>
+                      </a:rPr>
+                      <m:t>.5 </m:t>
+                    </m:r>
+                  </m:oMath>
+                </a14:m>
+                <a:endParaRPr lang="es-ES" dirty="0"/>
+              </a:p>
+            </p:txBody>
+          </p:sp>
+        </mc:Choice>
+        <mc:Fallback xmlns="">
+          <p:sp>
+            <p:nvSpPr>
+              <p:cNvPr id="17" name="CuadroTexto 16">
+                <a:extLst>
+                  <a:ext uri="{FF2B5EF4-FFF2-40B4-BE49-F238E27FC236}">
+                    <a16:creationId xmlns:a16="http://schemas.microsoft.com/office/drawing/2014/main" id="{64814CE4-85DC-C00A-184A-4E08D7788E31}"/>
+                  </a:ext>
+                </a:extLst>
+              </p:cNvPr>
+              <p:cNvSpPr txBox="1">
+                <a:spLocks noRot="1" noChangeAspect="1" noMove="1" noResize="1" noEditPoints="1" noAdjustHandles="1" noChangeArrowheads="1" noChangeShapeType="1" noTextEdit="1"/>
+              </p:cNvSpPr>
+              <p:nvPr/>
+            </p:nvSpPr>
+            <p:spPr>
+              <a:xfrm>
+                <a:off x="2823804" y="3962092"/>
+                <a:ext cx="2743200" cy="369332"/>
+              </a:xfrm>
+              <a:prstGeom prst="rect">
+                <a:avLst/>
+              </a:prstGeom>
+              <a:blipFill>
+                <a:blip r:embed="rId7"/>
+                <a:stretch>
+                  <a:fillRect t="-9836" b="-24590"/>
+                </a:stretch>
+              </a:blipFill>
+            </p:spPr>
+            <p:txBody>
+              <a:bodyPr/>
+              <a:lstStyle/>
+              <a:p>
+                <a:r>
+                  <a:rPr lang="es-ES">
+                    <a:noFill/>
+                  </a:rPr>
+                  <a:t> </a:t>
+                </a:r>
+              </a:p>
+            </p:txBody>
+          </p:sp>
+        </mc:Fallback>
+      </mc:AlternateContent>
+      <mc:AlternateContent xmlns:mc="http://schemas.openxmlformats.org/markup-compatibility/2006" xmlns:a14="http://schemas.microsoft.com/office/drawing/2010/main">
+        <mc:Choice Requires="a14">
+          <p:sp>
+            <p:nvSpPr>
+              <p:cNvPr id="18" name="CuadroTexto 17">
+                <a:extLst>
+                  <a:ext uri="{FF2B5EF4-FFF2-40B4-BE49-F238E27FC236}">
+                    <a16:creationId xmlns:a16="http://schemas.microsoft.com/office/drawing/2014/main" id="{671F0947-53A7-9001-976A-9F6DECA187B5}"/>
+                  </a:ext>
+                </a:extLst>
+              </p:cNvPr>
+              <p:cNvSpPr txBox="1"/>
+              <p:nvPr/>
+            </p:nvSpPr>
+            <p:spPr>
+              <a:xfrm>
+                <a:off x="364054" y="4257280"/>
+                <a:ext cx="2743200" cy="369332"/>
+              </a:xfrm>
+              <a:prstGeom prst="rect">
+                <a:avLst/>
+              </a:prstGeom>
+              <a:noFill/>
+            </p:spPr>
+            <p:txBody>
+              <a:bodyPr wrap="square" rtlCol="0">
+                <a:spAutoFit/>
+              </a:bodyPr>
+              <a:lstStyle/>
+              <a:p>
+                <a:pPr/>
+                <a14:m>
+                  <m:oMathPara xmlns:m="http://schemas.openxmlformats.org/officeDocument/2006/math">
+                    <m:oMathParaPr>
+                      <m:jc m:val="centerGroup"/>
+                    </m:oMathParaPr>
+                    <m:oMath xmlns:m="http://schemas.openxmlformats.org/officeDocument/2006/math">
+                      <m:sSub>
+                        <m:sSubPr>
+                          <m:ctrlPr>
+                            <a:rPr lang="es-ES" b="0" i="1" smtClean="0">
+                              <a:latin typeface="Cambria Math" panose="02040503050406030204" pitchFamily="18" charset="0"/>
+                            </a:rPr>
+                          </m:ctrlPr>
+                        </m:sSubPr>
+                        <m:e>
+                          <m:r>
+                            <a:rPr lang="es-ES" b="0" i="1" smtClean="0">
+                              <a:latin typeface="Cambria Math" panose="02040503050406030204" pitchFamily="18" charset="0"/>
+                            </a:rPr>
+                            <m:t>𝑛</m:t>
+                          </m:r>
+                          <m:r>
+                            <a:rPr lang="es-ES" b="0" i="1" smtClean="0">
+                              <a:latin typeface="Cambria Math" panose="02040503050406030204" pitchFamily="18" charset="0"/>
+                            </a:rPr>
+                            <m:t>_</m:t>
+                          </m:r>
+                          <m:r>
+                            <a:rPr lang="es-ES" b="0" i="1" smtClean="0">
+                              <a:latin typeface="Cambria Math" panose="02040503050406030204" pitchFamily="18" charset="0"/>
+                            </a:rPr>
+                            <m:t>𝑒𝑓𝑓</m:t>
+                          </m:r>
+                        </m:e>
+                        <m:sub>
+                          <m:r>
+                            <a:rPr lang="es-ES" b="0" i="1" smtClean="0">
+                              <a:latin typeface="Cambria Math" panose="02040503050406030204" pitchFamily="18" charset="0"/>
+                            </a:rPr>
+                            <m:t>𝑢</m:t>
+                          </m:r>
+                          <m:r>
+                            <a:rPr lang="es-ES" b="0" i="1" smtClean="0">
+                              <a:latin typeface="Cambria Math" panose="02040503050406030204" pitchFamily="18" charset="0"/>
+                            </a:rPr>
+                            <m:t> </m:t>
+                          </m:r>
+                        </m:sub>
+                      </m:sSub>
+                      <m:r>
+                        <a:rPr lang="es-ES" b="0" i="1" smtClean="0">
+                          <a:latin typeface="Cambria Math" panose="02040503050406030204" pitchFamily="18" charset="0"/>
+                        </a:rPr>
+                        <m:t>=</m:t>
+                      </m:r>
+                      <m:sSub>
+                        <m:sSubPr>
+                          <m:ctrlPr>
+                            <a:rPr lang="es-ES" i="1">
+                              <a:latin typeface="Cambria Math" panose="02040503050406030204" pitchFamily="18" charset="0"/>
+                            </a:rPr>
+                          </m:ctrlPr>
+                        </m:sSubPr>
+                        <m:e>
+                          <m:r>
+                            <a:rPr lang="es-ES" i="1">
+                              <a:latin typeface="Cambria Math" panose="02040503050406030204" pitchFamily="18" charset="0"/>
+                            </a:rPr>
+                            <m:t>𝑛</m:t>
+                          </m:r>
+                          <m:r>
+                            <a:rPr lang="es-ES" i="1">
+                              <a:latin typeface="Cambria Math" panose="02040503050406030204" pitchFamily="18" charset="0"/>
+                            </a:rPr>
+                            <m:t>_</m:t>
+                          </m:r>
+                          <m:r>
+                            <a:rPr lang="es-ES" i="1">
+                              <a:latin typeface="Cambria Math" panose="02040503050406030204" pitchFamily="18" charset="0"/>
+                            </a:rPr>
+                            <m:t>𝑒𝑓𝑓</m:t>
+                          </m:r>
+                        </m:e>
+                        <m:sub>
+                          <m:r>
+                            <a:rPr lang="es-ES" b="0" i="1" smtClean="0">
+                              <a:latin typeface="Cambria Math" panose="02040503050406030204" pitchFamily="18" charset="0"/>
+                            </a:rPr>
+                            <m:t>𝑙</m:t>
+                          </m:r>
+                        </m:sub>
+                      </m:sSub>
+                    </m:oMath>
+                  </m:oMathPara>
+                </a14:m>
+                <a:endParaRPr lang="es-ES" dirty="0"/>
+              </a:p>
+            </p:txBody>
+          </p:sp>
+        </mc:Choice>
+        <mc:Fallback xmlns="">
+          <p:sp>
+            <p:nvSpPr>
+              <p:cNvPr id="18" name="CuadroTexto 17">
+                <a:extLst>
+                  <a:ext uri="{FF2B5EF4-FFF2-40B4-BE49-F238E27FC236}">
+                    <a16:creationId xmlns:a16="http://schemas.microsoft.com/office/drawing/2014/main" id="{671F0947-53A7-9001-976A-9F6DECA187B5}"/>
+                  </a:ext>
+                </a:extLst>
+              </p:cNvPr>
+              <p:cNvSpPr txBox="1">
+                <a:spLocks noRot="1" noChangeAspect="1" noMove="1" noResize="1" noEditPoints="1" noAdjustHandles="1" noChangeArrowheads="1" noChangeShapeType="1" noTextEdit="1"/>
+              </p:cNvSpPr>
+              <p:nvPr/>
+            </p:nvSpPr>
+            <p:spPr>
+              <a:xfrm>
+                <a:off x="364054" y="4257280"/>
+                <a:ext cx="2743200" cy="369332"/>
+              </a:xfrm>
+              <a:prstGeom prst="rect">
+                <a:avLst/>
+              </a:prstGeom>
+              <a:blipFill>
+                <a:blip r:embed="rId8"/>
+                <a:stretch>
+                  <a:fillRect b="-13115"/>
+                </a:stretch>
+              </a:blipFill>
+            </p:spPr>
+            <p:txBody>
+              <a:bodyPr/>
+              <a:lstStyle/>
+              <a:p>
+                <a:r>
+                  <a:rPr lang="es-ES">
+                    <a:noFill/>
+                  </a:rPr>
+                  <a:t> </a:t>
+                </a:r>
+              </a:p>
+            </p:txBody>
+          </p:sp>
+        </mc:Fallback>
+      </mc:AlternateContent>
+      <mc:AlternateContent xmlns:mc="http://schemas.openxmlformats.org/markup-compatibility/2006" xmlns:a14="http://schemas.microsoft.com/office/drawing/2010/main">
+        <mc:Choice Requires="a14">
+          <p:sp>
+            <p:nvSpPr>
+              <p:cNvPr id="19" name="CuadroTexto 18">
+                <a:extLst>
+                  <a:ext uri="{FF2B5EF4-FFF2-40B4-BE49-F238E27FC236}">
+                    <a16:creationId xmlns:a16="http://schemas.microsoft.com/office/drawing/2014/main" id="{0D5A218E-51CB-7C3E-19F7-F7564D121C45}"/>
+                  </a:ext>
+                </a:extLst>
+              </p:cNvPr>
+              <p:cNvSpPr txBox="1"/>
+              <p:nvPr/>
+            </p:nvSpPr>
+            <p:spPr>
+              <a:xfrm>
+                <a:off x="2823804" y="4268206"/>
+                <a:ext cx="2743200" cy="369332"/>
+              </a:xfrm>
+              <a:prstGeom prst="rect">
+                <a:avLst/>
+              </a:prstGeom>
+              <a:noFill/>
+            </p:spPr>
+            <p:txBody>
+              <a:bodyPr wrap="square" rtlCol="0">
+                <a:spAutoFit/>
+              </a:bodyPr>
+              <a:lstStyle/>
+              <a:p>
+                <a14:m>
+                  <m:oMath xmlns:m="http://schemas.openxmlformats.org/officeDocument/2006/math">
+                    <m:sSub>
+                      <m:sSubPr>
+                        <m:ctrlPr>
+                          <a:rPr lang="es-ES" b="0" i="1" smtClean="0">
+                            <a:latin typeface="Cambria Math" panose="02040503050406030204" pitchFamily="18" charset="0"/>
+                          </a:rPr>
+                        </m:ctrlPr>
+                      </m:sSubPr>
+                      <m:e>
+                        <m:r>
+                          <a:rPr lang="es-ES" b="0" i="1" smtClean="0">
+                            <a:latin typeface="Cambria Math" panose="02040503050406030204" pitchFamily="18" charset="0"/>
+                          </a:rPr>
+                          <m:t>𝐿</m:t>
+                        </m:r>
+                      </m:e>
+                      <m:sub>
+                        <m:r>
+                          <a:rPr lang="es-ES" b="0" i="1" smtClean="0">
+                            <a:latin typeface="Cambria Math" panose="02040503050406030204" pitchFamily="18" charset="0"/>
+                          </a:rPr>
+                          <m:t>𝑢</m:t>
+                        </m:r>
+                      </m:sub>
+                    </m:sSub>
+                    <m:r>
+                      <a:rPr lang="es-ES" b="0" i="1" smtClean="0">
+                        <a:latin typeface="Cambria Math" panose="02040503050406030204" pitchFamily="18" charset="0"/>
+                      </a:rPr>
+                      <m:t>=</m:t>
+                    </m:r>
+                    <m:sSub>
+                      <m:sSubPr>
+                        <m:ctrlPr>
+                          <a:rPr lang="es-ES" i="1">
+                            <a:latin typeface="Cambria Math" panose="02040503050406030204" pitchFamily="18" charset="0"/>
+                          </a:rPr>
+                        </m:ctrlPr>
+                      </m:sSubPr>
+                      <m:e>
+                        <m:r>
+                          <a:rPr lang="es-ES" b="0" i="1" smtClean="0">
+                            <a:latin typeface="Cambria Math" panose="02040503050406030204" pitchFamily="18" charset="0"/>
+                          </a:rPr>
+                          <m:t> 5 </m:t>
+                        </m:r>
+                        <m:r>
+                          <a:rPr lang="es-ES" b="0" i="1" smtClean="0">
+                            <a:latin typeface="Cambria Math" panose="02040503050406030204" pitchFamily="18" charset="0"/>
+                          </a:rPr>
+                          <m:t>𝑎𝑛𝑑</m:t>
+                        </m:r>
+                        <m:r>
+                          <a:rPr lang="es-ES" b="0" i="1" smtClean="0">
+                            <a:latin typeface="Cambria Math" panose="02040503050406030204" pitchFamily="18" charset="0"/>
+                          </a:rPr>
+                          <m:t> </m:t>
+                        </m:r>
+                        <m:r>
+                          <a:rPr lang="es-ES" b="0" i="1" smtClean="0">
+                            <a:latin typeface="Cambria Math" panose="02040503050406030204" pitchFamily="18" charset="0"/>
+                          </a:rPr>
+                          <m:t>𝐿</m:t>
+                        </m:r>
+                      </m:e>
+                      <m:sub>
+                        <m:r>
+                          <a:rPr lang="es-ES" b="0" i="1" smtClean="0">
+                            <a:latin typeface="Cambria Math" panose="02040503050406030204" pitchFamily="18" charset="0"/>
+                          </a:rPr>
+                          <m:t>𝑙</m:t>
+                        </m:r>
+                        <m:r>
+                          <a:rPr lang="es-ES" b="0" i="1" smtClean="0">
+                            <a:latin typeface="Cambria Math" panose="02040503050406030204" pitchFamily="18" charset="0"/>
+                          </a:rPr>
+                          <m:t> </m:t>
+                        </m:r>
+                      </m:sub>
+                    </m:sSub>
+                  </m:oMath>
+                </a14:m>
+                <a:r>
+                  <a:rPr lang="es-ES" dirty="0"/>
+                  <a:t> </a:t>
+                </a:r>
+                <a14:m>
+                  <m:oMath xmlns:m="http://schemas.openxmlformats.org/officeDocument/2006/math">
+                    <m:r>
+                      <a:rPr lang="es-ES" i="1">
+                        <a:latin typeface="Cambria Math" panose="02040503050406030204" pitchFamily="18" charset="0"/>
+                      </a:rPr>
+                      <m:t>=</m:t>
+                    </m:r>
+                    <m:r>
+                      <a:rPr lang="es-ES" b="0" i="1" smtClean="0">
+                        <a:latin typeface="Cambria Math" panose="02040503050406030204" pitchFamily="18" charset="0"/>
+                      </a:rPr>
+                      <m:t>25 </m:t>
+                    </m:r>
+                    <m:r>
+                      <a:rPr lang="es-ES" b="0" i="1" smtClean="0">
+                        <a:latin typeface="Cambria Math" panose="02040503050406030204" pitchFamily="18" charset="0"/>
+                      </a:rPr>
+                      <m:t>𝑢𝑚</m:t>
+                    </m:r>
+                  </m:oMath>
+                </a14:m>
+                <a:endParaRPr lang="es-ES" dirty="0"/>
+              </a:p>
+            </p:txBody>
+          </p:sp>
+        </mc:Choice>
+        <mc:Fallback xmlns="">
+          <p:sp>
+            <p:nvSpPr>
+              <p:cNvPr id="19" name="CuadroTexto 18">
+                <a:extLst>
+                  <a:ext uri="{FF2B5EF4-FFF2-40B4-BE49-F238E27FC236}">
+                    <a16:creationId xmlns:a16="http://schemas.microsoft.com/office/drawing/2014/main" id="{0D5A218E-51CB-7C3E-19F7-F7564D121C45}"/>
+                  </a:ext>
+                </a:extLst>
+              </p:cNvPr>
+              <p:cNvSpPr txBox="1">
+                <a:spLocks noRot="1" noChangeAspect="1" noMove="1" noResize="1" noEditPoints="1" noAdjustHandles="1" noChangeArrowheads="1" noChangeShapeType="1" noTextEdit="1"/>
+              </p:cNvSpPr>
+              <p:nvPr/>
+            </p:nvSpPr>
+            <p:spPr>
+              <a:xfrm>
+                <a:off x="2823804" y="4268206"/>
+                <a:ext cx="2743200" cy="369332"/>
+              </a:xfrm>
+              <a:prstGeom prst="rect">
+                <a:avLst/>
+              </a:prstGeom>
+              <a:blipFill>
+                <a:blip r:embed="rId9"/>
+                <a:stretch>
+                  <a:fillRect/>
+                </a:stretch>
+              </a:blipFill>
+            </p:spPr>
+            <p:txBody>
+              <a:bodyPr/>
+              <a:lstStyle/>
+              <a:p>
+                <a:r>
+                  <a:rPr lang="es-ES">
+                    <a:noFill/>
+                  </a:rPr>
+                  <a:t> </a:t>
+                </a:r>
+              </a:p>
+            </p:txBody>
+          </p:sp>
+        </mc:Fallback>
+      </mc:AlternateContent>
+      <p:sp>
+        <p:nvSpPr>
+          <p:cNvPr id="26" name="CuadroTexto 25">
+            <a:extLst>
+              <a:ext uri="{FF2B5EF4-FFF2-40B4-BE49-F238E27FC236}">
+                <a16:creationId xmlns:a16="http://schemas.microsoft.com/office/drawing/2014/main" id="{FD35968C-F226-C0C8-7E5A-12F19CA801CF}"/>
+              </a:ext>
+            </a:extLst>
+          </p:cNvPr>
+          <p:cNvSpPr txBox="1"/>
+          <p:nvPr/>
+        </p:nvSpPr>
+        <p:spPr>
+          <a:xfrm>
+            <a:off x="766404" y="4466723"/>
+            <a:ext cx="6248400" cy="1200329"/>
+          </a:xfrm>
+          <a:prstGeom prst="rect">
+            <a:avLst/>
+          </a:prstGeom>
+          <a:noFill/>
+        </p:spPr>
+        <p:txBody>
+          <a:bodyPr wrap="square" rtlCol="0">
+            <a:spAutoFit/>
+          </a:bodyPr>
+          <a:lstStyle/>
+          <a:p>
+            <a:endParaRPr lang="es-ES" dirty="0"/>
+          </a:p>
+          <a:p>
+            <a:r>
+              <a:rPr lang="es-ES" dirty="0"/>
+              <a:t>Al haber una diferencia de caminos, se introduce un desfase entre brazos haciendo la interferencia dependiente de la longitud de onda. </a:t>
+            </a:r>
+          </a:p>
+        </p:txBody>
+      </p:sp>
+      <p:pic>
+        <p:nvPicPr>
+          <p:cNvPr id="3" name="Imagen 2">
+            <a:extLst>
+              <a:ext uri="{FF2B5EF4-FFF2-40B4-BE49-F238E27FC236}">
+                <a16:creationId xmlns:a16="http://schemas.microsoft.com/office/drawing/2014/main" id="{E175B8A3-954A-8A5D-981E-EB0F8F971A35}"/>
+              </a:ext>
+            </a:extLst>
+          </p:cNvPr>
+          <p:cNvPicPr>
+            <a:picLocks noChangeAspect="1"/>
+          </p:cNvPicPr>
+          <p:nvPr/>
+        </p:nvPicPr>
+        <p:blipFill>
+          <a:blip r:embed="rId10"/>
+          <a:stretch>
+            <a:fillRect/>
+          </a:stretch>
+        </p:blipFill>
+        <p:spPr>
+          <a:xfrm>
+            <a:off x="7459679" y="267399"/>
+            <a:ext cx="3850339" cy="3041501"/>
+          </a:xfrm>
+          <a:prstGeom prst="rect">
+            <a:avLst/>
+          </a:prstGeom>
+        </p:spPr>
+      </p:pic>
+      <p:pic>
+        <p:nvPicPr>
+          <p:cNvPr id="9" name="Imagen 8">
+            <a:extLst>
+              <a:ext uri="{FF2B5EF4-FFF2-40B4-BE49-F238E27FC236}">
+                <a16:creationId xmlns:a16="http://schemas.microsoft.com/office/drawing/2014/main" id="{FBD2761D-BF46-59A0-8B3C-5EC7D846860E}"/>
+              </a:ext>
+            </a:extLst>
+          </p:cNvPr>
+          <p:cNvPicPr>
+            <a:picLocks noChangeAspect="1"/>
+          </p:cNvPicPr>
+          <p:nvPr/>
+        </p:nvPicPr>
+        <p:blipFill>
+          <a:blip r:embed="rId11"/>
+          <a:stretch>
+            <a:fillRect/>
+          </a:stretch>
+        </p:blipFill>
+        <p:spPr>
+          <a:xfrm>
+            <a:off x="7506411" y="3343523"/>
+            <a:ext cx="3850339" cy="3089778"/>
+          </a:xfrm>
+          <a:prstGeom prst="rect">
+            <a:avLst/>
+          </a:prstGeom>
+        </p:spPr>
+      </p:pic>
+    </p:spTree>
+    <p:extLst>
+      <p:ext uri="{BB962C8B-B14F-4D97-AF65-F5344CB8AC3E}">
+        <p14:creationId xmlns:p14="http://schemas.microsoft.com/office/powerpoint/2010/main" val="2866497213"/>
+      </p:ext>
+    </p:extLst>
+  </p:cSld>
+  <p:clrMapOvr>
+    <a:masterClrMapping/>
+  </p:clrMapOvr>
+</p:sld>
+</file>
+
+<file path=ppt/slides/slide6.xml><?xml version="1.0" encoding="utf-8"?>
+<p:sld xmlns:a="http://schemas.openxmlformats.org/drawingml/2006/main" xmlns:r="http://schemas.openxmlformats.org/officeDocument/2006/relationships" xmlns:p="http://schemas.openxmlformats.org/presentationml/2006/main">
+  <p:cSld>
+    <p:spTree>
+      <p:nvGrpSpPr>
+        <p:cNvPr id="1" name=""/>
+        <p:cNvGrpSpPr/>
+        <p:nvPr/>
+      </p:nvGrpSpPr>
+      <p:grpSpPr>
+        <a:xfrm>
+          <a:off x="0" y="0"/>
+          <a:ext cx="0" cy="0"/>
+          <a:chOff x="0" y="0"/>
+          <a:chExt cx="0" cy="0"/>
+        </a:xfrm>
+      </p:grpSpPr>
+      <mc:AlternateContent xmlns:mc="http://schemas.openxmlformats.org/markup-compatibility/2006" xmlns:a14="http://schemas.microsoft.com/office/drawing/2010/main">
+        <mc:Choice Requires="a14">
+          <p:sp>
+            <p:nvSpPr>
+              <p:cNvPr id="2" name="Título 1">
+                <a:extLst>
+                  <a:ext uri="{FF2B5EF4-FFF2-40B4-BE49-F238E27FC236}">
+                    <a16:creationId xmlns:a16="http://schemas.microsoft.com/office/drawing/2014/main" id="{D6661FFC-3CD8-2F5B-03FD-4DD48DCD3F42}"/>
+                  </a:ext>
+                </a:extLst>
+              </p:cNvPr>
+              <p:cNvSpPr>
+                <a:spLocks noGrp="1"/>
+              </p:cNvSpPr>
+              <p:nvPr>
+                <p:ph type="title"/>
+              </p:nvPr>
+            </p:nvSpPr>
+            <p:spPr>
+              <a:xfrm>
+                <a:off x="600075" y="374504"/>
+                <a:ext cx="10991850" cy="307777"/>
+              </a:xfrm>
+            </p:spPr>
+            <p:txBody>
+              <a:bodyPr/>
+              <a:lstStyle/>
+              <a:p>
+                <a:r>
+                  <a:rPr lang="es-ES" dirty="0"/>
+                  <a:t>3. </a:t>
+                </a:r>
+                <a14:m>
+                  <m:oMath xmlns:m="http://schemas.openxmlformats.org/officeDocument/2006/math">
+                    <m:r>
+                      <m:rPr>
+                        <m:sty m:val="p"/>
+                      </m:rPr>
+                      <a:rPr lang="es-ES" i="1">
+                        <a:latin typeface="Cambria Math" panose="02040503050406030204" pitchFamily="18" charset="0"/>
+                      </a:rPr>
+                      <m:t>γ</m:t>
+                    </m:r>
+                    <m:r>
+                      <a:rPr lang="es-ES" i="1">
+                        <a:latin typeface="Cambria Math" panose="02040503050406030204" pitchFamily="18" charset="0"/>
+                        <a:ea typeface="Cambria Math" panose="02040503050406030204" pitchFamily="18" charset="0"/>
+                      </a:rPr>
+                      <m:t>≠0</m:t>
+                    </m:r>
+                    <m:r>
+                      <a:rPr lang="es-ES" b="1" i="1" smtClean="0">
+                        <a:latin typeface="Cambria Math" panose="02040503050406030204" pitchFamily="18" charset="0"/>
+                        <a:ea typeface="Cambria Math" panose="02040503050406030204" pitchFamily="18" charset="0"/>
+                      </a:rPr>
+                      <m:t> </m:t>
+                    </m:r>
+                    <m:r>
+                      <a:rPr lang="es-ES" b="1" i="1" smtClean="0">
+                        <a:latin typeface="Cambria Math" panose="02040503050406030204" pitchFamily="18" charset="0"/>
+                        <a:ea typeface="Cambria Math" panose="02040503050406030204" pitchFamily="18" charset="0"/>
+                      </a:rPr>
+                      <m:t>𝒂𝒏𝒅</m:t>
+                    </m:r>
+                    <m:r>
+                      <a:rPr lang="es-ES" b="1" i="1" smtClean="0">
+                        <a:latin typeface="Cambria Math" panose="02040503050406030204" pitchFamily="18" charset="0"/>
+                        <a:ea typeface="Cambria Math" panose="02040503050406030204" pitchFamily="18" charset="0"/>
+                      </a:rPr>
+                      <m:t> </m:t>
+                    </m:r>
+                    <m:r>
+                      <m:rPr>
+                        <m:sty m:val="p"/>
+                      </m:rPr>
+                      <a:rPr lang="es-ES" b="0" i="1">
+                        <a:latin typeface="Cambria Math" panose="02040503050406030204" pitchFamily="18" charset="0"/>
+                      </a:rPr>
+                      <m:t>α</m:t>
+                    </m:r>
+                    <m:r>
+                      <a:rPr lang="es-ES" i="1">
+                        <a:latin typeface="Cambria Math" panose="02040503050406030204" pitchFamily="18" charset="0"/>
+                        <a:ea typeface="Cambria Math" panose="02040503050406030204" pitchFamily="18" charset="0"/>
+                      </a:rPr>
+                      <m:t>≠0</m:t>
+                    </m:r>
+                    <m:r>
+                      <a:rPr lang="es-ES" b="1" i="0" smtClean="0">
+                        <a:latin typeface="Cambria Math" panose="02040503050406030204" pitchFamily="18" charset="0"/>
+                        <a:ea typeface="Cambria Math" panose="02040503050406030204" pitchFamily="18" charset="0"/>
+                      </a:rPr>
+                      <m:t> , </m:t>
+                    </m:r>
+                  </m:oMath>
+                </a14:m>
+                <a:r>
+                  <a:rPr lang="en-US" dirty="0" err="1">
+                    <a:solidFill>
+                      <a:sysClr val="windowText" lastClr="000000"/>
+                    </a:solidFill>
+                  </a:rPr>
+                  <a:t>SiN</a:t>
+                </a:r>
+                <a:r>
+                  <a:rPr lang="en-US" dirty="0">
+                    <a:solidFill>
+                      <a:sysClr val="windowText" lastClr="000000"/>
+                    </a:solidFill>
+                  </a:rPr>
+                  <a:t> </a:t>
+                </a:r>
+                <a:r>
+                  <a:rPr lang="en-US" b="0" dirty="0">
+                    <a:solidFill>
+                      <a:sysClr val="windowText" lastClr="000000"/>
+                    </a:solidFill>
+                  </a:rPr>
+                  <a:t>platform</a:t>
+                </a:r>
+                <a:endParaRPr lang="es-ES" b="0" dirty="0"/>
+              </a:p>
+            </p:txBody>
+          </p:sp>
+        </mc:Choice>
+        <mc:Fallback xmlns="">
+          <p:sp>
+            <p:nvSpPr>
+              <p:cNvPr id="2" name="Título 1">
+                <a:extLst>
+                  <a:ext uri="{FF2B5EF4-FFF2-40B4-BE49-F238E27FC236}">
+                    <a16:creationId xmlns:a16="http://schemas.microsoft.com/office/drawing/2014/main" id="{D6661FFC-3CD8-2F5B-03FD-4DD48DCD3F42}"/>
+                  </a:ext>
+                </a:extLst>
+              </p:cNvPr>
+              <p:cNvSpPr>
+                <a:spLocks noGrp="1" noRot="1" noChangeAspect="1" noMove="1" noResize="1" noEditPoints="1" noAdjustHandles="1" noChangeArrowheads="1" noChangeShapeType="1" noTextEdit="1"/>
+              </p:cNvSpPr>
+              <p:nvPr>
+                <p:ph type="title"/>
+              </p:nvPr>
+            </p:nvSpPr>
+            <p:spPr>
+              <a:xfrm>
+                <a:off x="600075" y="374504"/>
+                <a:ext cx="10991850" cy="307777"/>
+              </a:xfrm>
+              <a:blipFill>
+                <a:blip r:embed="rId2"/>
+                <a:stretch>
+                  <a:fillRect l="-1386" t="-25490" b="-49020"/>
+                </a:stretch>
+              </a:blipFill>
+            </p:spPr>
+            <p:txBody>
+              <a:bodyPr/>
+              <a:lstStyle/>
+              <a:p>
+                <a:r>
+                  <a:rPr lang="es-ES">
+                    <a:noFill/>
+                  </a:rPr>
+                  <a:t> </a:t>
+                </a:r>
+              </a:p>
+            </p:txBody>
+          </p:sp>
+        </mc:Fallback>
+      </mc:AlternateContent>
+      <p:sp>
+        <p:nvSpPr>
+          <p:cNvPr id="4" name="Marcador de pie de página 3">
+            <a:extLst>
+              <a:ext uri="{FF2B5EF4-FFF2-40B4-BE49-F238E27FC236}">
+                <a16:creationId xmlns:a16="http://schemas.microsoft.com/office/drawing/2014/main" id="{506918E6-9B10-1623-9131-49A52E16A94F}"/>
+              </a:ext>
+            </a:extLst>
+          </p:cNvPr>
+          <p:cNvSpPr>
+            <a:spLocks noGrp="1"/>
+          </p:cNvSpPr>
+          <p:nvPr>
+            <p:ph type="ftr" sz="quarter" idx="5"/>
+          </p:nvPr>
+        </p:nvSpPr>
+        <p:spPr/>
+        <p:txBody>
+          <a:bodyPr/>
+          <a:lstStyle/>
+          <a:p>
+            <a:pPr marL="12700">
+              <a:spcBef>
+                <a:spcPts val="15"/>
+              </a:spcBef>
+            </a:pPr>
+            <a:r>
+              <a:rPr lang="es-ES" spc="-5"/>
+              <a:t>LAB 3. INTERFEROMETERS I</a:t>
+            </a:r>
+            <a:endParaRPr lang="es-ES" spc="-5" dirty="0"/>
+          </a:p>
+        </p:txBody>
+      </p:sp>
+      <p:sp>
+        <p:nvSpPr>
+          <p:cNvPr id="5" name="Marcador de número de diapositiva 4">
+            <a:extLst>
+              <a:ext uri="{FF2B5EF4-FFF2-40B4-BE49-F238E27FC236}">
+                <a16:creationId xmlns:a16="http://schemas.microsoft.com/office/drawing/2014/main" id="{56F3AB77-3955-1B42-F5ED-CD8A5B3AFEA7}"/>
+              </a:ext>
+            </a:extLst>
+          </p:cNvPr>
+          <p:cNvSpPr>
+            <a:spLocks noGrp="1"/>
+          </p:cNvSpPr>
+          <p:nvPr>
+            <p:ph type="sldNum" sz="quarter" idx="7"/>
+          </p:nvPr>
+        </p:nvSpPr>
+        <p:spPr/>
+        <p:txBody>
+          <a:bodyPr/>
+          <a:lstStyle/>
+          <a:p>
+            <a:fld id="{B6F15528-21DE-4FAA-801E-634DDDAF4B2B}" type="slidenum">
+              <a:rPr lang="es-ES" smtClean="0"/>
+              <a:t>6</a:t>
+            </a:fld>
+            <a:endParaRPr lang="es-ES"/>
+          </a:p>
+        </p:txBody>
+      </p:sp>
+      <p:sp>
+        <p:nvSpPr>
+          <p:cNvPr id="9" name="Marcador de texto 8">
+            <a:extLst>
+              <a:ext uri="{FF2B5EF4-FFF2-40B4-BE49-F238E27FC236}">
+                <a16:creationId xmlns:a16="http://schemas.microsoft.com/office/drawing/2014/main" id="{A5E2C8D3-6C98-D6CE-8BF3-9A1F7F0B2356}"/>
+              </a:ext>
+            </a:extLst>
+          </p:cNvPr>
+          <p:cNvSpPr>
+            <a:spLocks noGrp="1"/>
+          </p:cNvSpPr>
+          <p:nvPr>
+            <p:ph type="body" idx="1"/>
+          </p:nvPr>
+        </p:nvSpPr>
+        <p:spPr>
+          <a:xfrm>
+            <a:off x="800134" y="5120896"/>
+            <a:ext cx="10515600" cy="830997"/>
+          </a:xfrm>
+        </p:spPr>
+        <p:txBody>
+          <a:bodyPr/>
+          <a:lstStyle/>
+          <a:p>
+            <a:r>
+              <a:rPr lang="es-ES" dirty="0"/>
+              <a:t>De estas 3 simulaciones, se puede interpretar que las pérdidas por propagación predominan sobre las pérdidas de exceso; por que, al introducir unas pérdidas de propagación del 10% la potencia máxima de salida es menor que al introducir un 10% en las pérdidas de exceso.</a:t>
+            </a:r>
+          </a:p>
+        </p:txBody>
+      </p:sp>
+      <mc:AlternateContent xmlns:mc="http://schemas.openxmlformats.org/markup-compatibility/2006" xmlns:a14="http://schemas.microsoft.com/office/drawing/2010/main">
+        <mc:Choice Requires="a14">
+          <p:sp>
+            <p:nvSpPr>
+              <p:cNvPr id="10" name="CuadroTexto 9">
+                <a:extLst>
+                  <a:ext uri="{FF2B5EF4-FFF2-40B4-BE49-F238E27FC236}">
+                    <a16:creationId xmlns:a16="http://schemas.microsoft.com/office/drawing/2014/main" id="{B185A7BE-8B8C-8C68-F7ED-31762176A345}"/>
+                  </a:ext>
+                </a:extLst>
+              </p:cNvPr>
+              <p:cNvSpPr txBox="1"/>
+              <p:nvPr/>
+            </p:nvSpPr>
+            <p:spPr>
+              <a:xfrm>
+                <a:off x="771559" y="3402161"/>
+                <a:ext cx="3255250" cy="381515"/>
+              </a:xfrm>
+              <a:prstGeom prst="rect">
+                <a:avLst/>
+              </a:prstGeom>
+              <a:noFill/>
+            </p:spPr>
+            <p:txBody>
+              <a:bodyPr wrap="square" rtlCol="0">
+                <a:spAutoFit/>
+              </a:bodyPr>
+              <a:lstStyle/>
+              <a:p>
+                <a14:m>
+                  <m:oMath xmlns:m="http://schemas.openxmlformats.org/officeDocument/2006/math">
+                    <m:sSub>
+                      <m:sSubPr>
+                        <m:ctrlPr>
+                          <a:rPr lang="es-ES" b="0" i="1" smtClean="0">
+                            <a:latin typeface="Cambria Math" panose="02040503050406030204" pitchFamily="18" charset="0"/>
+                          </a:rPr>
+                        </m:ctrlPr>
+                      </m:sSubPr>
+                      <m:e>
+                        <m:r>
+                          <m:rPr>
+                            <m:sty m:val="p"/>
+                          </m:rPr>
+                          <a:rPr lang="es-ES" i="1" smtClean="0">
+                            <a:latin typeface="Cambria Math" panose="02040503050406030204" pitchFamily="18" charset="0"/>
+                          </a:rPr>
+                          <m:t>α</m:t>
+                        </m:r>
+                      </m:e>
+                      <m:sub>
+                        <m:r>
+                          <a:rPr lang="es-ES" b="0" i="1" smtClean="0">
+                            <a:latin typeface="Cambria Math" panose="02040503050406030204" pitchFamily="18" charset="0"/>
+                          </a:rPr>
+                          <m:t>𝑎</m:t>
+                        </m:r>
+                        <m:r>
+                          <a:rPr lang="es-ES" b="0" i="1" smtClean="0">
+                            <a:latin typeface="Cambria Math" panose="02040503050406030204" pitchFamily="18" charset="0"/>
+                          </a:rPr>
+                          <m:t>,</m:t>
+                        </m:r>
+                        <m:r>
+                          <a:rPr lang="es-ES" b="0" i="1" smtClean="0">
+                            <a:latin typeface="Cambria Math" panose="02040503050406030204" pitchFamily="18" charset="0"/>
+                          </a:rPr>
+                          <m:t>𝑏</m:t>
+                        </m:r>
+                      </m:sub>
+                    </m:sSub>
+                    <m:r>
+                      <a:rPr lang="es-ES" b="0" i="1" smtClean="0">
+                        <a:latin typeface="Cambria Math" panose="02040503050406030204" pitchFamily="18" charset="0"/>
+                      </a:rPr>
+                      <m:t>=</m:t>
+                    </m:r>
+                    <m:r>
+                      <a:rPr lang="es-ES" i="1">
+                        <a:latin typeface="Cambria Math" panose="02040503050406030204" pitchFamily="18" charset="0"/>
+                        <a:ea typeface="Cambria Math" panose="02040503050406030204" pitchFamily="18" charset="0"/>
+                      </a:rPr>
+                      <m:t>0</m:t>
+                    </m:r>
+                  </m:oMath>
+                </a14:m>
+                <a:r>
+                  <a:rPr lang="en-US" kern="0" dirty="0">
+                    <a:solidFill>
+                      <a:sysClr val="windowText" lastClr="000000"/>
+                    </a:solidFill>
+                  </a:rPr>
+                  <a:t> and </a:t>
+                </a:r>
+                <a14:m>
+                  <m:oMath xmlns:m="http://schemas.openxmlformats.org/officeDocument/2006/math">
+                    <m:sSub>
+                      <m:sSubPr>
+                        <m:ctrlPr>
+                          <a:rPr lang="es-ES" b="0" i="1" smtClean="0">
+                            <a:latin typeface="Cambria Math" panose="02040503050406030204" pitchFamily="18" charset="0"/>
+                          </a:rPr>
+                        </m:ctrlPr>
+                      </m:sSubPr>
+                      <m:e>
+                        <m:r>
+                          <m:rPr>
+                            <m:sty m:val="p"/>
+                          </m:rPr>
+                          <a:rPr lang="es-ES" i="1" smtClean="0">
+                            <a:latin typeface="Cambria Math" panose="02040503050406030204" pitchFamily="18" charset="0"/>
+                          </a:rPr>
+                          <m:t>γ</m:t>
+                        </m:r>
+                      </m:e>
+                      <m:sub>
+                        <m:r>
+                          <a:rPr lang="es-ES" b="0" i="1" smtClean="0">
+                            <a:latin typeface="Cambria Math" panose="02040503050406030204" pitchFamily="18" charset="0"/>
+                          </a:rPr>
+                          <m:t>𝑎</m:t>
+                        </m:r>
+                        <m:r>
+                          <a:rPr lang="es-ES" b="0" i="1" smtClean="0">
+                            <a:latin typeface="Cambria Math" panose="02040503050406030204" pitchFamily="18" charset="0"/>
+                          </a:rPr>
+                          <m:t>, </m:t>
+                        </m:r>
+                        <m:r>
+                          <a:rPr lang="es-ES" b="0" i="1" smtClean="0">
+                            <a:latin typeface="Cambria Math" panose="02040503050406030204" pitchFamily="18" charset="0"/>
+                          </a:rPr>
+                          <m:t>𝑏</m:t>
+                        </m:r>
+                      </m:sub>
+                    </m:sSub>
+                    <m:r>
+                      <a:rPr lang="es-ES" b="0" i="1" smtClean="0">
+                        <a:latin typeface="Cambria Math" panose="02040503050406030204" pitchFamily="18" charset="0"/>
+                      </a:rPr>
+                      <m:t>=0.1</m:t>
+                    </m:r>
+                  </m:oMath>
+                </a14:m>
+                <a:endParaRPr lang="es-ES" dirty="0"/>
+              </a:p>
+            </p:txBody>
+          </p:sp>
+        </mc:Choice>
+        <mc:Fallback xmlns="">
+          <p:sp>
+            <p:nvSpPr>
+              <p:cNvPr id="10" name="CuadroTexto 9">
+                <a:extLst>
+                  <a:ext uri="{FF2B5EF4-FFF2-40B4-BE49-F238E27FC236}">
+                    <a16:creationId xmlns:a16="http://schemas.microsoft.com/office/drawing/2014/main" id="{B185A7BE-8B8C-8C68-F7ED-31762176A345}"/>
+                  </a:ext>
+                </a:extLst>
+              </p:cNvPr>
+              <p:cNvSpPr txBox="1">
+                <a:spLocks noRot="1" noChangeAspect="1" noMove="1" noResize="1" noEditPoints="1" noAdjustHandles="1" noChangeArrowheads="1" noChangeShapeType="1" noTextEdit="1"/>
+              </p:cNvSpPr>
+              <p:nvPr/>
+            </p:nvSpPr>
+            <p:spPr>
+              <a:xfrm>
+                <a:off x="771559" y="3402161"/>
+                <a:ext cx="3255250" cy="381515"/>
+              </a:xfrm>
+              <a:prstGeom prst="rect">
+                <a:avLst/>
+              </a:prstGeom>
+              <a:blipFill>
+                <a:blip r:embed="rId3"/>
+                <a:stretch>
+                  <a:fillRect t="-6349" b="-22222"/>
+                </a:stretch>
+              </a:blipFill>
+            </p:spPr>
+            <p:txBody>
+              <a:bodyPr/>
+              <a:lstStyle/>
+              <a:p>
+                <a:r>
+                  <a:rPr lang="es-ES">
+                    <a:noFill/>
+                  </a:rPr>
+                  <a:t> </a:t>
+                </a:r>
+              </a:p>
+            </p:txBody>
+          </p:sp>
+        </mc:Fallback>
+      </mc:AlternateContent>
+      <mc:AlternateContent xmlns:mc="http://schemas.openxmlformats.org/markup-compatibility/2006" xmlns:a14="http://schemas.microsoft.com/office/drawing/2010/main">
+        <mc:Choice Requires="a14">
+          <p:sp>
+            <p:nvSpPr>
+              <p:cNvPr id="11" name="CuadroTexto 10">
+                <a:extLst>
+                  <a:ext uri="{FF2B5EF4-FFF2-40B4-BE49-F238E27FC236}">
+                    <a16:creationId xmlns:a16="http://schemas.microsoft.com/office/drawing/2014/main" id="{DE836AEF-A058-7EF7-81CC-CAF6A0FD890E}"/>
+                  </a:ext>
+                </a:extLst>
+              </p:cNvPr>
+              <p:cNvSpPr txBox="1"/>
+              <p:nvPr/>
+            </p:nvSpPr>
+            <p:spPr>
+              <a:xfrm>
+                <a:off x="750209" y="4120700"/>
+                <a:ext cx="2743200" cy="369332"/>
+              </a:xfrm>
+              <a:prstGeom prst="rect">
+                <a:avLst/>
+              </a:prstGeom>
+              <a:noFill/>
+            </p:spPr>
+            <p:txBody>
+              <a:bodyPr wrap="square" rtlCol="0">
+                <a:spAutoFit/>
+              </a:bodyPr>
+              <a:lstStyle/>
+              <a:p>
+                <a14:m>
+                  <m:oMath xmlns:m="http://schemas.openxmlformats.org/officeDocument/2006/math">
+                    <m:sSub>
+                      <m:sSubPr>
+                        <m:ctrlPr>
+                          <a:rPr lang="es-ES" b="0" i="1" smtClean="0">
+                            <a:latin typeface="Cambria Math" panose="02040503050406030204" pitchFamily="18" charset="0"/>
+                          </a:rPr>
+                        </m:ctrlPr>
+                      </m:sSubPr>
+                      <m:e>
+                        <m:r>
+                          <m:rPr>
+                            <m:sty m:val="p"/>
+                          </m:rPr>
+                          <a:rPr lang="es-ES" i="1" smtClean="0">
+                            <a:latin typeface="Cambria Math" panose="02040503050406030204" pitchFamily="18" charset="0"/>
+                          </a:rPr>
+                          <m:t>k</m:t>
+                        </m:r>
+                      </m:e>
+                      <m:sub>
+                        <m:r>
+                          <a:rPr lang="es-ES" b="0" i="1" smtClean="0">
+                            <a:latin typeface="Cambria Math" panose="02040503050406030204" pitchFamily="18" charset="0"/>
+                          </a:rPr>
+                          <m:t>𝑎</m:t>
+                        </m:r>
+                      </m:sub>
+                    </m:sSub>
+                    <m:r>
+                      <a:rPr lang="es-ES" b="0" i="1" smtClean="0">
+                        <a:latin typeface="Cambria Math" panose="02040503050406030204" pitchFamily="18" charset="0"/>
+                      </a:rPr>
+                      <m:t>=</m:t>
+                    </m:r>
+                    <m:r>
+                      <a:rPr lang="es-ES" i="1">
+                        <a:latin typeface="Cambria Math" panose="02040503050406030204" pitchFamily="18" charset="0"/>
+                        <a:ea typeface="Cambria Math" panose="02040503050406030204" pitchFamily="18" charset="0"/>
+                      </a:rPr>
+                      <m:t>0</m:t>
+                    </m:r>
+                    <m:r>
+                      <a:rPr lang="es-ES" b="0" i="0" smtClean="0">
+                        <a:latin typeface="Cambria Math" panose="02040503050406030204" pitchFamily="18" charset="0"/>
+                        <a:ea typeface="Cambria Math" panose="02040503050406030204" pitchFamily="18" charset="0"/>
+                      </a:rPr>
+                      <m:t>.5</m:t>
+                    </m:r>
+                  </m:oMath>
+                </a14:m>
+                <a:r>
+                  <a:rPr lang="en-US" kern="0" dirty="0">
+                    <a:solidFill>
+                      <a:sysClr val="windowText" lastClr="000000"/>
+                    </a:solidFill>
+                  </a:rPr>
+                  <a:t> and </a:t>
+                </a:r>
+                <a14:m>
+                  <m:oMath xmlns:m="http://schemas.openxmlformats.org/officeDocument/2006/math">
+                    <m:sSub>
+                      <m:sSubPr>
+                        <m:ctrlPr>
+                          <a:rPr lang="es-ES" b="0" i="1" dirty="0" smtClean="0">
+                            <a:latin typeface="Cambria Math" panose="02040503050406030204" pitchFamily="18" charset="0"/>
+                          </a:rPr>
+                        </m:ctrlPr>
+                      </m:sSubPr>
+                      <m:e>
+                        <m:r>
+                          <m:rPr>
+                            <m:sty m:val="p"/>
+                          </m:rPr>
+                          <a:rPr lang="es-ES" i="1" dirty="0">
+                            <a:latin typeface="Cambria Math" panose="02040503050406030204" pitchFamily="18" charset="0"/>
+                          </a:rPr>
+                          <m:t>k</m:t>
+                        </m:r>
+                      </m:e>
+                      <m:sub>
+                        <m:r>
+                          <a:rPr lang="es-ES" b="0" i="1" dirty="0" smtClean="0">
+                            <a:latin typeface="Cambria Math" panose="02040503050406030204" pitchFamily="18" charset="0"/>
+                          </a:rPr>
+                          <m:t>𝑏</m:t>
+                        </m:r>
+                      </m:sub>
+                    </m:sSub>
+                    <m:r>
+                      <a:rPr lang="es-ES" b="0" i="1" smtClean="0">
+                        <a:latin typeface="Cambria Math" panose="02040503050406030204" pitchFamily="18" charset="0"/>
+                      </a:rPr>
+                      <m:t>=</m:t>
+                    </m:r>
+                    <m:r>
+                      <a:rPr lang="es-ES" i="1">
+                        <a:latin typeface="Cambria Math" panose="02040503050406030204" pitchFamily="18" charset="0"/>
+                        <a:ea typeface="Cambria Math" panose="02040503050406030204" pitchFamily="18" charset="0"/>
+                      </a:rPr>
+                      <m:t>0</m:t>
+                    </m:r>
+                    <m:r>
+                      <a:rPr lang="es-ES" b="0" i="1" smtClean="0">
+                        <a:latin typeface="Cambria Math" panose="02040503050406030204" pitchFamily="18" charset="0"/>
+                        <a:ea typeface="Cambria Math" panose="02040503050406030204" pitchFamily="18" charset="0"/>
+                      </a:rPr>
+                      <m:t>.5 </m:t>
+                    </m:r>
+                  </m:oMath>
+                </a14:m>
+                <a:endParaRPr lang="es-ES" dirty="0"/>
+              </a:p>
+            </p:txBody>
+          </p:sp>
+        </mc:Choice>
+        <mc:Fallback xmlns="">
+          <p:sp>
+            <p:nvSpPr>
+              <p:cNvPr id="11" name="CuadroTexto 10">
+                <a:extLst>
+                  <a:ext uri="{FF2B5EF4-FFF2-40B4-BE49-F238E27FC236}">
+                    <a16:creationId xmlns:a16="http://schemas.microsoft.com/office/drawing/2014/main" id="{DE836AEF-A058-7EF7-81CC-CAF6A0FD890E}"/>
+                  </a:ext>
+                </a:extLst>
+              </p:cNvPr>
+              <p:cNvSpPr txBox="1">
+                <a:spLocks noRot="1" noChangeAspect="1" noMove="1" noResize="1" noEditPoints="1" noAdjustHandles="1" noChangeArrowheads="1" noChangeShapeType="1" noTextEdit="1"/>
+              </p:cNvSpPr>
+              <p:nvPr/>
+            </p:nvSpPr>
+            <p:spPr>
+              <a:xfrm>
+                <a:off x="750209" y="4120700"/>
+                <a:ext cx="2743200" cy="369332"/>
+              </a:xfrm>
+              <a:prstGeom prst="rect">
+                <a:avLst/>
+              </a:prstGeom>
+              <a:blipFill>
+                <a:blip r:embed="rId4"/>
+                <a:stretch>
+                  <a:fillRect t="-9836" b="-24590"/>
+                </a:stretch>
+              </a:blipFill>
+            </p:spPr>
+            <p:txBody>
+              <a:bodyPr/>
+              <a:lstStyle/>
+              <a:p>
+                <a:r>
+                  <a:rPr lang="es-ES">
+                    <a:noFill/>
+                  </a:rPr>
+                  <a:t> </a:t>
+                </a:r>
+              </a:p>
+            </p:txBody>
+          </p:sp>
+        </mc:Fallback>
+      </mc:AlternateContent>
+      <mc:AlternateContent xmlns:mc="http://schemas.openxmlformats.org/markup-compatibility/2006" xmlns:a14="http://schemas.microsoft.com/office/drawing/2010/main">
+        <mc:Choice Requires="a14">
+          <p:sp>
+            <p:nvSpPr>
+              <p:cNvPr id="12" name="CuadroTexto 11">
+                <a:extLst>
+                  <a:ext uri="{FF2B5EF4-FFF2-40B4-BE49-F238E27FC236}">
+                    <a16:creationId xmlns:a16="http://schemas.microsoft.com/office/drawing/2014/main" id="{B0453D3F-F004-F550-4506-94658D65A6AC}"/>
+                  </a:ext>
+                </a:extLst>
+              </p:cNvPr>
+              <p:cNvSpPr txBox="1"/>
+              <p:nvPr/>
+            </p:nvSpPr>
+            <p:spPr>
+              <a:xfrm>
+                <a:off x="293009" y="3743660"/>
+                <a:ext cx="2743200" cy="369332"/>
+              </a:xfrm>
+              <a:prstGeom prst="rect">
+                <a:avLst/>
+              </a:prstGeom>
+              <a:noFill/>
+            </p:spPr>
+            <p:txBody>
+              <a:bodyPr wrap="square" rtlCol="0">
+                <a:spAutoFit/>
+              </a:bodyPr>
+              <a:lstStyle/>
+              <a:p>
+                <a:pPr/>
+                <a14:m>
+                  <m:oMathPara xmlns:m="http://schemas.openxmlformats.org/officeDocument/2006/math">
+                    <m:oMathParaPr>
+                      <m:jc m:val="centerGroup"/>
+                    </m:oMathParaPr>
+                    <m:oMath xmlns:m="http://schemas.openxmlformats.org/officeDocument/2006/math">
+                      <m:sSub>
+                        <m:sSubPr>
+                          <m:ctrlPr>
+                            <a:rPr lang="es-ES" b="0" i="1" smtClean="0">
+                              <a:latin typeface="Cambria Math" panose="02040503050406030204" pitchFamily="18" charset="0"/>
+                            </a:rPr>
+                          </m:ctrlPr>
+                        </m:sSubPr>
+                        <m:e>
+                          <m:r>
+                            <a:rPr lang="es-ES" b="0" i="1" smtClean="0">
+                              <a:latin typeface="Cambria Math" panose="02040503050406030204" pitchFamily="18" charset="0"/>
+                            </a:rPr>
+                            <m:t>𝑛</m:t>
+                          </m:r>
+                          <m:r>
+                            <a:rPr lang="es-ES" b="0" i="1" smtClean="0">
+                              <a:latin typeface="Cambria Math" panose="02040503050406030204" pitchFamily="18" charset="0"/>
+                            </a:rPr>
+                            <m:t>_</m:t>
+                          </m:r>
+                          <m:r>
+                            <a:rPr lang="es-ES" b="0" i="1" smtClean="0">
+                              <a:latin typeface="Cambria Math" panose="02040503050406030204" pitchFamily="18" charset="0"/>
+                            </a:rPr>
+                            <m:t>𝑒𝑓𝑓</m:t>
+                          </m:r>
+                        </m:e>
+                        <m:sub>
+                          <m:r>
+                            <a:rPr lang="es-ES" b="0" i="1" smtClean="0">
+                              <a:latin typeface="Cambria Math" panose="02040503050406030204" pitchFamily="18" charset="0"/>
+                            </a:rPr>
+                            <m:t>𝑢</m:t>
+                          </m:r>
+                          <m:r>
+                            <a:rPr lang="es-ES" b="0" i="1" smtClean="0">
+                              <a:latin typeface="Cambria Math" panose="02040503050406030204" pitchFamily="18" charset="0"/>
+                            </a:rPr>
+                            <m:t> </m:t>
+                          </m:r>
+                        </m:sub>
+                      </m:sSub>
+                      <m:r>
+                        <a:rPr lang="es-ES" b="0" i="1" smtClean="0">
+                          <a:latin typeface="Cambria Math" panose="02040503050406030204" pitchFamily="18" charset="0"/>
+                        </a:rPr>
+                        <m:t>=</m:t>
+                      </m:r>
+                      <m:sSub>
+                        <m:sSubPr>
+                          <m:ctrlPr>
+                            <a:rPr lang="es-ES" i="1">
+                              <a:latin typeface="Cambria Math" panose="02040503050406030204" pitchFamily="18" charset="0"/>
+                            </a:rPr>
+                          </m:ctrlPr>
+                        </m:sSubPr>
+                        <m:e>
+                          <m:r>
+                            <a:rPr lang="es-ES" i="1">
+                              <a:latin typeface="Cambria Math" panose="02040503050406030204" pitchFamily="18" charset="0"/>
+                            </a:rPr>
+                            <m:t>𝑛</m:t>
+                          </m:r>
+                          <m:r>
+                            <a:rPr lang="es-ES" i="1">
+                              <a:latin typeface="Cambria Math" panose="02040503050406030204" pitchFamily="18" charset="0"/>
+                            </a:rPr>
+                            <m:t>_</m:t>
+                          </m:r>
+                          <m:r>
+                            <a:rPr lang="es-ES" i="1">
+                              <a:latin typeface="Cambria Math" panose="02040503050406030204" pitchFamily="18" charset="0"/>
+                            </a:rPr>
+                            <m:t>𝑒𝑓𝑓</m:t>
+                          </m:r>
+                        </m:e>
+                        <m:sub>
+                          <m:r>
+                            <a:rPr lang="es-ES" b="0" i="1" smtClean="0">
+                              <a:latin typeface="Cambria Math" panose="02040503050406030204" pitchFamily="18" charset="0"/>
+                            </a:rPr>
+                            <m:t>𝑙</m:t>
+                          </m:r>
+                        </m:sub>
+                      </m:sSub>
+                    </m:oMath>
+                  </m:oMathPara>
+                </a14:m>
+                <a:endParaRPr lang="es-ES" dirty="0"/>
+              </a:p>
+            </p:txBody>
+          </p:sp>
+        </mc:Choice>
+        <mc:Fallback xmlns="">
+          <p:sp>
+            <p:nvSpPr>
+              <p:cNvPr id="12" name="CuadroTexto 11">
+                <a:extLst>
+                  <a:ext uri="{FF2B5EF4-FFF2-40B4-BE49-F238E27FC236}">
+                    <a16:creationId xmlns:a16="http://schemas.microsoft.com/office/drawing/2014/main" id="{B0453D3F-F004-F550-4506-94658D65A6AC}"/>
+                  </a:ext>
+                </a:extLst>
+              </p:cNvPr>
+              <p:cNvSpPr txBox="1">
+                <a:spLocks noRot="1" noChangeAspect="1" noMove="1" noResize="1" noEditPoints="1" noAdjustHandles="1" noChangeArrowheads="1" noChangeShapeType="1" noTextEdit="1"/>
+              </p:cNvSpPr>
+              <p:nvPr/>
+            </p:nvSpPr>
+            <p:spPr>
+              <a:xfrm>
+                <a:off x="293009" y="3743660"/>
+                <a:ext cx="2743200" cy="369332"/>
+              </a:xfrm>
+              <a:prstGeom prst="rect">
+                <a:avLst/>
+              </a:prstGeom>
+              <a:blipFill>
+                <a:blip r:embed="rId5"/>
+                <a:stretch>
+                  <a:fillRect b="-13115"/>
+                </a:stretch>
+              </a:blipFill>
+            </p:spPr>
+            <p:txBody>
+              <a:bodyPr/>
+              <a:lstStyle/>
+              <a:p>
+                <a:r>
+                  <a:rPr lang="es-ES">
+                    <a:noFill/>
+                  </a:rPr>
+                  <a:t> </a:t>
+                </a:r>
+              </a:p>
+            </p:txBody>
+          </p:sp>
+        </mc:Fallback>
+      </mc:AlternateContent>
+      <mc:AlternateContent xmlns:mc="http://schemas.openxmlformats.org/markup-compatibility/2006" xmlns:a14="http://schemas.microsoft.com/office/drawing/2010/main">
+        <mc:Choice Requires="a14">
+          <p:sp>
+            <p:nvSpPr>
+              <p:cNvPr id="13" name="CuadroTexto 12">
+                <a:extLst>
+                  <a:ext uri="{FF2B5EF4-FFF2-40B4-BE49-F238E27FC236}">
+                    <a16:creationId xmlns:a16="http://schemas.microsoft.com/office/drawing/2014/main" id="{F7F32D14-2B0B-1486-F25E-F0DED25312A4}"/>
+                  </a:ext>
+                </a:extLst>
+              </p:cNvPr>
+              <p:cNvSpPr txBox="1"/>
+              <p:nvPr/>
+            </p:nvSpPr>
+            <p:spPr>
+              <a:xfrm>
+                <a:off x="771559" y="4490032"/>
+                <a:ext cx="2743200" cy="369332"/>
+              </a:xfrm>
+              <a:prstGeom prst="rect">
+                <a:avLst/>
+              </a:prstGeom>
+              <a:noFill/>
+            </p:spPr>
+            <p:txBody>
+              <a:bodyPr wrap="square" rtlCol="0">
+                <a:spAutoFit/>
+              </a:bodyPr>
+              <a:lstStyle/>
+              <a:p>
+                <a14:m>
+                  <m:oMath xmlns:m="http://schemas.openxmlformats.org/officeDocument/2006/math">
+                    <m:sSub>
+                      <m:sSubPr>
+                        <m:ctrlPr>
+                          <a:rPr lang="es-ES" b="0" i="1" smtClean="0">
+                            <a:latin typeface="Cambria Math" panose="02040503050406030204" pitchFamily="18" charset="0"/>
+                          </a:rPr>
+                        </m:ctrlPr>
+                      </m:sSubPr>
+                      <m:e>
+                        <m:r>
+                          <a:rPr lang="es-ES" b="0" i="1" smtClean="0">
+                            <a:latin typeface="Cambria Math" panose="02040503050406030204" pitchFamily="18" charset="0"/>
+                          </a:rPr>
+                          <m:t>𝐿</m:t>
+                        </m:r>
+                      </m:e>
+                      <m:sub>
+                        <m:r>
+                          <a:rPr lang="es-ES" b="0" i="1" smtClean="0">
+                            <a:latin typeface="Cambria Math" panose="02040503050406030204" pitchFamily="18" charset="0"/>
+                          </a:rPr>
+                          <m:t>𝑢</m:t>
+                        </m:r>
+                      </m:sub>
+                    </m:sSub>
+                    <m:r>
+                      <a:rPr lang="es-ES" b="0" i="1" smtClean="0">
+                        <a:latin typeface="Cambria Math" panose="02040503050406030204" pitchFamily="18" charset="0"/>
+                      </a:rPr>
+                      <m:t>=</m:t>
+                    </m:r>
+                    <m:sSub>
+                      <m:sSubPr>
+                        <m:ctrlPr>
+                          <a:rPr lang="es-ES" i="1">
+                            <a:latin typeface="Cambria Math" panose="02040503050406030204" pitchFamily="18" charset="0"/>
+                          </a:rPr>
+                        </m:ctrlPr>
+                      </m:sSubPr>
+                      <m:e>
+                        <m:r>
+                          <a:rPr lang="es-ES" b="0" i="1" smtClean="0">
+                            <a:latin typeface="Cambria Math" panose="02040503050406030204" pitchFamily="18" charset="0"/>
+                          </a:rPr>
+                          <m:t> 25 </m:t>
+                        </m:r>
+                        <m:r>
+                          <a:rPr lang="es-ES" b="0" i="1" smtClean="0">
+                            <a:latin typeface="Cambria Math" panose="02040503050406030204" pitchFamily="18" charset="0"/>
+                          </a:rPr>
+                          <m:t>𝑎𝑛𝑑</m:t>
+                        </m:r>
+                        <m:r>
+                          <a:rPr lang="es-ES" b="0" i="1" smtClean="0">
+                            <a:latin typeface="Cambria Math" panose="02040503050406030204" pitchFamily="18" charset="0"/>
+                          </a:rPr>
+                          <m:t> </m:t>
+                        </m:r>
+                        <m:r>
+                          <a:rPr lang="es-ES" b="0" i="1" smtClean="0">
+                            <a:latin typeface="Cambria Math" panose="02040503050406030204" pitchFamily="18" charset="0"/>
+                          </a:rPr>
+                          <m:t>𝐿</m:t>
+                        </m:r>
+                      </m:e>
+                      <m:sub>
+                        <m:r>
+                          <a:rPr lang="es-ES" b="0" i="1" smtClean="0">
+                            <a:latin typeface="Cambria Math" panose="02040503050406030204" pitchFamily="18" charset="0"/>
+                          </a:rPr>
+                          <m:t>𝑙</m:t>
+                        </m:r>
+                        <m:r>
+                          <a:rPr lang="es-ES" b="0" i="1" smtClean="0">
+                            <a:latin typeface="Cambria Math" panose="02040503050406030204" pitchFamily="18" charset="0"/>
+                          </a:rPr>
+                          <m:t> </m:t>
+                        </m:r>
+                      </m:sub>
+                    </m:sSub>
+                  </m:oMath>
+                </a14:m>
+                <a:r>
+                  <a:rPr lang="es-ES" dirty="0"/>
+                  <a:t> </a:t>
+                </a:r>
+                <a14:m>
+                  <m:oMath xmlns:m="http://schemas.openxmlformats.org/officeDocument/2006/math">
+                    <m:r>
+                      <a:rPr lang="es-ES" i="1">
+                        <a:latin typeface="Cambria Math" panose="02040503050406030204" pitchFamily="18" charset="0"/>
+                      </a:rPr>
+                      <m:t>=</m:t>
+                    </m:r>
+                    <m:r>
+                      <a:rPr lang="es-ES" b="0" i="1" smtClean="0">
+                        <a:latin typeface="Cambria Math" panose="02040503050406030204" pitchFamily="18" charset="0"/>
+                      </a:rPr>
+                      <m:t>5 </m:t>
+                    </m:r>
+                    <m:r>
+                      <a:rPr lang="es-ES" b="0" i="1" smtClean="0">
+                        <a:latin typeface="Cambria Math" panose="02040503050406030204" pitchFamily="18" charset="0"/>
+                      </a:rPr>
+                      <m:t>𝑢𝑚</m:t>
+                    </m:r>
+                  </m:oMath>
+                </a14:m>
+                <a:endParaRPr lang="es-ES" dirty="0"/>
+              </a:p>
+            </p:txBody>
+          </p:sp>
+        </mc:Choice>
+        <mc:Fallback xmlns="">
+          <p:sp>
+            <p:nvSpPr>
+              <p:cNvPr id="13" name="CuadroTexto 12">
+                <a:extLst>
+                  <a:ext uri="{FF2B5EF4-FFF2-40B4-BE49-F238E27FC236}">
+                    <a16:creationId xmlns:a16="http://schemas.microsoft.com/office/drawing/2014/main" id="{F7F32D14-2B0B-1486-F25E-F0DED25312A4}"/>
+                  </a:ext>
+                </a:extLst>
+              </p:cNvPr>
+              <p:cNvSpPr txBox="1">
+                <a:spLocks noRot="1" noChangeAspect="1" noMove="1" noResize="1" noEditPoints="1" noAdjustHandles="1" noChangeArrowheads="1" noChangeShapeType="1" noTextEdit="1"/>
+              </p:cNvSpPr>
+              <p:nvPr/>
+            </p:nvSpPr>
+            <p:spPr>
+              <a:xfrm>
+                <a:off x="771559" y="4490032"/>
+                <a:ext cx="2743200" cy="369332"/>
+              </a:xfrm>
+              <a:prstGeom prst="rect">
+                <a:avLst/>
+              </a:prstGeom>
+              <a:blipFill>
+                <a:blip r:embed="rId6"/>
+                <a:stretch>
+                  <a:fillRect/>
+                </a:stretch>
+              </a:blipFill>
+            </p:spPr>
+            <p:txBody>
+              <a:bodyPr/>
+              <a:lstStyle/>
+              <a:p>
+                <a:r>
+                  <a:rPr lang="es-ES">
+                    <a:noFill/>
+                  </a:rPr>
+                  <a:t> </a:t>
+                </a:r>
+              </a:p>
+            </p:txBody>
+          </p:sp>
+        </mc:Fallback>
+      </mc:AlternateContent>
+      <mc:AlternateContent xmlns:mc="http://schemas.openxmlformats.org/markup-compatibility/2006" xmlns:a14="http://schemas.microsoft.com/office/drawing/2010/main">
+        <mc:Choice Requires="a14">
+          <p:sp>
+            <p:nvSpPr>
+              <p:cNvPr id="14" name="CuadroTexto 13">
+                <a:extLst>
+                  <a:ext uri="{FF2B5EF4-FFF2-40B4-BE49-F238E27FC236}">
+                    <a16:creationId xmlns:a16="http://schemas.microsoft.com/office/drawing/2014/main" id="{563BDD73-166C-A0F9-CFA8-753C36A7953E}"/>
+                  </a:ext>
+                </a:extLst>
+              </p:cNvPr>
+              <p:cNvSpPr txBox="1"/>
+              <p:nvPr/>
+            </p:nvSpPr>
+            <p:spPr>
+              <a:xfrm>
+                <a:off x="4583859" y="3402161"/>
+                <a:ext cx="3255250" cy="381515"/>
+              </a:xfrm>
+              <a:prstGeom prst="rect">
+                <a:avLst/>
+              </a:prstGeom>
+              <a:noFill/>
+            </p:spPr>
+            <p:txBody>
+              <a:bodyPr wrap="square" rtlCol="0">
+                <a:spAutoFit/>
+              </a:bodyPr>
+              <a:lstStyle/>
+              <a:p>
+                <a14:m>
+                  <m:oMath xmlns:m="http://schemas.openxmlformats.org/officeDocument/2006/math">
+                    <m:sSub>
+                      <m:sSubPr>
+                        <m:ctrlPr>
+                          <a:rPr lang="es-ES" b="0" i="1" smtClean="0">
+                            <a:latin typeface="Cambria Math" panose="02040503050406030204" pitchFamily="18" charset="0"/>
+                          </a:rPr>
+                        </m:ctrlPr>
+                      </m:sSubPr>
+                      <m:e>
+                        <m:r>
+                          <m:rPr>
+                            <m:sty m:val="p"/>
+                          </m:rPr>
+                          <a:rPr lang="es-ES" i="1" smtClean="0">
+                            <a:latin typeface="Cambria Math" panose="02040503050406030204" pitchFamily="18" charset="0"/>
+                          </a:rPr>
+                          <m:t>α</m:t>
+                        </m:r>
+                      </m:e>
+                      <m:sub>
+                        <m:r>
+                          <a:rPr lang="es-ES" b="0" i="1" smtClean="0">
+                            <a:latin typeface="Cambria Math" panose="02040503050406030204" pitchFamily="18" charset="0"/>
+                          </a:rPr>
+                          <m:t>𝑎</m:t>
+                        </m:r>
+                        <m:r>
+                          <a:rPr lang="es-ES" b="0" i="1" smtClean="0">
+                            <a:latin typeface="Cambria Math" panose="02040503050406030204" pitchFamily="18" charset="0"/>
+                          </a:rPr>
+                          <m:t>,</m:t>
+                        </m:r>
+                        <m:r>
+                          <a:rPr lang="es-ES" b="0" i="1" smtClean="0">
+                            <a:latin typeface="Cambria Math" panose="02040503050406030204" pitchFamily="18" charset="0"/>
+                          </a:rPr>
+                          <m:t>𝑏</m:t>
+                        </m:r>
+                      </m:sub>
+                    </m:sSub>
+                    <m:r>
+                      <a:rPr lang="es-ES" b="0" i="1" smtClean="0">
+                        <a:latin typeface="Cambria Math" panose="02040503050406030204" pitchFamily="18" charset="0"/>
+                      </a:rPr>
+                      <m:t>=</m:t>
+                    </m:r>
+                    <m:r>
+                      <a:rPr lang="es-ES" i="1">
+                        <a:latin typeface="Cambria Math" panose="02040503050406030204" pitchFamily="18" charset="0"/>
+                        <a:ea typeface="Cambria Math" panose="02040503050406030204" pitchFamily="18" charset="0"/>
+                      </a:rPr>
+                      <m:t>0</m:t>
+                    </m:r>
+                    <m:r>
+                      <a:rPr lang="es-ES" b="0" i="1" smtClean="0">
+                        <a:latin typeface="Cambria Math" panose="02040503050406030204" pitchFamily="18" charset="0"/>
+                        <a:ea typeface="Cambria Math" panose="02040503050406030204" pitchFamily="18" charset="0"/>
+                      </a:rPr>
+                      <m:t>.1</m:t>
+                    </m:r>
+                  </m:oMath>
+                </a14:m>
+                <a:r>
+                  <a:rPr lang="en-US" kern="0" dirty="0">
+                    <a:solidFill>
+                      <a:sysClr val="windowText" lastClr="000000"/>
+                    </a:solidFill>
+                  </a:rPr>
+                  <a:t> and </a:t>
+                </a:r>
+                <a14:m>
+                  <m:oMath xmlns:m="http://schemas.openxmlformats.org/officeDocument/2006/math">
+                    <m:sSub>
+                      <m:sSubPr>
+                        <m:ctrlPr>
+                          <a:rPr lang="es-ES" b="0" i="1" smtClean="0">
+                            <a:latin typeface="Cambria Math" panose="02040503050406030204" pitchFamily="18" charset="0"/>
+                          </a:rPr>
+                        </m:ctrlPr>
+                      </m:sSubPr>
+                      <m:e>
+                        <m:r>
+                          <m:rPr>
+                            <m:sty m:val="p"/>
+                          </m:rPr>
+                          <a:rPr lang="es-ES" i="1" smtClean="0">
+                            <a:latin typeface="Cambria Math" panose="02040503050406030204" pitchFamily="18" charset="0"/>
+                          </a:rPr>
+                          <m:t>γ</m:t>
+                        </m:r>
+                      </m:e>
+                      <m:sub>
+                        <m:r>
+                          <a:rPr lang="es-ES" b="0" i="1" smtClean="0">
+                            <a:latin typeface="Cambria Math" panose="02040503050406030204" pitchFamily="18" charset="0"/>
+                          </a:rPr>
+                          <m:t>𝑎</m:t>
+                        </m:r>
+                        <m:r>
+                          <a:rPr lang="es-ES" b="0" i="1" smtClean="0">
+                            <a:latin typeface="Cambria Math" panose="02040503050406030204" pitchFamily="18" charset="0"/>
+                          </a:rPr>
+                          <m:t>, </m:t>
+                        </m:r>
+                        <m:r>
+                          <a:rPr lang="es-ES" b="0" i="1" smtClean="0">
+                            <a:latin typeface="Cambria Math" panose="02040503050406030204" pitchFamily="18" charset="0"/>
+                          </a:rPr>
+                          <m:t>𝑏</m:t>
+                        </m:r>
+                      </m:sub>
+                    </m:sSub>
+                    <m:r>
+                      <a:rPr lang="es-ES" b="0" i="1" smtClean="0">
+                        <a:latin typeface="Cambria Math" panose="02040503050406030204" pitchFamily="18" charset="0"/>
+                      </a:rPr>
+                      <m:t>=0</m:t>
+                    </m:r>
+                  </m:oMath>
+                </a14:m>
+                <a:endParaRPr lang="es-ES" dirty="0"/>
+              </a:p>
+            </p:txBody>
+          </p:sp>
+        </mc:Choice>
+        <mc:Fallback xmlns="">
+          <p:sp>
+            <p:nvSpPr>
+              <p:cNvPr id="14" name="CuadroTexto 13">
+                <a:extLst>
+                  <a:ext uri="{FF2B5EF4-FFF2-40B4-BE49-F238E27FC236}">
+                    <a16:creationId xmlns:a16="http://schemas.microsoft.com/office/drawing/2014/main" id="{563BDD73-166C-A0F9-CFA8-753C36A7953E}"/>
+                  </a:ext>
+                </a:extLst>
+              </p:cNvPr>
+              <p:cNvSpPr txBox="1">
+                <a:spLocks noRot="1" noChangeAspect="1" noMove="1" noResize="1" noEditPoints="1" noAdjustHandles="1" noChangeArrowheads="1" noChangeShapeType="1" noTextEdit="1"/>
+              </p:cNvSpPr>
+              <p:nvPr/>
+            </p:nvSpPr>
+            <p:spPr>
+              <a:xfrm>
+                <a:off x="4583859" y="3402161"/>
+                <a:ext cx="3255250" cy="381515"/>
+              </a:xfrm>
+              <a:prstGeom prst="rect">
+                <a:avLst/>
+              </a:prstGeom>
+              <a:blipFill>
+                <a:blip r:embed="rId7"/>
+                <a:stretch>
+                  <a:fillRect t="-6349" b="-22222"/>
+                </a:stretch>
+              </a:blipFill>
+            </p:spPr>
+            <p:txBody>
+              <a:bodyPr/>
+              <a:lstStyle/>
+              <a:p>
+                <a:r>
+                  <a:rPr lang="es-ES">
+                    <a:noFill/>
+                  </a:rPr>
+                  <a:t> </a:t>
+                </a:r>
+              </a:p>
+            </p:txBody>
+          </p:sp>
+        </mc:Fallback>
+      </mc:AlternateContent>
+      <mc:AlternateContent xmlns:mc="http://schemas.openxmlformats.org/markup-compatibility/2006" xmlns:a14="http://schemas.microsoft.com/office/drawing/2010/main">
+        <mc:Choice Requires="a14">
+          <p:sp>
+            <p:nvSpPr>
+              <p:cNvPr id="15" name="CuadroTexto 14">
+                <a:extLst>
+                  <a:ext uri="{FF2B5EF4-FFF2-40B4-BE49-F238E27FC236}">
+                    <a16:creationId xmlns:a16="http://schemas.microsoft.com/office/drawing/2014/main" id="{93489092-12E2-9BB4-E9C2-2BA34AE11D44}"/>
+                  </a:ext>
+                </a:extLst>
+              </p:cNvPr>
+              <p:cNvSpPr txBox="1"/>
+              <p:nvPr/>
+            </p:nvSpPr>
+            <p:spPr>
+              <a:xfrm>
+                <a:off x="4562509" y="4120700"/>
+                <a:ext cx="2743200" cy="369332"/>
+              </a:xfrm>
+              <a:prstGeom prst="rect">
+                <a:avLst/>
+              </a:prstGeom>
+              <a:noFill/>
+            </p:spPr>
+            <p:txBody>
+              <a:bodyPr wrap="square" rtlCol="0">
+                <a:spAutoFit/>
+              </a:bodyPr>
+              <a:lstStyle/>
+              <a:p>
+                <a14:m>
+                  <m:oMath xmlns:m="http://schemas.openxmlformats.org/officeDocument/2006/math">
+                    <m:sSub>
+                      <m:sSubPr>
+                        <m:ctrlPr>
+                          <a:rPr lang="es-ES" b="0" i="1" smtClean="0">
+                            <a:latin typeface="Cambria Math" panose="02040503050406030204" pitchFamily="18" charset="0"/>
+                          </a:rPr>
+                        </m:ctrlPr>
+                      </m:sSubPr>
+                      <m:e>
+                        <m:r>
+                          <m:rPr>
+                            <m:sty m:val="p"/>
+                          </m:rPr>
+                          <a:rPr lang="es-ES" i="1" smtClean="0">
+                            <a:latin typeface="Cambria Math" panose="02040503050406030204" pitchFamily="18" charset="0"/>
+                          </a:rPr>
+                          <m:t>k</m:t>
+                        </m:r>
+                      </m:e>
+                      <m:sub>
+                        <m:r>
+                          <a:rPr lang="es-ES" b="0" i="1" smtClean="0">
+                            <a:latin typeface="Cambria Math" panose="02040503050406030204" pitchFamily="18" charset="0"/>
+                          </a:rPr>
+                          <m:t>𝑎</m:t>
+                        </m:r>
+                      </m:sub>
+                    </m:sSub>
+                    <m:r>
+                      <a:rPr lang="es-ES" b="0" i="1" smtClean="0">
+                        <a:latin typeface="Cambria Math" panose="02040503050406030204" pitchFamily="18" charset="0"/>
+                      </a:rPr>
+                      <m:t>=</m:t>
+                    </m:r>
+                    <m:r>
+                      <a:rPr lang="es-ES" i="1">
+                        <a:latin typeface="Cambria Math" panose="02040503050406030204" pitchFamily="18" charset="0"/>
+                        <a:ea typeface="Cambria Math" panose="02040503050406030204" pitchFamily="18" charset="0"/>
+                      </a:rPr>
+                      <m:t>0</m:t>
+                    </m:r>
+                    <m:r>
+                      <a:rPr lang="es-ES" b="0" i="0" smtClean="0">
+                        <a:latin typeface="Cambria Math" panose="02040503050406030204" pitchFamily="18" charset="0"/>
+                        <a:ea typeface="Cambria Math" panose="02040503050406030204" pitchFamily="18" charset="0"/>
+                      </a:rPr>
+                      <m:t>.5</m:t>
+                    </m:r>
+                  </m:oMath>
+                </a14:m>
+                <a:r>
+                  <a:rPr lang="en-US" kern="0" dirty="0">
+                    <a:solidFill>
+                      <a:sysClr val="windowText" lastClr="000000"/>
+                    </a:solidFill>
+                  </a:rPr>
+                  <a:t> and </a:t>
+                </a:r>
+                <a14:m>
+                  <m:oMath xmlns:m="http://schemas.openxmlformats.org/officeDocument/2006/math">
+                    <m:sSub>
+                      <m:sSubPr>
+                        <m:ctrlPr>
+                          <a:rPr lang="es-ES" b="0" i="1" dirty="0" smtClean="0">
+                            <a:latin typeface="Cambria Math" panose="02040503050406030204" pitchFamily="18" charset="0"/>
+                          </a:rPr>
+                        </m:ctrlPr>
+                      </m:sSubPr>
+                      <m:e>
+                        <m:r>
+                          <m:rPr>
+                            <m:sty m:val="p"/>
+                          </m:rPr>
+                          <a:rPr lang="es-ES" i="1" dirty="0">
+                            <a:latin typeface="Cambria Math" panose="02040503050406030204" pitchFamily="18" charset="0"/>
+                          </a:rPr>
+                          <m:t>k</m:t>
+                        </m:r>
+                      </m:e>
+                      <m:sub>
+                        <m:r>
+                          <a:rPr lang="es-ES" b="0" i="1" dirty="0" smtClean="0">
+                            <a:latin typeface="Cambria Math" panose="02040503050406030204" pitchFamily="18" charset="0"/>
+                          </a:rPr>
+                          <m:t>𝑏</m:t>
+                        </m:r>
+                      </m:sub>
+                    </m:sSub>
+                    <m:r>
+                      <a:rPr lang="es-ES" b="0" i="1" smtClean="0">
+                        <a:latin typeface="Cambria Math" panose="02040503050406030204" pitchFamily="18" charset="0"/>
+                      </a:rPr>
+                      <m:t>=</m:t>
+                    </m:r>
+                    <m:r>
+                      <a:rPr lang="es-ES" i="1">
+                        <a:latin typeface="Cambria Math" panose="02040503050406030204" pitchFamily="18" charset="0"/>
+                        <a:ea typeface="Cambria Math" panose="02040503050406030204" pitchFamily="18" charset="0"/>
+                      </a:rPr>
+                      <m:t>0</m:t>
+                    </m:r>
+                    <m:r>
+                      <a:rPr lang="es-ES" b="0" i="1" smtClean="0">
+                        <a:latin typeface="Cambria Math" panose="02040503050406030204" pitchFamily="18" charset="0"/>
+                        <a:ea typeface="Cambria Math" panose="02040503050406030204" pitchFamily="18" charset="0"/>
+                      </a:rPr>
+                      <m:t>.5 </m:t>
+                    </m:r>
+                  </m:oMath>
+                </a14:m>
+                <a:endParaRPr lang="es-ES" dirty="0"/>
+              </a:p>
+            </p:txBody>
+          </p:sp>
+        </mc:Choice>
+        <mc:Fallback xmlns="">
+          <p:sp>
+            <p:nvSpPr>
+              <p:cNvPr id="15" name="CuadroTexto 14">
+                <a:extLst>
+                  <a:ext uri="{FF2B5EF4-FFF2-40B4-BE49-F238E27FC236}">
+                    <a16:creationId xmlns:a16="http://schemas.microsoft.com/office/drawing/2014/main" id="{93489092-12E2-9BB4-E9C2-2BA34AE11D44}"/>
+                  </a:ext>
+                </a:extLst>
+              </p:cNvPr>
+              <p:cNvSpPr txBox="1">
+                <a:spLocks noRot="1" noChangeAspect="1" noMove="1" noResize="1" noEditPoints="1" noAdjustHandles="1" noChangeArrowheads="1" noChangeShapeType="1" noTextEdit="1"/>
+              </p:cNvSpPr>
+              <p:nvPr/>
+            </p:nvSpPr>
+            <p:spPr>
+              <a:xfrm>
+                <a:off x="4562509" y="4120700"/>
+                <a:ext cx="2743200" cy="369332"/>
+              </a:xfrm>
+              <a:prstGeom prst="rect">
+                <a:avLst/>
+              </a:prstGeom>
+              <a:blipFill>
+                <a:blip r:embed="rId8"/>
+                <a:stretch>
+                  <a:fillRect t="-9836" b="-24590"/>
+                </a:stretch>
+              </a:blipFill>
+            </p:spPr>
+            <p:txBody>
+              <a:bodyPr/>
+              <a:lstStyle/>
+              <a:p>
+                <a:r>
+                  <a:rPr lang="es-ES">
+                    <a:noFill/>
+                  </a:rPr>
+                  <a:t> </a:t>
+                </a:r>
+              </a:p>
+            </p:txBody>
+          </p:sp>
+        </mc:Fallback>
+      </mc:AlternateContent>
+      <mc:AlternateContent xmlns:mc="http://schemas.openxmlformats.org/markup-compatibility/2006" xmlns:a14="http://schemas.microsoft.com/office/drawing/2010/main">
+        <mc:Choice Requires="a14">
+          <p:sp>
+            <p:nvSpPr>
+              <p:cNvPr id="16" name="CuadroTexto 15">
+                <a:extLst>
+                  <a:ext uri="{FF2B5EF4-FFF2-40B4-BE49-F238E27FC236}">
+                    <a16:creationId xmlns:a16="http://schemas.microsoft.com/office/drawing/2014/main" id="{34D0A864-CF5F-5C61-753F-D5B4BAE9E676}"/>
+                  </a:ext>
+                </a:extLst>
+              </p:cNvPr>
+              <p:cNvSpPr txBox="1"/>
+              <p:nvPr/>
+            </p:nvSpPr>
+            <p:spPr>
+              <a:xfrm>
+                <a:off x="4105309" y="3743660"/>
+                <a:ext cx="2743200" cy="369332"/>
+              </a:xfrm>
+              <a:prstGeom prst="rect">
+                <a:avLst/>
+              </a:prstGeom>
+              <a:noFill/>
+            </p:spPr>
+            <p:txBody>
+              <a:bodyPr wrap="square" rtlCol="0">
+                <a:spAutoFit/>
+              </a:bodyPr>
+              <a:lstStyle/>
+              <a:p>
+                <a:pPr/>
+                <a14:m>
+                  <m:oMathPara xmlns:m="http://schemas.openxmlformats.org/officeDocument/2006/math">
+                    <m:oMathParaPr>
+                      <m:jc m:val="centerGroup"/>
+                    </m:oMathParaPr>
+                    <m:oMath xmlns:m="http://schemas.openxmlformats.org/officeDocument/2006/math">
+                      <m:sSub>
+                        <m:sSubPr>
+                          <m:ctrlPr>
+                            <a:rPr lang="es-ES" b="0" i="1" smtClean="0">
+                              <a:latin typeface="Cambria Math" panose="02040503050406030204" pitchFamily="18" charset="0"/>
+                            </a:rPr>
+                          </m:ctrlPr>
+                        </m:sSubPr>
+                        <m:e>
+                          <m:r>
+                            <a:rPr lang="es-ES" b="0" i="1" smtClean="0">
+                              <a:latin typeface="Cambria Math" panose="02040503050406030204" pitchFamily="18" charset="0"/>
+                            </a:rPr>
+                            <m:t>𝑛</m:t>
+                          </m:r>
+                          <m:r>
+                            <a:rPr lang="es-ES" b="0" i="1" smtClean="0">
+                              <a:latin typeface="Cambria Math" panose="02040503050406030204" pitchFamily="18" charset="0"/>
+                            </a:rPr>
+                            <m:t>_</m:t>
+                          </m:r>
+                          <m:r>
+                            <a:rPr lang="es-ES" b="0" i="1" smtClean="0">
+                              <a:latin typeface="Cambria Math" panose="02040503050406030204" pitchFamily="18" charset="0"/>
+                            </a:rPr>
+                            <m:t>𝑒𝑓𝑓</m:t>
+                          </m:r>
+                        </m:e>
+                        <m:sub>
+                          <m:r>
+                            <a:rPr lang="es-ES" b="0" i="1" smtClean="0">
+                              <a:latin typeface="Cambria Math" panose="02040503050406030204" pitchFamily="18" charset="0"/>
+                            </a:rPr>
+                            <m:t>𝑢</m:t>
+                          </m:r>
+                          <m:r>
+                            <a:rPr lang="es-ES" b="0" i="1" smtClean="0">
+                              <a:latin typeface="Cambria Math" panose="02040503050406030204" pitchFamily="18" charset="0"/>
+                            </a:rPr>
+                            <m:t> </m:t>
+                          </m:r>
+                        </m:sub>
+                      </m:sSub>
+                      <m:r>
+                        <a:rPr lang="es-ES" b="0" i="1" smtClean="0">
+                          <a:latin typeface="Cambria Math" panose="02040503050406030204" pitchFamily="18" charset="0"/>
+                        </a:rPr>
+                        <m:t>=</m:t>
+                      </m:r>
+                      <m:sSub>
+                        <m:sSubPr>
+                          <m:ctrlPr>
+                            <a:rPr lang="es-ES" i="1">
+                              <a:latin typeface="Cambria Math" panose="02040503050406030204" pitchFamily="18" charset="0"/>
+                            </a:rPr>
+                          </m:ctrlPr>
+                        </m:sSubPr>
+                        <m:e>
+                          <m:r>
+                            <a:rPr lang="es-ES" i="1">
+                              <a:latin typeface="Cambria Math" panose="02040503050406030204" pitchFamily="18" charset="0"/>
+                            </a:rPr>
+                            <m:t>𝑛</m:t>
+                          </m:r>
+                          <m:r>
+                            <a:rPr lang="es-ES" i="1">
+                              <a:latin typeface="Cambria Math" panose="02040503050406030204" pitchFamily="18" charset="0"/>
+                            </a:rPr>
+                            <m:t>_</m:t>
+                          </m:r>
+                          <m:r>
+                            <a:rPr lang="es-ES" i="1">
+                              <a:latin typeface="Cambria Math" panose="02040503050406030204" pitchFamily="18" charset="0"/>
+                            </a:rPr>
+                            <m:t>𝑒𝑓𝑓</m:t>
+                          </m:r>
+                        </m:e>
+                        <m:sub>
+                          <m:r>
+                            <a:rPr lang="es-ES" b="0" i="1" smtClean="0">
+                              <a:latin typeface="Cambria Math" panose="02040503050406030204" pitchFamily="18" charset="0"/>
+                            </a:rPr>
+                            <m:t>𝑙</m:t>
+                          </m:r>
+                        </m:sub>
+                      </m:sSub>
+                    </m:oMath>
+                  </m:oMathPara>
+                </a14:m>
+                <a:endParaRPr lang="es-ES" dirty="0"/>
+              </a:p>
+            </p:txBody>
+          </p:sp>
+        </mc:Choice>
+        <mc:Fallback xmlns="">
+          <p:sp>
+            <p:nvSpPr>
+              <p:cNvPr id="16" name="CuadroTexto 15">
+                <a:extLst>
+                  <a:ext uri="{FF2B5EF4-FFF2-40B4-BE49-F238E27FC236}">
+                    <a16:creationId xmlns:a16="http://schemas.microsoft.com/office/drawing/2014/main" id="{34D0A864-CF5F-5C61-753F-D5B4BAE9E676}"/>
+                  </a:ext>
+                </a:extLst>
+              </p:cNvPr>
+              <p:cNvSpPr txBox="1">
+                <a:spLocks noRot="1" noChangeAspect="1" noMove="1" noResize="1" noEditPoints="1" noAdjustHandles="1" noChangeArrowheads="1" noChangeShapeType="1" noTextEdit="1"/>
+              </p:cNvSpPr>
+              <p:nvPr/>
+            </p:nvSpPr>
+            <p:spPr>
+              <a:xfrm>
+                <a:off x="4105309" y="3743660"/>
+                <a:ext cx="2743200" cy="369332"/>
+              </a:xfrm>
+              <a:prstGeom prst="rect">
+                <a:avLst/>
+              </a:prstGeom>
+              <a:blipFill>
+                <a:blip r:embed="rId9"/>
+                <a:stretch>
+                  <a:fillRect b="-13115"/>
+                </a:stretch>
+              </a:blipFill>
+            </p:spPr>
+            <p:txBody>
+              <a:bodyPr/>
+              <a:lstStyle/>
+              <a:p>
+                <a:r>
+                  <a:rPr lang="es-ES">
+                    <a:noFill/>
+                  </a:rPr>
+                  <a:t> </a:t>
+                </a:r>
+              </a:p>
+            </p:txBody>
+          </p:sp>
+        </mc:Fallback>
+      </mc:AlternateContent>
+      <mc:AlternateContent xmlns:mc="http://schemas.openxmlformats.org/markup-compatibility/2006" xmlns:a14="http://schemas.microsoft.com/office/drawing/2010/main">
+        <mc:Choice Requires="a14">
+          <p:sp>
+            <p:nvSpPr>
+              <p:cNvPr id="17" name="CuadroTexto 16">
+                <a:extLst>
+                  <a:ext uri="{FF2B5EF4-FFF2-40B4-BE49-F238E27FC236}">
+                    <a16:creationId xmlns:a16="http://schemas.microsoft.com/office/drawing/2014/main" id="{B50EB611-EE10-E251-9EDA-3D152E769202}"/>
+                  </a:ext>
+                </a:extLst>
+              </p:cNvPr>
+              <p:cNvSpPr txBox="1"/>
+              <p:nvPr/>
+            </p:nvSpPr>
+            <p:spPr>
+              <a:xfrm>
+                <a:off x="4583859" y="4490032"/>
+                <a:ext cx="2743200" cy="369332"/>
+              </a:xfrm>
+              <a:prstGeom prst="rect">
+                <a:avLst/>
+              </a:prstGeom>
+              <a:noFill/>
+            </p:spPr>
+            <p:txBody>
+              <a:bodyPr wrap="square" rtlCol="0">
+                <a:spAutoFit/>
+              </a:bodyPr>
+              <a:lstStyle/>
+              <a:p>
+                <a14:m>
+                  <m:oMath xmlns:m="http://schemas.openxmlformats.org/officeDocument/2006/math">
+                    <m:sSub>
+                      <m:sSubPr>
+                        <m:ctrlPr>
+                          <a:rPr lang="es-ES" b="0" i="1" smtClean="0">
+                            <a:latin typeface="Cambria Math" panose="02040503050406030204" pitchFamily="18" charset="0"/>
+                          </a:rPr>
+                        </m:ctrlPr>
+                      </m:sSubPr>
+                      <m:e>
+                        <m:r>
+                          <a:rPr lang="es-ES" b="0" i="1" smtClean="0">
+                            <a:latin typeface="Cambria Math" panose="02040503050406030204" pitchFamily="18" charset="0"/>
+                          </a:rPr>
+                          <m:t>𝐿</m:t>
+                        </m:r>
+                      </m:e>
+                      <m:sub>
+                        <m:r>
+                          <a:rPr lang="es-ES" b="0" i="1" smtClean="0">
+                            <a:latin typeface="Cambria Math" panose="02040503050406030204" pitchFamily="18" charset="0"/>
+                          </a:rPr>
+                          <m:t>𝑢</m:t>
+                        </m:r>
+                      </m:sub>
+                    </m:sSub>
+                    <m:r>
+                      <a:rPr lang="es-ES" b="0" i="1" smtClean="0">
+                        <a:latin typeface="Cambria Math" panose="02040503050406030204" pitchFamily="18" charset="0"/>
+                      </a:rPr>
+                      <m:t>=</m:t>
+                    </m:r>
+                    <m:sSub>
+                      <m:sSubPr>
+                        <m:ctrlPr>
+                          <a:rPr lang="es-ES" i="1">
+                            <a:latin typeface="Cambria Math" panose="02040503050406030204" pitchFamily="18" charset="0"/>
+                          </a:rPr>
+                        </m:ctrlPr>
+                      </m:sSubPr>
+                      <m:e>
+                        <m:r>
+                          <a:rPr lang="es-ES" b="0" i="1" smtClean="0">
+                            <a:latin typeface="Cambria Math" panose="02040503050406030204" pitchFamily="18" charset="0"/>
+                          </a:rPr>
+                          <m:t> 25 </m:t>
+                        </m:r>
+                        <m:r>
+                          <a:rPr lang="es-ES" b="0" i="1" smtClean="0">
+                            <a:latin typeface="Cambria Math" panose="02040503050406030204" pitchFamily="18" charset="0"/>
+                          </a:rPr>
+                          <m:t>𝑎𝑛𝑑</m:t>
+                        </m:r>
+                        <m:r>
+                          <a:rPr lang="es-ES" b="0" i="1" smtClean="0">
+                            <a:latin typeface="Cambria Math" panose="02040503050406030204" pitchFamily="18" charset="0"/>
+                          </a:rPr>
+                          <m:t> </m:t>
+                        </m:r>
+                        <m:r>
+                          <a:rPr lang="es-ES" b="0" i="1" smtClean="0">
+                            <a:latin typeface="Cambria Math" panose="02040503050406030204" pitchFamily="18" charset="0"/>
+                          </a:rPr>
+                          <m:t>𝐿</m:t>
+                        </m:r>
+                      </m:e>
+                      <m:sub>
+                        <m:r>
+                          <a:rPr lang="es-ES" b="0" i="1" smtClean="0">
+                            <a:latin typeface="Cambria Math" panose="02040503050406030204" pitchFamily="18" charset="0"/>
+                          </a:rPr>
+                          <m:t>𝑙</m:t>
+                        </m:r>
+                        <m:r>
+                          <a:rPr lang="es-ES" b="0" i="1" smtClean="0">
+                            <a:latin typeface="Cambria Math" panose="02040503050406030204" pitchFamily="18" charset="0"/>
+                          </a:rPr>
+                          <m:t> </m:t>
+                        </m:r>
+                      </m:sub>
+                    </m:sSub>
+                  </m:oMath>
+                </a14:m>
+                <a:r>
+                  <a:rPr lang="es-ES" dirty="0"/>
+                  <a:t> </a:t>
+                </a:r>
+                <a14:m>
+                  <m:oMath xmlns:m="http://schemas.openxmlformats.org/officeDocument/2006/math">
+                    <m:r>
+                      <a:rPr lang="es-ES" i="1">
+                        <a:latin typeface="Cambria Math" panose="02040503050406030204" pitchFamily="18" charset="0"/>
+                      </a:rPr>
+                      <m:t>=</m:t>
+                    </m:r>
+                    <m:r>
+                      <a:rPr lang="es-ES" b="0" i="1" smtClean="0">
+                        <a:latin typeface="Cambria Math" panose="02040503050406030204" pitchFamily="18" charset="0"/>
+                      </a:rPr>
+                      <m:t>5 </m:t>
+                    </m:r>
+                    <m:r>
+                      <a:rPr lang="es-ES" b="0" i="1" smtClean="0">
+                        <a:latin typeface="Cambria Math" panose="02040503050406030204" pitchFamily="18" charset="0"/>
+                      </a:rPr>
+                      <m:t>𝑢𝑚</m:t>
+                    </m:r>
+                  </m:oMath>
+                </a14:m>
+                <a:endParaRPr lang="es-ES" dirty="0"/>
+              </a:p>
+            </p:txBody>
+          </p:sp>
+        </mc:Choice>
+        <mc:Fallback xmlns="">
+          <p:sp>
+            <p:nvSpPr>
+              <p:cNvPr id="17" name="CuadroTexto 16">
+                <a:extLst>
+                  <a:ext uri="{FF2B5EF4-FFF2-40B4-BE49-F238E27FC236}">
+                    <a16:creationId xmlns:a16="http://schemas.microsoft.com/office/drawing/2014/main" id="{B50EB611-EE10-E251-9EDA-3D152E769202}"/>
+                  </a:ext>
+                </a:extLst>
+              </p:cNvPr>
+              <p:cNvSpPr txBox="1">
+                <a:spLocks noRot="1" noChangeAspect="1" noMove="1" noResize="1" noEditPoints="1" noAdjustHandles="1" noChangeArrowheads="1" noChangeShapeType="1" noTextEdit="1"/>
+              </p:cNvSpPr>
+              <p:nvPr/>
+            </p:nvSpPr>
+            <p:spPr>
+              <a:xfrm>
+                <a:off x="4583859" y="4490032"/>
+                <a:ext cx="2743200" cy="369332"/>
+              </a:xfrm>
+              <a:prstGeom prst="rect">
+                <a:avLst/>
+              </a:prstGeom>
+              <a:blipFill>
+                <a:blip r:embed="rId10"/>
+                <a:stretch>
+                  <a:fillRect/>
+                </a:stretch>
+              </a:blipFill>
+            </p:spPr>
+            <p:txBody>
+              <a:bodyPr/>
+              <a:lstStyle/>
+              <a:p>
+                <a:r>
+                  <a:rPr lang="es-ES">
+                    <a:noFill/>
+                  </a:rPr>
+                  <a:t> </a:t>
+                </a:r>
+              </a:p>
+            </p:txBody>
+          </p:sp>
+        </mc:Fallback>
+      </mc:AlternateContent>
+      <p:pic>
+        <p:nvPicPr>
+          <p:cNvPr id="19" name="Imagen 18" descr="Gráfico, Gráfico de líneas&#10;&#10;El contenido generado por IA puede ser incorrecto.">
+            <a:extLst>
+              <a:ext uri="{FF2B5EF4-FFF2-40B4-BE49-F238E27FC236}">
+                <a16:creationId xmlns:a16="http://schemas.microsoft.com/office/drawing/2014/main" id="{B71D568F-46A2-86FC-0168-8570426E38E7}"/>
+              </a:ext>
+            </a:extLst>
+          </p:cNvPr>
+          <p:cNvPicPr>
+            <a:picLocks noChangeAspect="1"/>
+          </p:cNvPicPr>
+          <p:nvPr/>
+        </p:nvPicPr>
+        <p:blipFill>
+          <a:blip r:embed="rId11"/>
+          <a:stretch>
+            <a:fillRect/>
+          </a:stretch>
+        </p:blipFill>
+        <p:spPr>
+          <a:xfrm>
+            <a:off x="4267200" y="798706"/>
+            <a:ext cx="3220566" cy="2584405"/>
+          </a:xfrm>
+          <a:prstGeom prst="rect">
+            <a:avLst/>
+          </a:prstGeom>
+        </p:spPr>
+      </p:pic>
+      <mc:AlternateContent xmlns:mc="http://schemas.openxmlformats.org/markup-compatibility/2006" xmlns:a14="http://schemas.microsoft.com/office/drawing/2010/main">
+        <mc:Choice Requires="a14">
+          <p:sp>
+            <p:nvSpPr>
+              <p:cNvPr id="20" name="CuadroTexto 19">
+                <a:extLst>
+                  <a:ext uri="{FF2B5EF4-FFF2-40B4-BE49-F238E27FC236}">
+                    <a16:creationId xmlns:a16="http://schemas.microsoft.com/office/drawing/2014/main" id="{066C65FB-2D33-EFB3-C5A1-3019E09CDBD9}"/>
+                  </a:ext>
+                </a:extLst>
+              </p:cNvPr>
+              <p:cNvSpPr txBox="1"/>
+              <p:nvPr/>
+            </p:nvSpPr>
+            <p:spPr>
+              <a:xfrm>
+                <a:off x="8416359" y="3378930"/>
+                <a:ext cx="3255250" cy="381515"/>
+              </a:xfrm>
+              <a:prstGeom prst="rect">
+                <a:avLst/>
+              </a:prstGeom>
+              <a:noFill/>
+            </p:spPr>
+            <p:txBody>
+              <a:bodyPr wrap="square" rtlCol="0">
+                <a:spAutoFit/>
+              </a:bodyPr>
+              <a:lstStyle/>
+              <a:p>
+                <a14:m>
+                  <m:oMath xmlns:m="http://schemas.openxmlformats.org/officeDocument/2006/math">
+                    <m:sSub>
+                      <m:sSubPr>
+                        <m:ctrlPr>
+                          <a:rPr lang="es-ES" b="0" i="1" smtClean="0">
+                            <a:latin typeface="Cambria Math" panose="02040503050406030204" pitchFamily="18" charset="0"/>
+                          </a:rPr>
+                        </m:ctrlPr>
+                      </m:sSubPr>
+                      <m:e>
+                        <m:r>
+                          <m:rPr>
+                            <m:sty m:val="p"/>
+                          </m:rPr>
+                          <a:rPr lang="es-ES" i="1" smtClean="0">
+                            <a:latin typeface="Cambria Math" panose="02040503050406030204" pitchFamily="18" charset="0"/>
+                          </a:rPr>
+                          <m:t>α</m:t>
+                        </m:r>
+                      </m:e>
+                      <m:sub>
+                        <m:r>
+                          <a:rPr lang="es-ES" b="0" i="1" smtClean="0">
+                            <a:latin typeface="Cambria Math" panose="02040503050406030204" pitchFamily="18" charset="0"/>
+                          </a:rPr>
+                          <m:t>𝑎</m:t>
+                        </m:r>
+                        <m:r>
+                          <a:rPr lang="es-ES" b="0" i="1" smtClean="0">
+                            <a:latin typeface="Cambria Math" panose="02040503050406030204" pitchFamily="18" charset="0"/>
+                          </a:rPr>
+                          <m:t>,</m:t>
+                        </m:r>
+                        <m:r>
+                          <a:rPr lang="es-ES" b="0" i="1" smtClean="0">
+                            <a:latin typeface="Cambria Math" panose="02040503050406030204" pitchFamily="18" charset="0"/>
+                          </a:rPr>
+                          <m:t>𝑏</m:t>
+                        </m:r>
+                      </m:sub>
+                    </m:sSub>
+                    <m:r>
+                      <a:rPr lang="es-ES" b="0" i="1" smtClean="0">
+                        <a:latin typeface="Cambria Math" panose="02040503050406030204" pitchFamily="18" charset="0"/>
+                      </a:rPr>
+                      <m:t>=</m:t>
+                    </m:r>
+                    <m:r>
+                      <a:rPr lang="es-ES" i="1">
+                        <a:latin typeface="Cambria Math" panose="02040503050406030204" pitchFamily="18" charset="0"/>
+                        <a:ea typeface="Cambria Math" panose="02040503050406030204" pitchFamily="18" charset="0"/>
+                      </a:rPr>
+                      <m:t>0</m:t>
+                    </m:r>
+                    <m:r>
+                      <a:rPr lang="es-ES" b="0" i="1" smtClean="0">
+                        <a:latin typeface="Cambria Math" panose="02040503050406030204" pitchFamily="18" charset="0"/>
+                        <a:ea typeface="Cambria Math" panose="02040503050406030204" pitchFamily="18" charset="0"/>
+                      </a:rPr>
+                      <m:t>.1</m:t>
+                    </m:r>
+                  </m:oMath>
+                </a14:m>
+                <a:r>
+                  <a:rPr lang="en-US" kern="0" dirty="0">
+                    <a:solidFill>
+                      <a:sysClr val="windowText" lastClr="000000"/>
+                    </a:solidFill>
+                  </a:rPr>
+                  <a:t> and </a:t>
+                </a:r>
+                <a14:m>
+                  <m:oMath xmlns:m="http://schemas.openxmlformats.org/officeDocument/2006/math">
+                    <m:sSub>
+                      <m:sSubPr>
+                        <m:ctrlPr>
+                          <a:rPr lang="es-ES" b="0" i="1" smtClean="0">
+                            <a:latin typeface="Cambria Math" panose="02040503050406030204" pitchFamily="18" charset="0"/>
+                          </a:rPr>
+                        </m:ctrlPr>
+                      </m:sSubPr>
+                      <m:e>
+                        <m:r>
+                          <m:rPr>
+                            <m:sty m:val="p"/>
+                          </m:rPr>
+                          <a:rPr lang="es-ES" i="1" smtClean="0">
+                            <a:latin typeface="Cambria Math" panose="02040503050406030204" pitchFamily="18" charset="0"/>
+                          </a:rPr>
+                          <m:t>γ</m:t>
+                        </m:r>
+                      </m:e>
+                      <m:sub>
+                        <m:r>
+                          <a:rPr lang="es-ES" b="0" i="1" smtClean="0">
+                            <a:latin typeface="Cambria Math" panose="02040503050406030204" pitchFamily="18" charset="0"/>
+                          </a:rPr>
+                          <m:t>𝑎</m:t>
+                        </m:r>
+                        <m:r>
+                          <a:rPr lang="es-ES" b="0" i="1" smtClean="0">
+                            <a:latin typeface="Cambria Math" panose="02040503050406030204" pitchFamily="18" charset="0"/>
+                          </a:rPr>
+                          <m:t>, </m:t>
+                        </m:r>
+                        <m:r>
+                          <a:rPr lang="es-ES" b="0" i="1" smtClean="0">
+                            <a:latin typeface="Cambria Math" panose="02040503050406030204" pitchFamily="18" charset="0"/>
+                          </a:rPr>
+                          <m:t>𝑏</m:t>
+                        </m:r>
+                      </m:sub>
+                    </m:sSub>
+                    <m:r>
+                      <a:rPr lang="es-ES" b="0" i="1" smtClean="0">
+                        <a:latin typeface="Cambria Math" panose="02040503050406030204" pitchFamily="18" charset="0"/>
+                      </a:rPr>
+                      <m:t>=0.1</m:t>
+                    </m:r>
+                  </m:oMath>
+                </a14:m>
+                <a:endParaRPr lang="es-ES" dirty="0"/>
+              </a:p>
+            </p:txBody>
+          </p:sp>
+        </mc:Choice>
+        <mc:Fallback xmlns="">
+          <p:sp>
+            <p:nvSpPr>
+              <p:cNvPr id="20" name="CuadroTexto 19">
+                <a:extLst>
+                  <a:ext uri="{FF2B5EF4-FFF2-40B4-BE49-F238E27FC236}">
+                    <a16:creationId xmlns:a16="http://schemas.microsoft.com/office/drawing/2014/main" id="{066C65FB-2D33-EFB3-C5A1-3019E09CDBD9}"/>
+                  </a:ext>
+                </a:extLst>
+              </p:cNvPr>
+              <p:cNvSpPr txBox="1">
+                <a:spLocks noRot="1" noChangeAspect="1" noMove="1" noResize="1" noEditPoints="1" noAdjustHandles="1" noChangeArrowheads="1" noChangeShapeType="1" noTextEdit="1"/>
+              </p:cNvSpPr>
+              <p:nvPr/>
+            </p:nvSpPr>
+            <p:spPr>
+              <a:xfrm>
+                <a:off x="8416359" y="3378930"/>
+                <a:ext cx="3255250" cy="381515"/>
+              </a:xfrm>
+              <a:prstGeom prst="rect">
+                <a:avLst/>
+              </a:prstGeom>
+              <a:blipFill>
+                <a:blip r:embed="rId12"/>
+                <a:stretch>
+                  <a:fillRect t="-6349" b="-22222"/>
+                </a:stretch>
+              </a:blipFill>
+            </p:spPr>
+            <p:txBody>
+              <a:bodyPr/>
+              <a:lstStyle/>
+              <a:p>
+                <a:r>
+                  <a:rPr lang="es-ES">
+                    <a:noFill/>
+                  </a:rPr>
+                  <a:t> </a:t>
+                </a:r>
+              </a:p>
+            </p:txBody>
+          </p:sp>
+        </mc:Fallback>
+      </mc:AlternateContent>
+      <mc:AlternateContent xmlns:mc="http://schemas.openxmlformats.org/markup-compatibility/2006" xmlns:a14="http://schemas.microsoft.com/office/drawing/2010/main">
+        <mc:Choice Requires="a14">
+          <p:sp>
+            <p:nvSpPr>
+              <p:cNvPr id="21" name="CuadroTexto 20">
+                <a:extLst>
+                  <a:ext uri="{FF2B5EF4-FFF2-40B4-BE49-F238E27FC236}">
+                    <a16:creationId xmlns:a16="http://schemas.microsoft.com/office/drawing/2014/main" id="{C62A5441-55EA-B9F5-61C0-7E90E76F676B}"/>
+                  </a:ext>
+                </a:extLst>
+              </p:cNvPr>
+              <p:cNvSpPr txBox="1"/>
+              <p:nvPr/>
+            </p:nvSpPr>
+            <p:spPr>
+              <a:xfrm>
+                <a:off x="8395009" y="4097469"/>
+                <a:ext cx="2743200" cy="369332"/>
+              </a:xfrm>
+              <a:prstGeom prst="rect">
+                <a:avLst/>
+              </a:prstGeom>
+              <a:noFill/>
+            </p:spPr>
+            <p:txBody>
+              <a:bodyPr wrap="square" rtlCol="0">
+                <a:spAutoFit/>
+              </a:bodyPr>
+              <a:lstStyle/>
+              <a:p>
+                <a14:m>
+                  <m:oMath xmlns:m="http://schemas.openxmlformats.org/officeDocument/2006/math">
+                    <m:sSub>
+                      <m:sSubPr>
+                        <m:ctrlPr>
+                          <a:rPr lang="es-ES" b="0" i="1" smtClean="0">
+                            <a:latin typeface="Cambria Math" panose="02040503050406030204" pitchFamily="18" charset="0"/>
+                          </a:rPr>
+                        </m:ctrlPr>
+                      </m:sSubPr>
+                      <m:e>
+                        <m:r>
+                          <m:rPr>
+                            <m:sty m:val="p"/>
+                          </m:rPr>
+                          <a:rPr lang="es-ES" i="1" smtClean="0">
+                            <a:latin typeface="Cambria Math" panose="02040503050406030204" pitchFamily="18" charset="0"/>
+                          </a:rPr>
+                          <m:t>k</m:t>
+                        </m:r>
+                      </m:e>
+                      <m:sub>
+                        <m:r>
+                          <a:rPr lang="es-ES" b="0" i="1" smtClean="0">
+                            <a:latin typeface="Cambria Math" panose="02040503050406030204" pitchFamily="18" charset="0"/>
+                          </a:rPr>
+                          <m:t>𝑎</m:t>
+                        </m:r>
+                      </m:sub>
+                    </m:sSub>
+                    <m:r>
+                      <a:rPr lang="es-ES" b="0" i="1" smtClean="0">
+                        <a:latin typeface="Cambria Math" panose="02040503050406030204" pitchFamily="18" charset="0"/>
+                      </a:rPr>
+                      <m:t>=</m:t>
+                    </m:r>
+                    <m:r>
+                      <a:rPr lang="es-ES" i="1">
+                        <a:latin typeface="Cambria Math" panose="02040503050406030204" pitchFamily="18" charset="0"/>
+                        <a:ea typeface="Cambria Math" panose="02040503050406030204" pitchFamily="18" charset="0"/>
+                      </a:rPr>
+                      <m:t>0</m:t>
+                    </m:r>
+                    <m:r>
+                      <a:rPr lang="es-ES" b="0" i="0" smtClean="0">
+                        <a:latin typeface="Cambria Math" panose="02040503050406030204" pitchFamily="18" charset="0"/>
+                        <a:ea typeface="Cambria Math" panose="02040503050406030204" pitchFamily="18" charset="0"/>
+                      </a:rPr>
+                      <m:t>.5</m:t>
+                    </m:r>
+                  </m:oMath>
+                </a14:m>
+                <a:r>
+                  <a:rPr lang="en-US" kern="0" dirty="0">
+                    <a:solidFill>
+                      <a:sysClr val="windowText" lastClr="000000"/>
+                    </a:solidFill>
+                  </a:rPr>
+                  <a:t> and </a:t>
+                </a:r>
+                <a14:m>
+                  <m:oMath xmlns:m="http://schemas.openxmlformats.org/officeDocument/2006/math">
+                    <m:sSub>
+                      <m:sSubPr>
+                        <m:ctrlPr>
+                          <a:rPr lang="es-ES" b="0" i="1" dirty="0" smtClean="0">
+                            <a:latin typeface="Cambria Math" panose="02040503050406030204" pitchFamily="18" charset="0"/>
+                          </a:rPr>
+                        </m:ctrlPr>
+                      </m:sSubPr>
+                      <m:e>
+                        <m:r>
+                          <m:rPr>
+                            <m:sty m:val="p"/>
+                          </m:rPr>
+                          <a:rPr lang="es-ES" i="1" dirty="0">
+                            <a:latin typeface="Cambria Math" panose="02040503050406030204" pitchFamily="18" charset="0"/>
+                          </a:rPr>
+                          <m:t>k</m:t>
+                        </m:r>
+                      </m:e>
+                      <m:sub>
+                        <m:r>
+                          <a:rPr lang="es-ES" b="0" i="1" dirty="0" smtClean="0">
+                            <a:latin typeface="Cambria Math" panose="02040503050406030204" pitchFamily="18" charset="0"/>
+                          </a:rPr>
+                          <m:t>𝑏</m:t>
+                        </m:r>
+                      </m:sub>
+                    </m:sSub>
+                    <m:r>
+                      <a:rPr lang="es-ES" b="0" i="1" smtClean="0">
+                        <a:latin typeface="Cambria Math" panose="02040503050406030204" pitchFamily="18" charset="0"/>
+                      </a:rPr>
+                      <m:t>=</m:t>
+                    </m:r>
+                    <m:r>
+                      <a:rPr lang="es-ES" i="1">
+                        <a:latin typeface="Cambria Math" panose="02040503050406030204" pitchFamily="18" charset="0"/>
+                        <a:ea typeface="Cambria Math" panose="02040503050406030204" pitchFamily="18" charset="0"/>
+                      </a:rPr>
+                      <m:t>0</m:t>
+                    </m:r>
+                    <m:r>
+                      <a:rPr lang="es-ES" b="0" i="1" smtClean="0">
+                        <a:latin typeface="Cambria Math" panose="02040503050406030204" pitchFamily="18" charset="0"/>
+                        <a:ea typeface="Cambria Math" panose="02040503050406030204" pitchFamily="18" charset="0"/>
+                      </a:rPr>
+                      <m:t>.5 </m:t>
+                    </m:r>
+                  </m:oMath>
+                </a14:m>
+                <a:endParaRPr lang="es-ES" dirty="0"/>
+              </a:p>
+            </p:txBody>
+          </p:sp>
+        </mc:Choice>
+        <mc:Fallback xmlns="">
+          <p:sp>
+            <p:nvSpPr>
+              <p:cNvPr id="21" name="CuadroTexto 20">
+                <a:extLst>
+                  <a:ext uri="{FF2B5EF4-FFF2-40B4-BE49-F238E27FC236}">
+                    <a16:creationId xmlns:a16="http://schemas.microsoft.com/office/drawing/2014/main" id="{C62A5441-55EA-B9F5-61C0-7E90E76F676B}"/>
+                  </a:ext>
+                </a:extLst>
+              </p:cNvPr>
+              <p:cNvSpPr txBox="1">
+                <a:spLocks noRot="1" noChangeAspect="1" noMove="1" noResize="1" noEditPoints="1" noAdjustHandles="1" noChangeArrowheads="1" noChangeShapeType="1" noTextEdit="1"/>
+              </p:cNvSpPr>
+              <p:nvPr/>
+            </p:nvSpPr>
+            <p:spPr>
+              <a:xfrm>
+                <a:off x="8395009" y="4097469"/>
+                <a:ext cx="2743200" cy="369332"/>
+              </a:xfrm>
+              <a:prstGeom prst="rect">
+                <a:avLst/>
+              </a:prstGeom>
+              <a:blipFill>
+                <a:blip r:embed="rId13"/>
+                <a:stretch>
+                  <a:fillRect t="-8197" b="-24590"/>
+                </a:stretch>
+              </a:blipFill>
+            </p:spPr>
+            <p:txBody>
+              <a:bodyPr/>
+              <a:lstStyle/>
+              <a:p>
+                <a:r>
+                  <a:rPr lang="es-ES">
+                    <a:noFill/>
+                  </a:rPr>
+                  <a:t> </a:t>
+                </a:r>
+              </a:p>
+            </p:txBody>
+          </p:sp>
+        </mc:Fallback>
+      </mc:AlternateContent>
+      <mc:AlternateContent xmlns:mc="http://schemas.openxmlformats.org/markup-compatibility/2006" xmlns:a14="http://schemas.microsoft.com/office/drawing/2010/main">
+        <mc:Choice Requires="a14">
+          <p:sp>
+            <p:nvSpPr>
+              <p:cNvPr id="22" name="CuadroTexto 21">
+                <a:extLst>
+                  <a:ext uri="{FF2B5EF4-FFF2-40B4-BE49-F238E27FC236}">
+                    <a16:creationId xmlns:a16="http://schemas.microsoft.com/office/drawing/2014/main" id="{70630B19-FD60-577B-3FB2-FD0E400BA254}"/>
+                  </a:ext>
+                </a:extLst>
+              </p:cNvPr>
+              <p:cNvSpPr txBox="1"/>
+              <p:nvPr/>
+            </p:nvSpPr>
+            <p:spPr>
+              <a:xfrm>
+                <a:off x="7937809" y="3720429"/>
+                <a:ext cx="2743200" cy="369332"/>
+              </a:xfrm>
+              <a:prstGeom prst="rect">
+                <a:avLst/>
+              </a:prstGeom>
+              <a:noFill/>
+            </p:spPr>
+            <p:txBody>
+              <a:bodyPr wrap="square" rtlCol="0">
+                <a:spAutoFit/>
+              </a:bodyPr>
+              <a:lstStyle/>
+              <a:p>
+                <a:pPr/>
+                <a14:m>
+                  <m:oMathPara xmlns:m="http://schemas.openxmlformats.org/officeDocument/2006/math">
+                    <m:oMathParaPr>
+                      <m:jc m:val="centerGroup"/>
+                    </m:oMathParaPr>
+                    <m:oMath xmlns:m="http://schemas.openxmlformats.org/officeDocument/2006/math">
+                      <m:sSub>
+                        <m:sSubPr>
+                          <m:ctrlPr>
+                            <a:rPr lang="es-ES" b="0" i="1" smtClean="0">
+                              <a:latin typeface="Cambria Math" panose="02040503050406030204" pitchFamily="18" charset="0"/>
+                            </a:rPr>
+                          </m:ctrlPr>
+                        </m:sSubPr>
+                        <m:e>
+                          <m:r>
+                            <a:rPr lang="es-ES" b="0" i="1" smtClean="0">
+                              <a:latin typeface="Cambria Math" panose="02040503050406030204" pitchFamily="18" charset="0"/>
+                            </a:rPr>
+                            <m:t>𝑛</m:t>
+                          </m:r>
+                          <m:r>
+                            <a:rPr lang="es-ES" b="0" i="1" smtClean="0">
+                              <a:latin typeface="Cambria Math" panose="02040503050406030204" pitchFamily="18" charset="0"/>
+                            </a:rPr>
+                            <m:t>_</m:t>
+                          </m:r>
+                          <m:r>
+                            <a:rPr lang="es-ES" b="0" i="1" smtClean="0">
+                              <a:latin typeface="Cambria Math" panose="02040503050406030204" pitchFamily="18" charset="0"/>
+                            </a:rPr>
+                            <m:t>𝑒𝑓𝑓</m:t>
+                          </m:r>
+                        </m:e>
+                        <m:sub>
+                          <m:r>
+                            <a:rPr lang="es-ES" b="0" i="1" smtClean="0">
+                              <a:latin typeface="Cambria Math" panose="02040503050406030204" pitchFamily="18" charset="0"/>
+                            </a:rPr>
+                            <m:t>𝑢</m:t>
+                          </m:r>
+                          <m:r>
+                            <a:rPr lang="es-ES" b="0" i="1" smtClean="0">
+                              <a:latin typeface="Cambria Math" panose="02040503050406030204" pitchFamily="18" charset="0"/>
+                            </a:rPr>
+                            <m:t> </m:t>
+                          </m:r>
+                        </m:sub>
+                      </m:sSub>
+                      <m:r>
+                        <a:rPr lang="es-ES" b="0" i="1" smtClean="0">
+                          <a:latin typeface="Cambria Math" panose="02040503050406030204" pitchFamily="18" charset="0"/>
+                        </a:rPr>
+                        <m:t>=</m:t>
+                      </m:r>
+                      <m:sSub>
+                        <m:sSubPr>
+                          <m:ctrlPr>
+                            <a:rPr lang="es-ES" i="1">
+                              <a:latin typeface="Cambria Math" panose="02040503050406030204" pitchFamily="18" charset="0"/>
+                            </a:rPr>
+                          </m:ctrlPr>
+                        </m:sSubPr>
+                        <m:e>
+                          <m:r>
+                            <a:rPr lang="es-ES" i="1">
+                              <a:latin typeface="Cambria Math" panose="02040503050406030204" pitchFamily="18" charset="0"/>
+                            </a:rPr>
+                            <m:t>𝑛</m:t>
+                          </m:r>
+                          <m:r>
+                            <a:rPr lang="es-ES" i="1">
+                              <a:latin typeface="Cambria Math" panose="02040503050406030204" pitchFamily="18" charset="0"/>
+                            </a:rPr>
+                            <m:t>_</m:t>
+                          </m:r>
+                          <m:r>
+                            <a:rPr lang="es-ES" i="1">
+                              <a:latin typeface="Cambria Math" panose="02040503050406030204" pitchFamily="18" charset="0"/>
+                            </a:rPr>
+                            <m:t>𝑒𝑓𝑓</m:t>
+                          </m:r>
+                        </m:e>
+                        <m:sub>
+                          <m:r>
+                            <a:rPr lang="es-ES" b="0" i="1" smtClean="0">
+                              <a:latin typeface="Cambria Math" panose="02040503050406030204" pitchFamily="18" charset="0"/>
+                            </a:rPr>
+                            <m:t>𝑙</m:t>
+                          </m:r>
+                        </m:sub>
+                      </m:sSub>
+                    </m:oMath>
+                  </m:oMathPara>
+                </a14:m>
+                <a:endParaRPr lang="es-ES" dirty="0"/>
+              </a:p>
+            </p:txBody>
+          </p:sp>
+        </mc:Choice>
+        <mc:Fallback xmlns="">
+          <p:sp>
+            <p:nvSpPr>
+              <p:cNvPr id="22" name="CuadroTexto 21">
+                <a:extLst>
+                  <a:ext uri="{FF2B5EF4-FFF2-40B4-BE49-F238E27FC236}">
+                    <a16:creationId xmlns:a16="http://schemas.microsoft.com/office/drawing/2014/main" id="{70630B19-FD60-577B-3FB2-FD0E400BA254}"/>
+                  </a:ext>
+                </a:extLst>
+              </p:cNvPr>
+              <p:cNvSpPr txBox="1">
+                <a:spLocks noRot="1" noChangeAspect="1" noMove="1" noResize="1" noEditPoints="1" noAdjustHandles="1" noChangeArrowheads="1" noChangeShapeType="1" noTextEdit="1"/>
+              </p:cNvSpPr>
+              <p:nvPr/>
+            </p:nvSpPr>
+            <p:spPr>
+              <a:xfrm>
+                <a:off x="7937809" y="3720429"/>
+                <a:ext cx="2743200" cy="369332"/>
+              </a:xfrm>
+              <a:prstGeom prst="rect">
+                <a:avLst/>
+              </a:prstGeom>
+              <a:blipFill>
+                <a:blip r:embed="rId14"/>
+                <a:stretch>
+                  <a:fillRect b="-13115"/>
+                </a:stretch>
+              </a:blipFill>
+            </p:spPr>
+            <p:txBody>
+              <a:bodyPr/>
+              <a:lstStyle/>
+              <a:p>
+                <a:r>
+                  <a:rPr lang="es-ES">
+                    <a:noFill/>
+                  </a:rPr>
+                  <a:t> </a:t>
+                </a:r>
+              </a:p>
+            </p:txBody>
+          </p:sp>
+        </mc:Fallback>
+      </mc:AlternateContent>
+      <mc:AlternateContent xmlns:mc="http://schemas.openxmlformats.org/markup-compatibility/2006" xmlns:a14="http://schemas.microsoft.com/office/drawing/2010/main">
+        <mc:Choice Requires="a14">
+          <p:sp>
+            <p:nvSpPr>
+              <p:cNvPr id="23" name="CuadroTexto 22">
+                <a:extLst>
+                  <a:ext uri="{FF2B5EF4-FFF2-40B4-BE49-F238E27FC236}">
+                    <a16:creationId xmlns:a16="http://schemas.microsoft.com/office/drawing/2014/main" id="{C3DC3964-03A9-6F5A-88F3-78E0EC4BB24D}"/>
+                  </a:ext>
+                </a:extLst>
+              </p:cNvPr>
+              <p:cNvSpPr txBox="1"/>
+              <p:nvPr/>
+            </p:nvSpPr>
+            <p:spPr>
+              <a:xfrm>
+                <a:off x="8416359" y="4466801"/>
+                <a:ext cx="2743200" cy="369332"/>
+              </a:xfrm>
+              <a:prstGeom prst="rect">
+                <a:avLst/>
+              </a:prstGeom>
+              <a:noFill/>
+            </p:spPr>
+            <p:txBody>
+              <a:bodyPr wrap="square" rtlCol="0">
+                <a:spAutoFit/>
+              </a:bodyPr>
+              <a:lstStyle/>
+              <a:p>
+                <a14:m>
+                  <m:oMath xmlns:m="http://schemas.openxmlformats.org/officeDocument/2006/math">
+                    <m:sSub>
+                      <m:sSubPr>
+                        <m:ctrlPr>
+                          <a:rPr lang="es-ES" b="0" i="1" smtClean="0">
+                            <a:latin typeface="Cambria Math" panose="02040503050406030204" pitchFamily="18" charset="0"/>
+                          </a:rPr>
+                        </m:ctrlPr>
+                      </m:sSubPr>
+                      <m:e>
+                        <m:r>
+                          <a:rPr lang="es-ES" b="0" i="1" smtClean="0">
+                            <a:latin typeface="Cambria Math" panose="02040503050406030204" pitchFamily="18" charset="0"/>
+                          </a:rPr>
+                          <m:t>𝐿</m:t>
+                        </m:r>
+                      </m:e>
+                      <m:sub>
+                        <m:r>
+                          <a:rPr lang="es-ES" b="0" i="1" smtClean="0">
+                            <a:latin typeface="Cambria Math" panose="02040503050406030204" pitchFamily="18" charset="0"/>
+                          </a:rPr>
+                          <m:t>𝑢</m:t>
+                        </m:r>
+                      </m:sub>
+                    </m:sSub>
+                    <m:r>
+                      <a:rPr lang="es-ES" b="0" i="1" smtClean="0">
+                        <a:latin typeface="Cambria Math" panose="02040503050406030204" pitchFamily="18" charset="0"/>
+                      </a:rPr>
+                      <m:t>=</m:t>
+                    </m:r>
+                    <m:sSub>
+                      <m:sSubPr>
+                        <m:ctrlPr>
+                          <a:rPr lang="es-ES" i="1">
+                            <a:latin typeface="Cambria Math" panose="02040503050406030204" pitchFamily="18" charset="0"/>
+                          </a:rPr>
+                        </m:ctrlPr>
+                      </m:sSubPr>
+                      <m:e>
+                        <m:r>
+                          <a:rPr lang="es-ES" b="0" i="1" smtClean="0">
+                            <a:latin typeface="Cambria Math" panose="02040503050406030204" pitchFamily="18" charset="0"/>
+                          </a:rPr>
+                          <m:t> 25 </m:t>
+                        </m:r>
+                        <m:r>
+                          <a:rPr lang="es-ES" b="0" i="1" smtClean="0">
+                            <a:latin typeface="Cambria Math" panose="02040503050406030204" pitchFamily="18" charset="0"/>
+                          </a:rPr>
+                          <m:t>𝑎𝑛𝑑</m:t>
+                        </m:r>
+                        <m:r>
+                          <a:rPr lang="es-ES" b="0" i="1" smtClean="0">
+                            <a:latin typeface="Cambria Math" panose="02040503050406030204" pitchFamily="18" charset="0"/>
+                          </a:rPr>
+                          <m:t> </m:t>
+                        </m:r>
+                        <m:r>
+                          <a:rPr lang="es-ES" b="0" i="1" smtClean="0">
+                            <a:latin typeface="Cambria Math" panose="02040503050406030204" pitchFamily="18" charset="0"/>
+                          </a:rPr>
+                          <m:t>𝐿</m:t>
+                        </m:r>
+                      </m:e>
+                      <m:sub>
+                        <m:r>
+                          <a:rPr lang="es-ES" b="0" i="1" smtClean="0">
+                            <a:latin typeface="Cambria Math" panose="02040503050406030204" pitchFamily="18" charset="0"/>
+                          </a:rPr>
+                          <m:t>𝑙</m:t>
+                        </m:r>
+                        <m:r>
+                          <a:rPr lang="es-ES" b="0" i="1" smtClean="0">
+                            <a:latin typeface="Cambria Math" panose="02040503050406030204" pitchFamily="18" charset="0"/>
+                          </a:rPr>
+                          <m:t> </m:t>
+                        </m:r>
+                      </m:sub>
+                    </m:sSub>
+                  </m:oMath>
+                </a14:m>
+                <a:r>
+                  <a:rPr lang="es-ES" dirty="0"/>
+                  <a:t> </a:t>
+                </a:r>
+                <a14:m>
+                  <m:oMath xmlns:m="http://schemas.openxmlformats.org/officeDocument/2006/math">
+                    <m:r>
+                      <a:rPr lang="es-ES" i="1">
+                        <a:latin typeface="Cambria Math" panose="02040503050406030204" pitchFamily="18" charset="0"/>
+                      </a:rPr>
+                      <m:t>=</m:t>
+                    </m:r>
+                    <m:r>
+                      <a:rPr lang="es-ES" b="0" i="1" smtClean="0">
+                        <a:latin typeface="Cambria Math" panose="02040503050406030204" pitchFamily="18" charset="0"/>
+                      </a:rPr>
+                      <m:t>5 </m:t>
+                    </m:r>
+                    <m:r>
+                      <a:rPr lang="es-ES" b="0" i="1" smtClean="0">
+                        <a:latin typeface="Cambria Math" panose="02040503050406030204" pitchFamily="18" charset="0"/>
+                      </a:rPr>
+                      <m:t>𝑢𝑚</m:t>
+                    </m:r>
+                  </m:oMath>
+                </a14:m>
+                <a:endParaRPr lang="es-ES" dirty="0"/>
+              </a:p>
+            </p:txBody>
+          </p:sp>
+        </mc:Choice>
+        <mc:Fallback xmlns="">
+          <p:sp>
+            <p:nvSpPr>
+              <p:cNvPr id="23" name="CuadroTexto 22">
+                <a:extLst>
+                  <a:ext uri="{FF2B5EF4-FFF2-40B4-BE49-F238E27FC236}">
+                    <a16:creationId xmlns:a16="http://schemas.microsoft.com/office/drawing/2014/main" id="{C3DC3964-03A9-6F5A-88F3-78E0EC4BB24D}"/>
+                  </a:ext>
+                </a:extLst>
+              </p:cNvPr>
+              <p:cNvSpPr txBox="1">
+                <a:spLocks noRot="1" noChangeAspect="1" noMove="1" noResize="1" noEditPoints="1" noAdjustHandles="1" noChangeArrowheads="1" noChangeShapeType="1" noTextEdit="1"/>
+              </p:cNvSpPr>
+              <p:nvPr/>
+            </p:nvSpPr>
+            <p:spPr>
+              <a:xfrm>
+                <a:off x="8416359" y="4466801"/>
+                <a:ext cx="2743200" cy="369332"/>
+              </a:xfrm>
+              <a:prstGeom prst="rect">
+                <a:avLst/>
+              </a:prstGeom>
+              <a:blipFill>
+                <a:blip r:embed="rId15"/>
+                <a:stretch>
+                  <a:fillRect/>
+                </a:stretch>
+              </a:blipFill>
+            </p:spPr>
+            <p:txBody>
+              <a:bodyPr/>
+              <a:lstStyle/>
+              <a:p>
+                <a:r>
+                  <a:rPr lang="es-ES">
+                    <a:noFill/>
+                  </a:rPr>
+                  <a:t> </a:t>
+                </a:r>
+              </a:p>
+            </p:txBody>
+          </p:sp>
+        </mc:Fallback>
+      </mc:AlternateContent>
+      <p:pic>
+        <p:nvPicPr>
+          <p:cNvPr id="25" name="Imagen 24" descr="Gráfico, Gráfico de líneas&#10;&#10;El contenido generado por IA puede ser incorrecto.">
+            <a:extLst>
+              <a:ext uri="{FF2B5EF4-FFF2-40B4-BE49-F238E27FC236}">
+                <a16:creationId xmlns:a16="http://schemas.microsoft.com/office/drawing/2014/main" id="{CE891E82-02F5-3A1B-4B0F-4202846E23C9}"/>
+              </a:ext>
+            </a:extLst>
+          </p:cNvPr>
+          <p:cNvPicPr>
+            <a:picLocks noChangeAspect="1"/>
+          </p:cNvPicPr>
+          <p:nvPr/>
+        </p:nvPicPr>
+        <p:blipFill>
+          <a:blip r:embed="rId16"/>
+          <a:stretch>
+            <a:fillRect/>
+          </a:stretch>
+        </p:blipFill>
+        <p:spPr>
+          <a:xfrm>
+            <a:off x="568084" y="789925"/>
+            <a:ext cx="3220566" cy="2584404"/>
+          </a:xfrm>
+          <a:prstGeom prst="rect">
+            <a:avLst/>
+          </a:prstGeom>
+        </p:spPr>
+      </p:pic>
+      <p:pic>
+        <p:nvPicPr>
+          <p:cNvPr id="27" name="Imagen 26" descr="Gráfico, Gráfico de líneas&#10;&#10;El contenido generado por IA puede ser incorrecto.">
+            <a:extLst>
+              <a:ext uri="{FF2B5EF4-FFF2-40B4-BE49-F238E27FC236}">
+                <a16:creationId xmlns:a16="http://schemas.microsoft.com/office/drawing/2014/main" id="{D5FD8375-DB21-504E-293C-C1B8D0DFF80A}"/>
+              </a:ext>
+            </a:extLst>
+          </p:cNvPr>
+          <p:cNvPicPr>
+            <a:picLocks noChangeAspect="1"/>
+          </p:cNvPicPr>
+          <p:nvPr/>
+        </p:nvPicPr>
+        <p:blipFill>
+          <a:blip r:embed="rId17"/>
+          <a:stretch>
+            <a:fillRect/>
+          </a:stretch>
+        </p:blipFill>
+        <p:spPr>
+          <a:xfrm>
+            <a:off x="7912543" y="798706"/>
+            <a:ext cx="3295802" cy="2603455"/>
+          </a:xfrm>
+          <a:prstGeom prst="rect">
+            <a:avLst/>
+          </a:prstGeom>
+        </p:spPr>
+      </p:pic>
+    </p:spTree>
+    <p:extLst>
+      <p:ext uri="{BB962C8B-B14F-4D97-AF65-F5344CB8AC3E}">
+        <p14:creationId xmlns:p14="http://schemas.microsoft.com/office/powerpoint/2010/main" val="3303866603"/>
+      </p:ext>
+    </p:extLst>
+  </p:cSld>
+  <p:clrMapOvr>
+    <a:masterClrMapping/>
+  </p:clrMapOvr>
+</p:sld>
+</file>
+
+<file path=ppt/slides/slide7.xml><?xml version="1.0" encoding="utf-8"?>
 <p:sld xmlns:a="http://schemas.openxmlformats.org/drawingml/2006/main" xmlns:r="http://schemas.openxmlformats.org/officeDocument/2006/relationships" xmlns:p="http://schemas.openxmlformats.org/presentationml/2006/main">
   <p:cSld>
     <p:spTree>
@@ -5082,7 +12658,7 @@
           <a:p>
             <a:fld id="{B6F15528-21DE-4FAA-801E-634DDDAF4B2B}" type="slidenum">
               <a:rPr lang="es-ES" smtClean="0"/>
-              <a:t>4</a:t>
+              <a:t>7</a:t>
             </a:fld>
             <a:endParaRPr lang="es-ES"/>
           </a:p>
@@ -5106,8 +12682,8 @@
             </p:nvSpPr>
             <p:spPr>
               <a:xfrm>
-                <a:off x="608012" y="1295400"/>
-                <a:ext cx="11048999" cy="4958137"/>
+                <a:off x="609600" y="746545"/>
+                <a:ext cx="11048999" cy="1077456"/>
               </a:xfrm>
               <a:prstGeom prst="rect">
                 <a:avLst/>
@@ -5184,7 +12760,7 @@
               </a:lstStyle>
               <a:p>
                 <a:r>
-                  <a:rPr lang="en-US" sz="2000" dirty="0"/>
+                  <a:rPr lang="en-US" sz="1600" dirty="0"/>
                   <a:t>Considering the n_{eff} values for the SOI cross-section, what would be the path difference (</a:t>
                 </a:r>
                 <a14:m>
@@ -5193,13 +12769,13 @@
                       <m:rPr>
                         <m:sty m:val="p"/>
                       </m:rPr>
-                      <a:rPr lang="es-ES" sz="2000" b="0" i="0" smtClean="0">
+                      <a:rPr lang="es-ES" sz="1600" b="0" i="0" smtClean="0">
                         <a:latin typeface="Cambria Math" panose="02040503050406030204" pitchFamily="18" charset="0"/>
                       </a:rPr>
                       <m:t>ΔL</m:t>
                     </m:r>
                     <m:r>
-                      <a:rPr lang="es-ES" sz="2000" b="0" i="1" smtClean="0">
+                      <a:rPr lang="es-ES" sz="1600" b="0" i="1" smtClean="0">
                         <a:latin typeface="Cambria Math" panose="02040503050406030204" pitchFamily="18" charset="0"/>
                       </a:rPr>
                       <m:t>= </m:t>
@@ -5207,14 +12783,14 @@
                     <m:sSub>
                       <m:sSubPr>
                         <m:ctrlPr>
-                          <a:rPr lang="es-ES" sz="2000" i="1" smtClean="0">
+                          <a:rPr lang="es-ES" sz="1600" i="1" smtClean="0">
                             <a:latin typeface="Cambria Math" panose="02040503050406030204" pitchFamily="18" charset="0"/>
                           </a:rPr>
                         </m:ctrlPr>
                       </m:sSubPr>
                       <m:e>
                         <m:r>
-                          <a:rPr lang="es-ES" sz="2000" b="0" i="1" smtClean="0">
+                          <a:rPr lang="es-ES" sz="1600" b="0" i="1" smtClean="0">
                             <a:latin typeface="Cambria Math" panose="02040503050406030204" pitchFamily="18" charset="0"/>
                           </a:rPr>
                           <m:t>𝐿</m:t>
@@ -5222,7 +12798,7 @@
                       </m:e>
                       <m:sub>
                         <m:r>
-                          <a:rPr lang="es-ES" sz="2000" b="0" i="1" smtClean="0">
+                          <a:rPr lang="es-ES" sz="1600" b="0" i="1" smtClean="0">
                             <a:latin typeface="Cambria Math" panose="02040503050406030204" pitchFamily="18" charset="0"/>
                           </a:rPr>
                           <m:t>𝑢</m:t>
@@ -5230,7 +12806,7 @@
                       </m:sub>
                     </m:sSub>
                     <m:r>
-                      <a:rPr lang="es-ES" sz="2000" b="0" i="1" smtClean="0">
+                      <a:rPr lang="es-ES" sz="1600" b="0" i="1" smtClean="0">
                         <a:latin typeface="Cambria Math" panose="02040503050406030204" pitchFamily="18" charset="0"/>
                       </a:rPr>
                       <m:t> −</m:t>
@@ -5238,14 +12814,14 @@
                     <m:sSub>
                       <m:sSubPr>
                         <m:ctrlPr>
-                          <a:rPr lang="es-ES" sz="2000" i="1">
+                          <a:rPr lang="es-ES" sz="1600" i="1">
                             <a:latin typeface="Cambria Math" panose="02040503050406030204" pitchFamily="18" charset="0"/>
                           </a:rPr>
                         </m:ctrlPr>
                       </m:sSubPr>
                       <m:e>
                         <m:r>
-                          <a:rPr lang="es-ES" sz="2000" b="0" i="1">
+                          <a:rPr lang="es-ES" sz="1600" b="0" i="1">
                             <a:latin typeface="Cambria Math" panose="02040503050406030204" pitchFamily="18" charset="0"/>
                           </a:rPr>
                           <m:t>𝐿</m:t>
@@ -5253,7 +12829,7 @@
                       </m:e>
                       <m:sub>
                         <m:r>
-                          <a:rPr lang="es-ES" sz="2000" b="0" i="1" smtClean="0">
+                          <a:rPr lang="es-ES" sz="1600" b="0" i="1" smtClean="0">
                             <a:latin typeface="Cambria Math" panose="02040503050406030204" pitchFamily="18" charset="0"/>
                           </a:rPr>
                           <m:t>𝑑</m:t>
@@ -5263,16 +12839,16 @@
                   </m:oMath>
                 </a14:m>
                 <a:r>
-                  <a:rPr lang="en-US" sz="2000" dirty="0"/>
+                  <a:rPr lang="en-US" sz="1600" dirty="0"/>
                   <a:t>) needed to obtain a Free Spectral Range of 40 nm? Introduce the obtained value in the model to check the MZI response. </a:t>
                 </a:r>
               </a:p>
               <a:p>
-                <a:endParaRPr lang="en-US" sz="2000" dirty="0"/>
+                <a:endParaRPr lang="en-US" sz="1600" dirty="0"/>
               </a:p>
               <a:p>
                 <a:r>
-                  <a:rPr lang="en-US" sz="2000" dirty="0"/>
+                  <a:rPr lang="en-US" sz="1600" dirty="0"/>
                   <a:t>Hint: We assume 1550 nm as the central design wavelength (</a:t>
                 </a:r>
                 <a14:m>
@@ -5280,14 +12856,14 @@
                     <m:sSub>
                       <m:sSubPr>
                         <m:ctrlPr>
-                          <a:rPr lang="es-ES" sz="2000" i="1" smtClean="0">
+                          <a:rPr lang="es-ES" sz="1600" i="1" smtClean="0">
                             <a:latin typeface="Cambria Math" panose="02040503050406030204" pitchFamily="18" charset="0"/>
                           </a:rPr>
                         </m:ctrlPr>
                       </m:sSubPr>
                       <m:e>
                         <m:r>
-                          <a:rPr lang="es-ES" sz="2000" i="1">
+                          <a:rPr lang="es-ES" sz="1600" i="1">
                             <a:latin typeface="Cambria Math" panose="02040503050406030204" pitchFamily="18" charset="0"/>
                           </a:rPr>
                           <m:t>𝜆</m:t>
@@ -5295,7 +12871,7 @@
                       </m:e>
                       <m:sub>
                         <m:r>
-                          <a:rPr lang="es-ES" sz="2000" b="0" i="1" smtClean="0">
+                          <a:rPr lang="es-ES" sz="1600" b="0" i="1" smtClean="0">
                             <a:latin typeface="Cambria Math" panose="02040503050406030204" pitchFamily="18" charset="0"/>
                           </a:rPr>
                           <m:t>0</m:t>
@@ -5303,7 +12879,7 @@
                       </m:sub>
                     </m:sSub>
                     <m:r>
-                      <a:rPr lang="es-ES" sz="2000" b="0" i="1" smtClean="0">
+                      <a:rPr lang="es-ES" sz="1600" b="0" i="1" smtClean="0">
                         <a:latin typeface="Cambria Math" panose="02040503050406030204" pitchFamily="18" charset="0"/>
                       </a:rPr>
                       <m:t>= </m:t>
@@ -5311,7 +12887,7 @@
                   </m:oMath>
                 </a14:m>
                 <a:r>
-                  <a:rPr lang="en-US" sz="2000" dirty="0"/>
+                  <a:rPr lang="en-US" sz="1600" dirty="0"/>
                   <a:t>1550 nm).</a:t>
                 </a:r>
               </a:p>
@@ -5361,8 +12937,8 @@
             </p:nvSpPr>
             <p:spPr>
               <a:xfrm>
-                <a:off x="608012" y="1295400"/>
-                <a:ext cx="11048999" cy="4958137"/>
+                <a:off x="609600" y="746545"/>
+                <a:ext cx="11048999" cy="1077456"/>
               </a:xfrm>
               <a:prstGeom prst="rect">
                 <a:avLst/>
@@ -5370,7 +12946,7 @@
               <a:blipFill>
                 <a:blip r:embed="rId6"/>
                 <a:stretch>
-                  <a:fillRect l="-607" t="-738"/>
+                  <a:fillRect l="-276" t="-1695" b="-6215"/>
                 </a:stretch>
               </a:blipFill>
             </p:spPr>
@@ -5389,96 +12965,156 @@
           </p:sp>
         </mc:Fallback>
       </mc:AlternateContent>
-      <p:sp>
-        <p:nvSpPr>
-          <p:cNvPr id="2" name="CuadroTexto 1">
-            <a:extLst>
-              <a:ext uri="{FF2B5EF4-FFF2-40B4-BE49-F238E27FC236}">
-                <a16:creationId xmlns:a16="http://schemas.microsoft.com/office/drawing/2014/main" id="{CFDBBA6B-3646-055F-7A9C-EE01830137BE}"/>
-              </a:ext>
-            </a:extLst>
-          </p:cNvPr>
-          <p:cNvSpPr txBox="1"/>
-          <p:nvPr/>
-        </p:nvSpPr>
-        <p:spPr>
-          <a:xfrm>
-            <a:off x="609441" y="4860334"/>
-            <a:ext cx="11199971" cy="1384995"/>
-          </a:xfrm>
-          <a:prstGeom prst="rect">
-            <a:avLst/>
-          </a:prstGeom>
-          <a:solidFill>
-            <a:schemeClr val="bg1">
-              <a:lumMod val="95000"/>
-            </a:schemeClr>
-          </a:solidFill>
-          <a:ln w="28575">
-            <a:solidFill>
-              <a:srgbClr val="E0700D"/>
-            </a:solidFill>
-          </a:ln>
-        </p:spPr>
-        <p:txBody>
-          <a:bodyPr wrap="square" rtlCol="0">
-            <a:spAutoFit/>
-          </a:bodyPr>
-          <a:lstStyle/>
-          <a:p>
-            <a:pPr algn="just"/>
-            <a:r>
-              <a:rPr lang="en-US" sz="1200" dirty="0">
-                <a:latin typeface="Arial" panose="020B0604020202020204" pitchFamily="34" charset="0"/>
-                <a:cs typeface="Arial" panose="020B0604020202020204" pitchFamily="34" charset="0"/>
-              </a:rPr>
-              <a:t>Document all your results (copy here the code employed to obtain the corresponding value)</a:t>
-            </a:r>
-          </a:p>
-          <a:p>
-            <a:pPr algn="just"/>
-            <a:endParaRPr lang="en-US" sz="1200" dirty="0">
-              <a:latin typeface="Arial" panose="020B0604020202020204" pitchFamily="34" charset="0"/>
-              <a:cs typeface="Arial" panose="020B0604020202020204" pitchFamily="34" charset="0"/>
-            </a:endParaRPr>
-          </a:p>
-          <a:p>
-            <a:pPr algn="just"/>
-            <a:endParaRPr lang="en-US" sz="1200" dirty="0">
-              <a:latin typeface="Arial" panose="020B0604020202020204" pitchFamily="34" charset="0"/>
-              <a:cs typeface="Arial" panose="020B0604020202020204" pitchFamily="34" charset="0"/>
-            </a:endParaRPr>
-          </a:p>
-          <a:p>
-            <a:pPr algn="just"/>
-            <a:endParaRPr lang="en-US" sz="1200" dirty="0">
-              <a:latin typeface="Arial" panose="020B0604020202020204" pitchFamily="34" charset="0"/>
-              <a:cs typeface="Arial" panose="020B0604020202020204" pitchFamily="34" charset="0"/>
-            </a:endParaRPr>
-          </a:p>
-          <a:p>
-            <a:pPr algn="just"/>
-            <a:endParaRPr lang="en-US" sz="1200" dirty="0">
-              <a:latin typeface="Arial" panose="020B0604020202020204" pitchFamily="34" charset="0"/>
-              <a:cs typeface="Arial" panose="020B0604020202020204" pitchFamily="34" charset="0"/>
-            </a:endParaRPr>
-          </a:p>
-          <a:p>
-            <a:pPr algn="just"/>
-            <a:endParaRPr lang="en-US" sz="1200" dirty="0">
-              <a:latin typeface="Arial" panose="020B0604020202020204" pitchFamily="34" charset="0"/>
-              <a:cs typeface="Arial" panose="020B0604020202020204" pitchFamily="34" charset="0"/>
-            </a:endParaRPr>
-          </a:p>
-          <a:p>
-            <a:pPr algn="just"/>
-            <a:endParaRPr lang="en-US" sz="1200" dirty="0">
-              <a:latin typeface="Arial" panose="020B0604020202020204" pitchFamily="34" charset="0"/>
-              <a:cs typeface="Arial" panose="020B0604020202020204" pitchFamily="34" charset="0"/>
-            </a:endParaRPr>
-          </a:p>
-        </p:txBody>
-      </p:sp>
+      <mc:AlternateContent xmlns:mc="http://schemas.openxmlformats.org/markup-compatibility/2006" xmlns:a14="http://schemas.microsoft.com/office/drawing/2010/main">
+        <mc:Choice Requires="a14">
+          <p:sp>
+            <p:nvSpPr>
+              <p:cNvPr id="2" name="CuadroTexto 1">
+                <a:extLst>
+                  <a:ext uri="{FF2B5EF4-FFF2-40B4-BE49-F238E27FC236}">
+                    <a16:creationId xmlns:a16="http://schemas.microsoft.com/office/drawing/2014/main" id="{CFDBBA6B-3646-055F-7A9C-EE01830137BE}"/>
+                  </a:ext>
+                </a:extLst>
+              </p:cNvPr>
+              <p:cNvSpPr txBox="1"/>
+              <p:nvPr/>
+            </p:nvSpPr>
+            <p:spPr>
+              <a:xfrm>
+                <a:off x="745873" y="5285958"/>
+                <a:ext cx="2334429" cy="769441"/>
+              </a:xfrm>
+              <a:prstGeom prst="rect">
+                <a:avLst/>
+              </a:prstGeom>
+              <a:solidFill>
+                <a:schemeClr val="bg1">
+                  <a:lumMod val="95000"/>
+                </a:schemeClr>
+              </a:solidFill>
+              <a:ln w="28575">
+                <a:solidFill>
+                  <a:srgbClr val="E0700D"/>
+                </a:solidFill>
+              </a:ln>
+            </p:spPr>
+            <p:txBody>
+              <a:bodyPr wrap="square" rtlCol="0">
+                <a:spAutoFit/>
+              </a:bodyPr>
+              <a:lstStyle/>
+              <a:p>
+                <a:pPr algn="just"/>
+                <a:endParaRPr lang="es-ES" sz="1400" dirty="0">
+                  <a:latin typeface="Cambria Math" panose="02040503050406030204" pitchFamily="18" charset="0"/>
+                </a:endParaRPr>
+              </a:p>
+              <a:p>
+                <a:pPr algn="just"/>
+                <a14:m>
+                  <m:oMathPara xmlns:m="http://schemas.openxmlformats.org/officeDocument/2006/math">
+                    <m:oMathParaPr>
+                      <m:jc m:val="center"/>
+                    </m:oMathParaPr>
+                    <m:oMath xmlns:m="http://schemas.openxmlformats.org/officeDocument/2006/math">
+                      <m:r>
+                        <m:rPr>
+                          <m:sty m:val="p"/>
+                        </m:rPr>
+                        <a:rPr lang="es-ES">
+                          <a:latin typeface="Cambria Math" panose="02040503050406030204" pitchFamily="18" charset="0"/>
+                        </a:rPr>
+                        <m:t>ΔL</m:t>
+                      </m:r>
+                      <m:r>
+                        <a:rPr lang="es-ES" b="0" i="1" smtClean="0">
+                          <a:latin typeface="Cambria Math" panose="02040503050406030204" pitchFamily="18" charset="0"/>
+                        </a:rPr>
+                        <m:t>=14.026 </m:t>
+                      </m:r>
+                      <m:r>
+                        <m:rPr>
+                          <m:sty m:val="p"/>
+                        </m:rPr>
+                        <a:rPr lang="el-GR" b="0" i="1" smtClean="0">
+                          <a:latin typeface="Cambria Math" panose="02040503050406030204" pitchFamily="18" charset="0"/>
+                        </a:rPr>
+                        <m:t>μ</m:t>
+                      </m:r>
+                      <m:r>
+                        <a:rPr lang="es-ES" b="0" i="1" smtClean="0">
+                          <a:latin typeface="Cambria Math" panose="02040503050406030204" pitchFamily="18" charset="0"/>
+                        </a:rPr>
+                        <m:t>𝑚</m:t>
+                      </m:r>
+                    </m:oMath>
+                  </m:oMathPara>
+                </a14:m>
+                <a:endParaRPr lang="en-US" sz="1600" dirty="0">
+                  <a:latin typeface="Arial" panose="020B0604020202020204" pitchFamily="34" charset="0"/>
+                  <a:cs typeface="Arial" panose="020B0604020202020204" pitchFamily="34" charset="0"/>
+                </a:endParaRPr>
+              </a:p>
+              <a:p>
+                <a:pPr algn="just"/>
+                <a:endParaRPr lang="en-US" sz="1200" dirty="0">
+                  <a:latin typeface="Arial" panose="020B0604020202020204" pitchFamily="34" charset="0"/>
+                  <a:cs typeface="Arial" panose="020B0604020202020204" pitchFamily="34" charset="0"/>
+                </a:endParaRPr>
+              </a:p>
+            </p:txBody>
+          </p:sp>
+        </mc:Choice>
+        <mc:Fallback xmlns="">
+          <p:sp>
+            <p:nvSpPr>
+              <p:cNvPr id="2" name="CuadroTexto 1">
+                <a:extLst>
+                  <a:ext uri="{FF2B5EF4-FFF2-40B4-BE49-F238E27FC236}">
+                    <a16:creationId xmlns:a16="http://schemas.microsoft.com/office/drawing/2014/main" id="{CFDBBA6B-3646-055F-7A9C-EE01830137BE}"/>
+                  </a:ext>
+                </a:extLst>
+              </p:cNvPr>
+              <p:cNvSpPr txBox="1">
+                <a:spLocks noRot="1" noChangeAspect="1" noMove="1" noResize="1" noEditPoints="1" noAdjustHandles="1" noChangeArrowheads="1" noChangeShapeType="1" noTextEdit="1"/>
+              </p:cNvSpPr>
+              <p:nvPr/>
+            </p:nvSpPr>
+            <p:spPr>
+              <a:xfrm>
+                <a:off x="745873" y="5285958"/>
+                <a:ext cx="2334429" cy="769441"/>
+              </a:xfrm>
+              <a:prstGeom prst="rect">
+                <a:avLst/>
+              </a:prstGeom>
+              <a:blipFill>
+                <a:blip r:embed="rId7"/>
+                <a:stretch>
+                  <a:fillRect/>
+                </a:stretch>
+              </a:blipFill>
+              <a:ln w="28575">
+                <a:solidFill>
+                  <a:srgbClr val="E0700D"/>
+                </a:solidFill>
+              </a:ln>
+            </p:spPr>
+            <p:txBody>
+              <a:bodyPr/>
+              <a:lstStyle/>
+              <a:p>
+                <a:r>
+                  <a:rPr lang="es-ES">
+                    <a:noFill/>
+                  </a:rPr>
+                  <a:t> </a:t>
+                </a:r>
+              </a:p>
+            </p:txBody>
+          </p:sp>
+        </mc:Fallback>
+      </mc:AlternateContent>
       <p:sp>
         <p:nvSpPr>
           <p:cNvPr id="5" name="Marcador de pie de página 2">
@@ -5518,6 +13154,66 @@
           </a:p>
         </p:txBody>
       </p:sp>
+      <p:pic>
+        <p:nvPicPr>
+          <p:cNvPr id="10" name="Imagen 9">
+            <a:extLst>
+              <a:ext uri="{FF2B5EF4-FFF2-40B4-BE49-F238E27FC236}">
+                <a16:creationId xmlns:a16="http://schemas.microsoft.com/office/drawing/2014/main" id="{07A4328D-08FF-B9FC-443B-1C07DC0F9E9A}"/>
+              </a:ext>
+            </a:extLst>
+          </p:cNvPr>
+          <p:cNvPicPr>
+            <a:picLocks noChangeAspect="1"/>
+          </p:cNvPicPr>
+          <p:nvPr/>
+        </p:nvPicPr>
+        <p:blipFill>
+          <a:blip r:embed="rId8"/>
+          <a:stretch>
+            <a:fillRect/>
+          </a:stretch>
+        </p:blipFill>
+        <p:spPr>
+          <a:xfrm>
+            <a:off x="745873" y="2033324"/>
+            <a:ext cx="5213854" cy="3043311"/>
+          </a:xfrm>
+          <a:prstGeom prst="rect">
+            <a:avLst/>
+          </a:prstGeom>
+        </p:spPr>
+      </p:pic>
+      <p:pic>
+        <p:nvPicPr>
+          <p:cNvPr id="12" name="Imagen 11">
+            <a:extLst>
+              <a:ext uri="{FF2B5EF4-FFF2-40B4-BE49-F238E27FC236}">
+                <a16:creationId xmlns:a16="http://schemas.microsoft.com/office/drawing/2014/main" id="{A35FBD61-2A25-FB5D-54C5-EAE21910EAB3}"/>
+              </a:ext>
+            </a:extLst>
+          </p:cNvPr>
+          <p:cNvPicPr>
+            <a:picLocks noChangeAspect="1"/>
+          </p:cNvPicPr>
+          <p:nvPr/>
+        </p:nvPicPr>
+        <p:blipFill>
+          <a:blip r:embed="rId9"/>
+          <a:stretch>
+            <a:fillRect/>
+          </a:stretch>
+        </p:blipFill>
+        <p:spPr>
+          <a:xfrm>
+            <a:off x="6532874" y="1981200"/>
+            <a:ext cx="4899936" cy="3932047"/>
+          </a:xfrm>
+          <a:prstGeom prst="rect">
+            <a:avLst/>
+          </a:prstGeom>
+        </p:spPr>
+      </p:pic>
     </p:spTree>
     <p:extLst>
       <p:ext uri="{BB962C8B-B14F-4D97-AF65-F5344CB8AC3E}">
@@ -5531,7 +13227,7 @@
 </p:sld>
 </file>
 
-<file path=ppt/slides/slide5.xml><?xml version="1.0" encoding="utf-8"?>
+<file path=ppt/slides/slide8.xml><?xml version="1.0" encoding="utf-8"?>
 <p:sld xmlns:a="http://schemas.openxmlformats.org/drawingml/2006/main" xmlns:r="http://schemas.openxmlformats.org/officeDocument/2006/relationships" xmlns:p="http://schemas.openxmlformats.org/presentationml/2006/main">
   <p:cSld>
     <p:spTree>
@@ -5673,7 +13369,7 @@
           <a:p>
             <a:fld id="{B6F15528-21DE-4FAA-801E-634DDDAF4B2B}" type="slidenum">
               <a:rPr lang="es-ES" smtClean="0"/>
-              <a:t>5</a:t>
+              <a:t>8</a:t>
             </a:fld>
             <a:endParaRPr lang="es-ES"/>
           </a:p>
@@ -6259,436 +13955,7 @@
 </p:sld>
 </file>
 
-<file path=ppt/slides/slide6.xml><?xml version="1.0" encoding="utf-8"?>
-<p:sld xmlns:a="http://schemas.openxmlformats.org/drawingml/2006/main" xmlns:r="http://schemas.openxmlformats.org/officeDocument/2006/relationships" xmlns:p="http://schemas.openxmlformats.org/presentationml/2006/main">
-  <p:cSld>
-    <p:spTree>
-      <p:nvGrpSpPr>
-        <p:cNvPr id="1" name="">
-          <a:extLst>
-            <a:ext uri="{FF2B5EF4-FFF2-40B4-BE49-F238E27FC236}">
-              <a16:creationId xmlns:a16="http://schemas.microsoft.com/office/drawing/2014/main" id="{25434E70-43B1-3881-1771-20FB4358471D}"/>
-            </a:ext>
-          </a:extLst>
-        </p:cNvPr>
-        <p:cNvGrpSpPr/>
-        <p:nvPr/>
-      </p:nvGrpSpPr>
-      <p:grpSpPr>
-        <a:xfrm>
-          <a:off x="0" y="0"/>
-          <a:ext cx="0" cy="0"/>
-          <a:chOff x="0" y="0"/>
-          <a:chExt cx="0" cy="0"/>
-        </a:xfrm>
-      </p:grpSpPr>
-      <p:sp>
-        <p:nvSpPr>
-          <p:cNvPr id="16" name="object 16">
-            <a:extLst>
-              <a:ext uri="{FF2B5EF4-FFF2-40B4-BE49-F238E27FC236}">
-                <a16:creationId xmlns:a16="http://schemas.microsoft.com/office/drawing/2014/main" id="{742C31CE-19F0-B995-0997-9A2D6A879BF7}"/>
-              </a:ext>
-            </a:extLst>
-          </p:cNvPr>
-          <p:cNvSpPr txBox="1">
-            <a:spLocks noGrp="1"/>
-          </p:cNvSpPr>
-          <p:nvPr>
-            <p:ph type="title"/>
-          </p:nvPr>
-        </p:nvSpPr>
-        <p:spPr>
-          <a:xfrm>
-            <a:off x="685800" y="408883"/>
-            <a:ext cx="10994410" cy="397545"/>
-          </a:xfrm>
-          <a:prstGeom prst="rect">
-            <a:avLst/>
-          </a:prstGeom>
-        </p:spPr>
-        <p:txBody>
-          <a:bodyPr vert="horz" wrap="square" lIns="0" tIns="12700" rIns="0" bIns="0" rtlCol="0">
-            <a:spAutoFit/>
-          </a:bodyPr>
-          <a:lstStyle/>
-          <a:p>
-            <a:pPr marL="12700">
-              <a:lnSpc>
-                <a:spcPct val="100000"/>
-              </a:lnSpc>
-              <a:spcBef>
-                <a:spcPts val="100"/>
-              </a:spcBef>
-            </a:pPr>
-            <a:r>
-              <a:rPr lang="en-US" sz="2500" dirty="0"/>
-              <a:t>Extra assessments </a:t>
-            </a:r>
-            <a:endParaRPr lang="en-US" sz="2500" b="0" dirty="0">
-              <a:latin typeface="+mj-lt"/>
-              <a:cs typeface="Lucida Sans"/>
-            </a:endParaRPr>
-          </a:p>
-        </p:txBody>
-      </p:sp>
-      <p:pic>
-        <p:nvPicPr>
-          <p:cNvPr id="83" name="Gráfico 82">
-            <a:extLst>
-              <a:ext uri="{FF2B5EF4-FFF2-40B4-BE49-F238E27FC236}">
-                <a16:creationId xmlns:a16="http://schemas.microsoft.com/office/drawing/2014/main" id="{D688A609-F3DC-EE34-C536-683E70F32EAE}"/>
-              </a:ext>
-            </a:extLst>
-          </p:cNvPr>
-          <p:cNvPicPr>
-            <a:picLocks noChangeAspect="1"/>
-          </p:cNvPicPr>
-          <p:nvPr/>
-        </p:nvPicPr>
-        <p:blipFill>
-          <a:blip r:embed="rId3">
-            <a:extLst>
-              <a:ext uri="{96DAC541-7B7A-43D3-8B79-37D633B846F1}">
-                <asvg:svgBlip xmlns:asvg="http://schemas.microsoft.com/office/drawing/2016/SVG/main" r:embed="rId4"/>
-              </a:ext>
-            </a:extLst>
-          </a:blip>
-          <a:stretch>
-            <a:fillRect/>
-          </a:stretch>
-        </p:blipFill>
-        <p:spPr>
-          <a:xfrm>
-            <a:off x="5045006" y="6356057"/>
-            <a:ext cx="6409575" cy="363174"/>
-          </a:xfrm>
-          <a:prstGeom prst="rect">
-            <a:avLst/>
-          </a:prstGeom>
-        </p:spPr>
-      </p:pic>
-      <p:sp>
-        <p:nvSpPr>
-          <p:cNvPr id="84" name="Marcador de número de diapositiva 83">
-            <a:extLst>
-              <a:ext uri="{FF2B5EF4-FFF2-40B4-BE49-F238E27FC236}">
-                <a16:creationId xmlns:a16="http://schemas.microsoft.com/office/drawing/2014/main" id="{B6C672C6-89D4-7E67-2B94-811D081786A7}"/>
-              </a:ext>
-            </a:extLst>
-          </p:cNvPr>
-          <p:cNvSpPr>
-            <a:spLocks noGrp="1"/>
-          </p:cNvSpPr>
-          <p:nvPr>
-            <p:ph type="sldNum" sz="quarter" idx="7"/>
-          </p:nvPr>
-        </p:nvSpPr>
-        <p:spPr/>
-        <p:txBody>
-          <a:bodyPr/>
-          <a:lstStyle/>
-          <a:p>
-            <a:fld id="{B6F15528-21DE-4FAA-801E-634DDDAF4B2B}" type="slidenum">
-              <a:rPr lang="es-ES" smtClean="0"/>
-              <a:t>6</a:t>
-            </a:fld>
-            <a:endParaRPr lang="es-ES"/>
-          </a:p>
-        </p:txBody>
-      </p:sp>
-      <p:sp>
-        <p:nvSpPr>
-          <p:cNvPr id="4" name="Marcador de texto 2">
-            <a:extLst>
-              <a:ext uri="{FF2B5EF4-FFF2-40B4-BE49-F238E27FC236}">
-                <a16:creationId xmlns:a16="http://schemas.microsoft.com/office/drawing/2014/main" id="{D838A93A-BFC8-0124-93CE-FDC193435A0C}"/>
-              </a:ext>
-            </a:extLst>
-          </p:cNvPr>
-          <p:cNvSpPr txBox="1">
-            <a:spLocks/>
-          </p:cNvSpPr>
-          <p:nvPr/>
-        </p:nvSpPr>
-        <p:spPr>
-          <a:xfrm>
-            <a:off x="608012" y="1295400"/>
-            <a:ext cx="11048999" cy="4958137"/>
-          </a:xfrm>
-          <a:prstGeom prst="rect">
-            <a:avLst/>
-          </a:prstGeom>
-        </p:spPr>
-        <p:txBody>
-          <a:bodyPr>
-            <a:normAutofit/>
-          </a:bodyPr>
-          <a:lstStyle>
-            <a:lvl1pPr marL="0">
-              <a:defRPr>
-                <a:latin typeface="+mn-lt"/>
-                <a:ea typeface="+mn-ea"/>
-                <a:cs typeface="+mn-cs"/>
-              </a:defRPr>
-            </a:lvl1pPr>
-            <a:lvl2pPr marL="457200">
-              <a:defRPr>
-                <a:latin typeface="+mn-lt"/>
-                <a:ea typeface="+mn-ea"/>
-                <a:cs typeface="+mn-cs"/>
-              </a:defRPr>
-            </a:lvl2pPr>
-            <a:lvl3pPr marL="914400">
-              <a:defRPr>
-                <a:latin typeface="+mn-lt"/>
-                <a:ea typeface="+mn-ea"/>
-                <a:cs typeface="+mn-cs"/>
-              </a:defRPr>
-            </a:lvl3pPr>
-            <a:lvl4pPr marL="1371600">
-              <a:defRPr>
-                <a:latin typeface="+mn-lt"/>
-                <a:ea typeface="+mn-ea"/>
-                <a:cs typeface="+mn-cs"/>
-              </a:defRPr>
-            </a:lvl4pPr>
-            <a:lvl5pPr marL="1828800">
-              <a:defRPr>
-                <a:latin typeface="+mn-lt"/>
-                <a:ea typeface="+mn-ea"/>
-                <a:cs typeface="+mn-cs"/>
-              </a:defRPr>
-            </a:lvl5pPr>
-            <a:lvl6pPr marL="2286000">
-              <a:defRPr>
-                <a:latin typeface="+mn-lt"/>
-                <a:ea typeface="+mn-ea"/>
-                <a:cs typeface="+mn-cs"/>
-              </a:defRPr>
-            </a:lvl6pPr>
-            <a:lvl7pPr marL="2743200">
-              <a:defRPr>
-                <a:latin typeface="+mn-lt"/>
-                <a:ea typeface="+mn-ea"/>
-                <a:cs typeface="+mn-cs"/>
-              </a:defRPr>
-            </a:lvl7pPr>
-            <a:lvl8pPr marL="3200400">
-              <a:defRPr>
-                <a:latin typeface="+mn-lt"/>
-                <a:ea typeface="+mn-ea"/>
-                <a:cs typeface="+mn-cs"/>
-              </a:defRPr>
-            </a:lvl8pPr>
-            <a:lvl9pPr marL="3657600">
-              <a:defRPr>
-                <a:latin typeface="+mn-lt"/>
-                <a:ea typeface="+mn-ea"/>
-                <a:cs typeface="+mn-cs"/>
-              </a:defRPr>
-            </a:lvl9pPr>
-          </a:lstStyle>
-          <a:p>
-            <a:pPr marL="0" indent="0">
-              <a:buNone/>
-            </a:pPr>
-            <a:r>
-              <a:rPr lang="en-US" b="1" dirty="0"/>
-              <a:t>Assessment 4</a:t>
-            </a:r>
-            <a:r>
-              <a:rPr lang="en-US" dirty="0"/>
-              <a:t>. Design an MZI for filtering at a specific wavelength. Calculate and adjust the arm lengths to configure the MZI to have a maximum transmission at 1550 nm.</a:t>
-            </a:r>
-          </a:p>
-          <a:p>
-            <a:endParaRPr lang="en-US" b="1" dirty="0"/>
-          </a:p>
-          <a:p>
-            <a:r>
-              <a:rPr lang="en-US" b="1" dirty="0"/>
-              <a:t>Assessment 5. </a:t>
-            </a:r>
-            <a:r>
-              <a:rPr lang="en-US" dirty="0"/>
-              <a:t>Let's see how the response of the MZI varies with the effective index. Vary the effective index of one of the arms and analyze how the spectrum shifts. To do this, you can use the data provided in the .txt files entitled ‘</a:t>
-            </a:r>
-            <a:r>
-              <a:rPr lang="en-US" dirty="0" err="1"/>
-              <a:t>SiN</a:t>
-            </a:r>
-            <a:r>
-              <a:rPr lang="en-US" dirty="0"/>
-              <a:t>’. Can you give an example of an application where this configuration is used?</a:t>
-            </a:r>
-          </a:p>
-          <a:p>
-            <a:pPr marL="0" indent="0">
-              <a:buNone/>
-            </a:pPr>
-            <a:endParaRPr lang="en-US" dirty="0"/>
-          </a:p>
-          <a:p>
-            <a:r>
-              <a:rPr lang="en-US" b="1" dirty="0"/>
-              <a:t>Advanced level assessment.</a:t>
-            </a:r>
-            <a:r>
-              <a:rPr lang="en-US" dirty="0"/>
-              <a:t> Explore how cascading two MZIs affects the transmission spectrum. To do so, design a system in which two MZIs are cascaded. Simulate and observe the spectrum, explaining how the transmission peaks behave</a:t>
-            </a:r>
-            <a:r>
-              <a:rPr lang="en-US" b="1" dirty="0"/>
-              <a:t>.</a:t>
-            </a:r>
-          </a:p>
-          <a:p>
-            <a:pPr algn="just"/>
-            <a:endParaRPr lang="en-US" sz="2000" kern="0" dirty="0">
-              <a:solidFill>
-                <a:sysClr val="windowText" lastClr="000000"/>
-              </a:solidFill>
-            </a:endParaRPr>
-          </a:p>
-        </p:txBody>
-      </p:sp>
-      <p:sp>
-        <p:nvSpPr>
-          <p:cNvPr id="2" name="CuadroTexto 1">
-            <a:extLst>
-              <a:ext uri="{FF2B5EF4-FFF2-40B4-BE49-F238E27FC236}">
-                <a16:creationId xmlns:a16="http://schemas.microsoft.com/office/drawing/2014/main" id="{FDE3A197-9508-F9F1-1FEB-FF883D78C151}"/>
-              </a:ext>
-            </a:extLst>
-          </p:cNvPr>
-          <p:cNvSpPr txBox="1"/>
-          <p:nvPr/>
-        </p:nvSpPr>
-        <p:spPr>
-          <a:xfrm>
-            <a:off x="609441" y="4860334"/>
-            <a:ext cx="11199971" cy="1200329"/>
-          </a:xfrm>
-          <a:prstGeom prst="rect">
-            <a:avLst/>
-          </a:prstGeom>
-          <a:solidFill>
-            <a:schemeClr val="bg1">
-              <a:lumMod val="95000"/>
-            </a:schemeClr>
-          </a:solidFill>
-          <a:ln w="28575">
-            <a:solidFill>
-              <a:srgbClr val="E0700D"/>
-            </a:solidFill>
-          </a:ln>
-        </p:spPr>
-        <p:txBody>
-          <a:bodyPr wrap="square" rtlCol="0">
-            <a:spAutoFit/>
-          </a:bodyPr>
-          <a:lstStyle/>
-          <a:p>
-            <a:pPr algn="just"/>
-            <a:r>
-              <a:rPr lang="en-US" sz="1200" dirty="0">
-                <a:latin typeface="Arial" panose="020B0604020202020204" pitchFamily="34" charset="0"/>
-                <a:cs typeface="Arial" panose="020B0604020202020204" pitchFamily="34" charset="0"/>
-              </a:rPr>
-              <a:t>Document all your results</a:t>
-            </a:r>
-          </a:p>
-          <a:p>
-            <a:pPr algn="just"/>
-            <a:endParaRPr lang="en-US" sz="1200" dirty="0">
-              <a:latin typeface="Arial" panose="020B0604020202020204" pitchFamily="34" charset="0"/>
-              <a:cs typeface="Arial" panose="020B0604020202020204" pitchFamily="34" charset="0"/>
-            </a:endParaRPr>
-          </a:p>
-          <a:p>
-            <a:pPr algn="just"/>
-            <a:endParaRPr lang="en-US" sz="1200" dirty="0">
-              <a:latin typeface="Arial" panose="020B0604020202020204" pitchFamily="34" charset="0"/>
-              <a:cs typeface="Arial" panose="020B0604020202020204" pitchFamily="34" charset="0"/>
-            </a:endParaRPr>
-          </a:p>
-          <a:p>
-            <a:pPr algn="just"/>
-            <a:endParaRPr lang="en-US" sz="1200" dirty="0">
-              <a:latin typeface="Arial" panose="020B0604020202020204" pitchFamily="34" charset="0"/>
-              <a:cs typeface="Arial" panose="020B0604020202020204" pitchFamily="34" charset="0"/>
-            </a:endParaRPr>
-          </a:p>
-          <a:p>
-            <a:pPr algn="just"/>
-            <a:endParaRPr lang="en-US" sz="1200" dirty="0">
-              <a:latin typeface="Arial" panose="020B0604020202020204" pitchFamily="34" charset="0"/>
-              <a:cs typeface="Arial" panose="020B0604020202020204" pitchFamily="34" charset="0"/>
-            </a:endParaRPr>
-          </a:p>
-          <a:p>
-            <a:pPr algn="just"/>
-            <a:endParaRPr lang="en-US" sz="1200" dirty="0">
-              <a:latin typeface="Arial" panose="020B0604020202020204" pitchFamily="34" charset="0"/>
-              <a:cs typeface="Arial" panose="020B0604020202020204" pitchFamily="34" charset="0"/>
-            </a:endParaRPr>
-          </a:p>
-        </p:txBody>
-      </p:sp>
-      <p:sp>
-        <p:nvSpPr>
-          <p:cNvPr id="6" name="Marcador de pie de página 2">
-            <a:extLst>
-              <a:ext uri="{FF2B5EF4-FFF2-40B4-BE49-F238E27FC236}">
-                <a16:creationId xmlns:a16="http://schemas.microsoft.com/office/drawing/2014/main" id="{04C1A7E9-6C33-172D-E7B9-CCF643221E6A}"/>
-              </a:ext>
-            </a:extLst>
-          </p:cNvPr>
-          <p:cNvSpPr>
-            <a:spLocks noGrp="1"/>
-          </p:cNvSpPr>
-          <p:nvPr>
-            <p:ph type="ftr" sz="quarter" idx="5"/>
-          </p:nvPr>
-        </p:nvSpPr>
-        <p:spPr>
-          <a:xfrm>
-            <a:off x="609600" y="6457057"/>
-            <a:ext cx="2743200" cy="184666"/>
-          </a:xfrm>
-        </p:spPr>
-        <p:txBody>
-          <a:bodyPr/>
-          <a:lstStyle/>
-          <a:p>
-            <a:pPr marL="12700">
-              <a:spcBef>
-                <a:spcPts val="15"/>
-              </a:spcBef>
-            </a:pPr>
-            <a:r>
-              <a:rPr lang="es-ES" spc="-5"/>
-              <a:t>LAB 3. INTERFEROMETERS I</a:t>
-            </a:r>
-            <a:endParaRPr lang="es-ES" spc="-5" dirty="0"/>
-          </a:p>
-        </p:txBody>
-      </p:sp>
-    </p:spTree>
-    <p:extLst>
-      <p:ext uri="{BB962C8B-B14F-4D97-AF65-F5344CB8AC3E}">
-        <p14:creationId xmlns:p14="http://schemas.microsoft.com/office/powerpoint/2010/main" val="3660438245"/>
-      </p:ext>
-    </p:extLst>
-  </p:cSld>
-  <p:clrMapOvr>
-    <a:masterClrMapping/>
-  </p:clrMapOvr>
-</p:sld>
-</file>
-
-<file path=ppt/slides/slide7.xml><?xml version="1.0" encoding="utf-8"?>
+<file path=ppt/slides/slide9.xml><?xml version="1.0" encoding="utf-8"?>
 <p:sld xmlns:a="http://schemas.openxmlformats.org/drawingml/2006/main" xmlns:r="http://schemas.openxmlformats.org/officeDocument/2006/relationships" xmlns:p="http://schemas.openxmlformats.org/presentationml/2006/main">
   <p:cSld>
     <p:spTree>
@@ -6707,100 +13974,124 @@
       </p:grpSpPr>
       <p:sp>
         <p:nvSpPr>
-          <p:cNvPr id="3" name="object 3"/>
-          <p:cNvSpPr/>
-          <p:nvPr/>
-        </p:nvSpPr>
-        <p:spPr>
-          <a:xfrm>
-            <a:off x="3945635" y="2636520"/>
-            <a:ext cx="8246363" cy="1584959"/>
-          </a:xfrm>
-          <a:prstGeom prst="rect">
-            <a:avLst/>
-          </a:prstGeom>
-          <a:blipFill>
-            <a:blip r:embed="rId2" cstate="print"/>
-            <a:stretch>
-              <a:fillRect/>
-            </a:stretch>
-          </a:blipFill>
-        </p:spPr>
-        <p:txBody>
-          <a:bodyPr wrap="square" lIns="0" tIns="0" rIns="0" bIns="0" rtlCol="0"/>
-          <a:lstStyle/>
-          <a:p>
-            <a:endParaRPr/>
-          </a:p>
-        </p:txBody>
-      </p:sp>
-      <p:sp>
-        <p:nvSpPr>
-          <p:cNvPr id="4" name="object 4"/>
-          <p:cNvSpPr txBox="1">
+          <p:cNvPr id="2" name="Título 1">
+            <a:extLst>
+              <a:ext uri="{FF2B5EF4-FFF2-40B4-BE49-F238E27FC236}">
+                <a16:creationId xmlns:a16="http://schemas.microsoft.com/office/drawing/2014/main" id="{1A4526AD-3394-1A55-C96E-57132B569994}"/>
+              </a:ext>
+            </a:extLst>
+          </p:cNvPr>
+          <p:cNvSpPr>
             <a:spLocks noGrp="1"/>
           </p:cNvSpPr>
           <p:nvPr>
             <p:ph type="title"/>
           </p:nvPr>
         </p:nvSpPr>
+        <p:spPr/>
+        <p:txBody>
+          <a:bodyPr/>
+          <a:lstStyle/>
+          <a:p>
+            <a:r>
+              <a:rPr lang="es-ES" dirty="0"/>
+              <a:t>3. SAX </a:t>
+            </a:r>
+            <a:r>
+              <a:rPr lang="es-ES" dirty="0" err="1"/>
+              <a:t>implementation</a:t>
+            </a:r>
+            <a:r>
+              <a:rPr lang="es-ES" dirty="0"/>
+              <a:t> vs. </a:t>
+            </a:r>
+            <a:r>
+              <a:rPr lang="es-ES" dirty="0" err="1"/>
+              <a:t>Mathematical</a:t>
+            </a:r>
+            <a:r>
+              <a:rPr lang="es-ES" dirty="0"/>
+              <a:t> </a:t>
+            </a:r>
+            <a:r>
+              <a:rPr lang="es-ES" dirty="0" err="1"/>
+              <a:t>formulation</a:t>
+            </a:r>
+            <a:r>
+              <a:rPr lang="es-ES" dirty="0"/>
+              <a:t> </a:t>
+            </a:r>
+          </a:p>
+        </p:txBody>
+      </p:sp>
+      <p:sp>
+        <p:nvSpPr>
+          <p:cNvPr id="3" name="Marcador de texto 2">
+            <a:extLst>
+              <a:ext uri="{FF2B5EF4-FFF2-40B4-BE49-F238E27FC236}">
+                <a16:creationId xmlns:a16="http://schemas.microsoft.com/office/drawing/2014/main" id="{846CCB11-F7D1-239A-44C5-2133F337CF38}"/>
+              </a:ext>
+            </a:extLst>
+          </p:cNvPr>
+          <p:cNvSpPr>
+            <a:spLocks noGrp="1"/>
+          </p:cNvSpPr>
+          <p:nvPr>
+            <p:ph type="body" idx="1"/>
+          </p:nvPr>
+        </p:nvSpPr>
         <p:spPr>
           <a:xfrm>
-            <a:off x="4513326" y="3165729"/>
-            <a:ext cx="2233295" cy="513715"/>
+            <a:off x="762000" y="5009718"/>
+            <a:ext cx="10972800" cy="553998"/>
           </a:xfrm>
-          <a:prstGeom prst="rect">
-            <a:avLst/>
-          </a:prstGeom>
         </p:spPr>
         <p:txBody>
-          <a:bodyPr vert="horz" wrap="square" lIns="0" tIns="13335" rIns="0" bIns="0" rtlCol="0">
-            <a:spAutoFit/>
-          </a:bodyPr>
+          <a:bodyPr/>
           <a:lstStyle/>
           <a:p>
+            <a:r>
+              <a:rPr lang="es-ES" dirty="0" err="1"/>
+              <a:t>Ciñiendonos</a:t>
+            </a:r>
+            <a:r>
+              <a:rPr lang="es-ES" dirty="0"/>
+              <a:t> a los resultados podemos concluir que la implementación SAX funciona correctamente. No obstante, voy a hacer más simulaciones para comprobar su comportamiento en otras configuraciones. </a:t>
+            </a:r>
+          </a:p>
+        </p:txBody>
+      </p:sp>
+      <p:sp>
+        <p:nvSpPr>
+          <p:cNvPr id="4" name="Marcador de pie de página 3">
+            <a:extLst>
+              <a:ext uri="{FF2B5EF4-FFF2-40B4-BE49-F238E27FC236}">
+                <a16:creationId xmlns:a16="http://schemas.microsoft.com/office/drawing/2014/main" id="{F3C6DC7F-6B79-E076-6A58-DA56E43F3CB7}"/>
+              </a:ext>
+            </a:extLst>
+          </p:cNvPr>
+          <p:cNvSpPr>
+            <a:spLocks noGrp="1"/>
+          </p:cNvSpPr>
+          <p:nvPr>
+            <p:ph type="ftr" sz="quarter" idx="5"/>
+          </p:nvPr>
+        </p:nvSpPr>
+        <p:spPr/>
+        <p:txBody>
+          <a:bodyPr/>
+          <a:lstStyle/>
+          <a:p>
             <a:pPr marL="12700">
-              <a:lnSpc>
-                <a:spcPct val="100000"/>
-              </a:lnSpc>
               <a:spcBef>
-                <a:spcPts val="105"/>
+                <a:spcPts val="15"/>
               </a:spcBef>
             </a:pPr>
             <a:r>
-              <a:rPr sz="3200" b="1" spc="-5" dirty="0">
-                <a:solidFill>
-                  <a:srgbClr val="FFFFFF"/>
-                </a:solidFill>
-                <a:latin typeface="Lucida Sans"/>
-                <a:cs typeface="Lucida Sans"/>
-              </a:rPr>
-              <a:t>Thank</a:t>
-            </a:r>
-            <a:r>
-              <a:rPr sz="3200" b="1" spc="-55" dirty="0">
-                <a:solidFill>
-                  <a:srgbClr val="FFFFFF"/>
-                </a:solidFill>
-                <a:latin typeface="Lucida Sans"/>
-                <a:cs typeface="Lucida Sans"/>
-              </a:rPr>
-              <a:t> </a:t>
-            </a:r>
-            <a:r>
-              <a:rPr sz="3200" b="1" dirty="0">
-                <a:solidFill>
-                  <a:srgbClr val="FFFFFF"/>
-                </a:solidFill>
-                <a:latin typeface="Lucida Sans"/>
-                <a:cs typeface="Lucida Sans"/>
-              </a:rPr>
-              <a:t>you</a:t>
-            </a:r>
-            <a:endParaRPr sz="3200">
-              <a:latin typeface="Lucida Sans"/>
-              <a:cs typeface="Lucida Sans"/>
-            </a:endParaRPr>
+              <a:rPr lang="es-ES" spc="-5"/>
+              <a:t>LAB 3. INTERFEROMETERS I</a:t>
+            </a:r>
+            <a:endParaRPr lang="es-ES" spc="-5" dirty="0"/>
           </a:p>
         </p:txBody>
       </p:sp>
@@ -6809,7 +14100,7 @@
           <p:cNvPr id="5" name="Marcador de número de diapositiva 4">
             <a:extLst>
               <a:ext uri="{FF2B5EF4-FFF2-40B4-BE49-F238E27FC236}">
-                <a16:creationId xmlns:a16="http://schemas.microsoft.com/office/drawing/2014/main" id="{B052DA19-AD24-7D24-2AE9-51F8F5A7F5E0}"/>
+                <a16:creationId xmlns:a16="http://schemas.microsoft.com/office/drawing/2014/main" id="{F281AEB2-6D3D-B0FF-C300-F339568B71C3}"/>
               </a:ext>
             </a:extLst>
           </p:cNvPr>
@@ -6827,13 +14118,138 @@
           <a:p>
             <a:fld id="{B6F15528-21DE-4FAA-801E-634DDDAF4B2B}" type="slidenum">
               <a:rPr lang="es-ES" smtClean="0"/>
-              <a:t>7</a:t>
+              <a:t>9</a:t>
             </a:fld>
             <a:endParaRPr lang="es-ES"/>
           </a:p>
         </p:txBody>
       </p:sp>
+      <p:pic>
+        <p:nvPicPr>
+          <p:cNvPr id="6" name="Imagen 5" descr="Gráfico&#10;&#10;El contenido generado por IA puede ser incorrecto.">
+            <a:extLst>
+              <a:ext uri="{FF2B5EF4-FFF2-40B4-BE49-F238E27FC236}">
+                <a16:creationId xmlns:a16="http://schemas.microsoft.com/office/drawing/2014/main" id="{51C5DFB2-8E47-6AF7-788B-F2DD5D4295F7}"/>
+              </a:ext>
+            </a:extLst>
+          </p:cNvPr>
+          <p:cNvPicPr>
+            <a:picLocks noChangeAspect="1"/>
+          </p:cNvPicPr>
+          <p:nvPr/>
+        </p:nvPicPr>
+        <p:blipFill>
+          <a:blip r:embed="rId2"/>
+          <a:stretch>
+            <a:fillRect/>
+          </a:stretch>
+        </p:blipFill>
+        <p:spPr>
+          <a:xfrm>
+            <a:off x="6248400" y="1309835"/>
+            <a:ext cx="4324140" cy="3469988"/>
+          </a:xfrm>
+          <a:prstGeom prst="rect">
+            <a:avLst/>
+          </a:prstGeom>
+        </p:spPr>
+      </p:pic>
+      <p:sp>
+        <p:nvSpPr>
+          <p:cNvPr id="9" name="Título 1">
+            <a:extLst>
+              <a:ext uri="{FF2B5EF4-FFF2-40B4-BE49-F238E27FC236}">
+                <a16:creationId xmlns:a16="http://schemas.microsoft.com/office/drawing/2014/main" id="{0AD93CDF-7972-7E78-17BF-605A32E561D8}"/>
+              </a:ext>
+            </a:extLst>
+          </p:cNvPr>
+          <p:cNvSpPr txBox="1">
+            <a:spLocks/>
+          </p:cNvSpPr>
+          <p:nvPr/>
+        </p:nvSpPr>
+        <p:spPr>
+          <a:xfrm>
+            <a:off x="838200" y="731787"/>
+            <a:ext cx="10991850" cy="307777"/>
+          </a:xfrm>
+          <a:prstGeom prst="rect">
+            <a:avLst/>
+          </a:prstGeom>
+        </p:spPr>
+        <p:txBody>
+          <a:bodyPr wrap="square" lIns="0" tIns="0" rIns="0" bIns="0">
+            <a:spAutoFit/>
+          </a:bodyPr>
+          <a:lstStyle>
+            <a:lvl1pPr>
+              <a:defRPr sz="2000" b="1" i="0">
+                <a:solidFill>
+                  <a:schemeClr val="tx1"/>
+                </a:solidFill>
+                <a:latin typeface="Calibri"/>
+                <a:ea typeface="+mj-ea"/>
+                <a:cs typeface="Calibri"/>
+              </a:defRPr>
+            </a:lvl1pPr>
+          </a:lstStyle>
+          <a:p>
+            <a:r>
+              <a:rPr lang="es-ES" kern="0" dirty="0"/>
+              <a:t>3.1 </a:t>
+            </a:r>
+            <a:r>
+              <a:rPr lang="es-ES" b="0" kern="0" dirty="0" err="1"/>
+              <a:t>Balanced</a:t>
+            </a:r>
+            <a:r>
+              <a:rPr lang="es-ES" b="0" kern="0" dirty="0"/>
+              <a:t> </a:t>
+            </a:r>
+            <a:r>
+              <a:rPr lang="es-ES" b="0" kern="0" dirty="0" err="1"/>
+              <a:t>configuration</a:t>
+            </a:r>
+            <a:endParaRPr lang="es-ES" kern="0" dirty="0"/>
+          </a:p>
+        </p:txBody>
+      </p:sp>
+      <p:pic>
+        <p:nvPicPr>
+          <p:cNvPr id="11" name="Imagen 10">
+            <a:extLst>
+              <a:ext uri="{FF2B5EF4-FFF2-40B4-BE49-F238E27FC236}">
+                <a16:creationId xmlns:a16="http://schemas.microsoft.com/office/drawing/2014/main" id="{39DD8790-C511-4BC2-B241-B64BC48F5A8A}"/>
+              </a:ext>
+            </a:extLst>
+          </p:cNvPr>
+          <p:cNvPicPr>
+            <a:picLocks noChangeAspect="1"/>
+          </p:cNvPicPr>
+          <p:nvPr/>
+        </p:nvPicPr>
+        <p:blipFill>
+          <a:blip r:embed="rId3"/>
+          <a:stretch>
+            <a:fillRect/>
+          </a:stretch>
+        </p:blipFill>
+        <p:spPr>
+          <a:xfrm>
+            <a:off x="990600" y="1289646"/>
+            <a:ext cx="4324141" cy="3469990"/>
+          </a:xfrm>
+          <a:prstGeom prst="rect">
+            <a:avLst/>
+          </a:prstGeom>
+        </p:spPr>
+      </p:pic>
     </p:spTree>
+    <p:extLst>
+      <p:ext uri="{BB962C8B-B14F-4D97-AF65-F5344CB8AC3E}">
+        <p14:creationId xmlns:p14="http://schemas.microsoft.com/office/powerpoint/2010/main" val="251436511"/>
+      </p:ext>
+    </p:extLst>
   </p:cSld>
   <p:clrMapOvr>
     <a:masterClrMapping/>
